--- a/TrueMarkets_Pitch_Deck.pptx
+++ b/TrueMarkets_Pitch_Deck.pptx
@@ -15,9 +15,11 @@
     <p:sldId id="263" r:id="rId9"/>
     <p:sldId id="264" r:id="rId10"/>
     <p:sldId id="265" r:id="rId11"/>
+    <p:sldId id="266" r:id="rId12"/>
+    <p:sldId id="267" r:id="rId13"/>
   </p:sldIdLst>
   <p:notesMasterIdLst>
-    <p:notesMasterId r:id="rId12"/>
+    <p:notesMasterId r:id="rId14"/>
   </p:notesMasterIdLst>
   <p:sldSz cx="9144000" cy="5143500"/>
   <p:notesSz cx="5143500" cy="9144000"/>
@@ -623,6 +625,182 @@
             <a:fld id="{F7021451-1387-4CA6-816F-3879F97B5CBC}" type="slidenum">
               <a:rPr lang="en-US"/>
               <a:t>10</a:t>
+            </a:fld>
+            <a:endParaRPr lang="en-US"/>
+          </a:p>
+        </p:txBody>
+      </p:sp>
+    </p:spTree>
+    <p:extLst>
+      <p:ext uri="{BB962C8B-B14F-4D97-AF65-F5344CB8AC3E}">
+        <p14:creationId xmlns:p14="http://schemas.microsoft.com/office/powerpoint/2010/main" val="1024086991"/>
+      </p:ext>
+    </p:extLst>
+  </p:cSld>
+  <p:clrMapOvr>
+    <a:masterClrMapping/>
+  </p:clrMapOvr>
+</p:notes>
+</file>
+
+<file path=ppt/notesSlides/notesSlide11.xml><?xml version="1.0" encoding="utf-8"?>
+<p:notes xmlns:a="http://schemas.openxmlformats.org/drawingml/2006/main" xmlns:r="http://schemas.openxmlformats.org/officeDocument/2006/relationships" xmlns:p="http://schemas.openxmlformats.org/presentationml/2006/main">
+  <p:cSld>
+    <p:spTree>
+      <p:nvGrpSpPr>
+        <p:cNvPr id="1" name=""/>
+        <p:cNvGrpSpPr/>
+        <p:nvPr/>
+      </p:nvGrpSpPr>
+      <p:grpSpPr>
+        <a:xfrm>
+          <a:off x="0" y="0"/>
+          <a:ext cx="0" cy="0"/>
+          <a:chOff x="0" y="0"/>
+          <a:chExt cx="0" cy="0"/>
+        </a:xfrm>
+      </p:grpSpPr>
+      <p:sp>
+        <p:nvSpPr>
+          <p:cNvPr id="2" name="Slide Image Placeholder 1"/>
+          <p:cNvSpPr>
+            <a:spLocks noGrp="1" noRot="1" noChangeAspect="1"/>
+          </p:cNvSpPr>
+          <p:nvPr>
+            <p:ph type="sldImg"/>
+          </p:nvPr>
+        </p:nvSpPr>
+        <p:spPr/>
+      </p:sp>
+      <p:sp>
+        <p:nvSpPr>
+          <p:cNvPr id="3" name="Notes Placeholder 2"/>
+          <p:cNvSpPr>
+            <a:spLocks noGrp="1"/>
+          </p:cNvSpPr>
+          <p:nvPr>
+            <p:ph type="body" idx="1"/>
+          </p:nvPr>
+        </p:nvSpPr>
+        <p:spPr/>
+        <p:txBody>
+          <a:bodyPr/>
+          <a:lstStyle/>
+          <a:p>
+            <a:r>
+              <a:rPr lang="en-US" dirty="0"/>
+              <a:t/>
+            </a:r>
+            <a:endParaRPr lang="en-US" dirty="0"/>
+          </a:p>
+        </p:txBody>
+      </p:sp>
+      <p:sp>
+        <p:nvSpPr>
+          <p:cNvPr id="4" name="Slide Number Placeholder 3"/>
+          <p:cNvSpPr>
+            <a:spLocks noGrp="1"/>
+          </p:cNvSpPr>
+          <p:nvPr>
+            <p:ph type="sldNum" sz="quarter" idx="10"/>
+          </p:nvPr>
+        </p:nvSpPr>
+        <p:spPr/>
+        <p:txBody>
+          <a:bodyPr/>
+          <a:lstStyle/>
+          <a:p>
+            <a:fld id="{F7021451-1387-4CA6-816F-3879F97B5CBC}" type="slidenum">
+              <a:rPr lang="en-US"/>
+              <a:t>11</a:t>
+            </a:fld>
+            <a:endParaRPr lang="en-US"/>
+          </a:p>
+        </p:txBody>
+      </p:sp>
+    </p:spTree>
+    <p:extLst>
+      <p:ext uri="{BB962C8B-B14F-4D97-AF65-F5344CB8AC3E}">
+        <p14:creationId xmlns:p14="http://schemas.microsoft.com/office/powerpoint/2010/main" val="1024086991"/>
+      </p:ext>
+    </p:extLst>
+  </p:cSld>
+  <p:clrMapOvr>
+    <a:masterClrMapping/>
+  </p:clrMapOvr>
+</p:notes>
+</file>
+
+<file path=ppt/notesSlides/notesSlide12.xml><?xml version="1.0" encoding="utf-8"?>
+<p:notes xmlns:a="http://schemas.openxmlformats.org/drawingml/2006/main" xmlns:r="http://schemas.openxmlformats.org/officeDocument/2006/relationships" xmlns:p="http://schemas.openxmlformats.org/presentationml/2006/main">
+  <p:cSld>
+    <p:spTree>
+      <p:nvGrpSpPr>
+        <p:cNvPr id="1" name=""/>
+        <p:cNvGrpSpPr/>
+        <p:nvPr/>
+      </p:nvGrpSpPr>
+      <p:grpSpPr>
+        <a:xfrm>
+          <a:off x="0" y="0"/>
+          <a:ext cx="0" cy="0"/>
+          <a:chOff x="0" y="0"/>
+          <a:chExt cx="0" cy="0"/>
+        </a:xfrm>
+      </p:grpSpPr>
+      <p:sp>
+        <p:nvSpPr>
+          <p:cNvPr id="2" name="Slide Image Placeholder 1"/>
+          <p:cNvSpPr>
+            <a:spLocks noGrp="1" noRot="1" noChangeAspect="1"/>
+          </p:cNvSpPr>
+          <p:nvPr>
+            <p:ph type="sldImg"/>
+          </p:nvPr>
+        </p:nvSpPr>
+        <p:spPr/>
+      </p:sp>
+      <p:sp>
+        <p:nvSpPr>
+          <p:cNvPr id="3" name="Notes Placeholder 2"/>
+          <p:cNvSpPr>
+            <a:spLocks noGrp="1"/>
+          </p:cNvSpPr>
+          <p:nvPr>
+            <p:ph type="body" idx="1"/>
+          </p:nvPr>
+        </p:nvSpPr>
+        <p:spPr/>
+        <p:txBody>
+          <a:bodyPr/>
+          <a:lstStyle/>
+          <a:p>
+            <a:r>
+              <a:rPr lang="en-US" dirty="0"/>
+              <a:t/>
+            </a:r>
+            <a:endParaRPr lang="en-US" dirty="0"/>
+          </a:p>
+        </p:txBody>
+      </p:sp>
+      <p:sp>
+        <p:nvSpPr>
+          <p:cNvPr id="4" name="Slide Number Placeholder 3"/>
+          <p:cNvSpPr>
+            <a:spLocks noGrp="1"/>
+          </p:cNvSpPr>
+          <p:nvPr>
+            <p:ph type="sldNum" sz="quarter" idx="10"/>
+          </p:nvPr>
+        </p:nvSpPr>
+        <p:spPr/>
+        <p:txBody>
+          <a:bodyPr/>
+          <a:lstStyle/>
+          <a:p>
+            <a:fld id="{F7021451-1387-4CA6-816F-3879F97B5CBC}" type="slidenum">
+              <a:rPr lang="en-US"/>
+              <a:t>12</a:t>
             </a:fld>
             <a:endParaRPr lang="en-US"/>
           </a:p>
@@ -1878,6 +2056,1076 @@
                 <a:ea typeface="Arial Black" pitchFamily="34" charset="-122"/>
                 <a:cs typeface="Arial Black" pitchFamily="34" charset="-120"/>
               </a:rPr>
+              <a:t>Tech Stack</a:t>
+            </a:r>
+            <a:endParaRPr lang="en-US" sz="3600" dirty="0"/>
+          </a:p>
+        </p:txBody>
+      </p:sp>
+      <p:sp>
+        <p:nvSpPr>
+          <p:cNvPr id="3" name="Shape 1"/>
+          <p:cNvSpPr/>
+          <p:nvPr/>
+        </p:nvSpPr>
+        <p:spPr>
+          <a:xfrm>
+            <a:off x="640080" y="1097280"/>
+            <a:ext cx="7863840" cy="594360"/>
+          </a:xfrm>
+          <a:prstGeom prst="roundRect">
+            <a:avLst>
+              <a:gd name="adj" fmla="val 12308"/>
+            </a:avLst>
+          </a:prstGeom>
+          <a:solidFill>
+            <a:srgbClr val="13131A"/>
+          </a:solidFill>
+          <a:ln/>
+        </p:spPr>
+      </p:sp>
+      <p:sp>
+        <p:nvSpPr>
+          <p:cNvPr id="4" name="Shape 2"/>
+          <p:cNvSpPr/>
+          <p:nvPr/>
+        </p:nvSpPr>
+        <p:spPr>
+          <a:xfrm>
+            <a:off x="640080" y="1097280"/>
+            <a:ext cx="54864" cy="594360"/>
+          </a:xfrm>
+          <a:prstGeom prst="rect">
+            <a:avLst/>
+          </a:prstGeom>
+          <a:solidFill>
+            <a:srgbClr val="00D4AA"/>
+          </a:solidFill>
+          <a:ln/>
+        </p:spPr>
+      </p:sp>
+      <p:sp>
+        <p:nvSpPr>
+          <p:cNvPr id="5" name="Text 3"/>
+          <p:cNvSpPr/>
+          <p:nvPr/>
+        </p:nvSpPr>
+        <p:spPr>
+          <a:xfrm>
+            <a:off x="1005840" y="1143000"/>
+            <a:ext cx="1828800" cy="274320"/>
+          </a:xfrm>
+          <a:prstGeom prst="rect">
+            <a:avLst/>
+          </a:prstGeom>
+          <a:noFill/>
+          <a:ln/>
+        </p:spPr>
+        <p:txBody>
+          <a:bodyPr wrap="square" lIns="0" tIns="0" rIns="0" bIns="0" rtlCol="0" anchor="ctr"/>
+          <a:lstStyle/>
+          <a:p>
+            <a:pPr indent="0" marL="0">
+              <a:buNone/>
+            </a:pPr>
+            <a:r>
+              <a:rPr lang="en-US" sz="1500" b="1" dirty="0">
+                <a:solidFill>
+                  <a:srgbClr val="FFFFFF"/>
+                </a:solidFill>
+                <a:latin typeface="Arial" pitchFamily="34" charset="0"/>
+                <a:ea typeface="Arial" pitchFamily="34" charset="-122"/>
+                <a:cs typeface="Arial" pitchFamily="34" charset="-120"/>
+              </a:rPr>
+              <a:t>Backend</a:t>
+            </a:r>
+            <a:endParaRPr lang="en-US" sz="1500" dirty="0"/>
+          </a:p>
+        </p:txBody>
+      </p:sp>
+      <p:sp>
+        <p:nvSpPr>
+          <p:cNvPr id="6" name="Text 4"/>
+          <p:cNvSpPr/>
+          <p:nvPr/>
+        </p:nvSpPr>
+        <p:spPr>
+          <a:xfrm>
+            <a:off x="1005840" y="1399032"/>
+            <a:ext cx="6858000" cy="228600"/>
+          </a:xfrm>
+          <a:prstGeom prst="rect">
+            <a:avLst/>
+          </a:prstGeom>
+          <a:noFill/>
+          <a:ln/>
+        </p:spPr>
+        <p:txBody>
+          <a:bodyPr wrap="square" lIns="0" tIns="0" rIns="0" bIns="0" rtlCol="0" anchor="ctr"/>
+          <a:lstStyle/>
+          <a:p>
+            <a:pPr indent="0" marL="0">
+              <a:buNone/>
+            </a:pPr>
+            <a:r>
+              <a:rPr lang="en-US" sz="1200" dirty="0">
+                <a:solidFill>
+                  <a:srgbClr val="71717A"/>
+                </a:solidFill>
+                <a:latin typeface="Arial" pitchFamily="34" charset="0"/>
+                <a:ea typeface="Arial" pitchFamily="34" charset="-122"/>
+                <a:cs typeface="Arial" pitchFamily="34" charset="-120"/>
+              </a:rPr>
+              <a:t>FastAPI + Python, scikit-learn, PyTorch</a:t>
+            </a:r>
+            <a:endParaRPr lang="en-US" sz="1200" dirty="0"/>
+          </a:p>
+        </p:txBody>
+      </p:sp>
+      <p:sp>
+        <p:nvSpPr>
+          <p:cNvPr id="7" name="Shape 5"/>
+          <p:cNvSpPr/>
+          <p:nvPr/>
+        </p:nvSpPr>
+        <p:spPr>
+          <a:xfrm>
+            <a:off x="640080" y="1828800"/>
+            <a:ext cx="7863840" cy="594360"/>
+          </a:xfrm>
+          <a:prstGeom prst="roundRect">
+            <a:avLst>
+              <a:gd name="adj" fmla="val 12308"/>
+            </a:avLst>
+          </a:prstGeom>
+          <a:solidFill>
+            <a:srgbClr val="13131A"/>
+          </a:solidFill>
+          <a:ln/>
+        </p:spPr>
+      </p:sp>
+      <p:sp>
+        <p:nvSpPr>
+          <p:cNvPr id="8" name="Shape 6"/>
+          <p:cNvSpPr/>
+          <p:nvPr/>
+        </p:nvSpPr>
+        <p:spPr>
+          <a:xfrm>
+            <a:off x="640080" y="1828800"/>
+            <a:ext cx="54864" cy="594360"/>
+          </a:xfrm>
+          <a:prstGeom prst="rect">
+            <a:avLst/>
+          </a:prstGeom>
+          <a:solidFill>
+            <a:srgbClr val="4DABF7"/>
+          </a:solidFill>
+          <a:ln/>
+        </p:spPr>
+      </p:sp>
+      <p:sp>
+        <p:nvSpPr>
+          <p:cNvPr id="9" name="Text 7"/>
+          <p:cNvSpPr/>
+          <p:nvPr/>
+        </p:nvSpPr>
+        <p:spPr>
+          <a:xfrm>
+            <a:off x="1005840" y="1874520"/>
+            <a:ext cx="1828800" cy="274320"/>
+          </a:xfrm>
+          <a:prstGeom prst="rect">
+            <a:avLst/>
+          </a:prstGeom>
+          <a:noFill/>
+          <a:ln/>
+        </p:spPr>
+        <p:txBody>
+          <a:bodyPr wrap="square" lIns="0" tIns="0" rIns="0" bIns="0" rtlCol="0" anchor="ctr"/>
+          <a:lstStyle/>
+          <a:p>
+            <a:pPr indent="0" marL="0">
+              <a:buNone/>
+            </a:pPr>
+            <a:r>
+              <a:rPr lang="en-US" sz="1500" b="1" dirty="0">
+                <a:solidFill>
+                  <a:srgbClr val="FFFFFF"/>
+                </a:solidFill>
+                <a:latin typeface="Arial" pitchFamily="34" charset="0"/>
+                <a:ea typeface="Arial" pitchFamily="34" charset="-122"/>
+                <a:cs typeface="Arial" pitchFamily="34" charset="-120"/>
+              </a:rPr>
+              <a:t>Frontend</a:t>
+            </a:r>
+            <a:endParaRPr lang="en-US" sz="1500" dirty="0"/>
+          </a:p>
+        </p:txBody>
+      </p:sp>
+      <p:sp>
+        <p:nvSpPr>
+          <p:cNvPr id="10" name="Text 8"/>
+          <p:cNvSpPr/>
+          <p:nvPr/>
+        </p:nvSpPr>
+        <p:spPr>
+          <a:xfrm>
+            <a:off x="1005840" y="2130552"/>
+            <a:ext cx="6858000" cy="228600"/>
+          </a:xfrm>
+          <a:prstGeom prst="rect">
+            <a:avLst/>
+          </a:prstGeom>
+          <a:noFill/>
+          <a:ln/>
+        </p:spPr>
+        <p:txBody>
+          <a:bodyPr wrap="square" lIns="0" tIns="0" rIns="0" bIns="0" rtlCol="0" anchor="ctr"/>
+          <a:lstStyle/>
+          <a:p>
+            <a:pPr indent="0" marL="0">
+              <a:buNone/>
+            </a:pPr>
+            <a:r>
+              <a:rPr lang="en-US" sz="1200" dirty="0">
+                <a:solidFill>
+                  <a:srgbClr val="71717A"/>
+                </a:solidFill>
+                <a:latin typeface="Arial" pitchFamily="34" charset="0"/>
+                <a:ea typeface="Arial" pitchFamily="34" charset="-122"/>
+                <a:cs typeface="Arial" pitchFamily="34" charset="-120"/>
+              </a:rPr>
+              <a:t>Next.js 14, React 18, TailwindCSS</a:t>
+            </a:r>
+            <a:endParaRPr lang="en-US" sz="1200" dirty="0"/>
+          </a:p>
+        </p:txBody>
+      </p:sp>
+      <p:sp>
+        <p:nvSpPr>
+          <p:cNvPr id="11" name="Shape 9"/>
+          <p:cNvSpPr/>
+          <p:nvPr/>
+        </p:nvSpPr>
+        <p:spPr>
+          <a:xfrm>
+            <a:off x="640080" y="2560320"/>
+            <a:ext cx="7863840" cy="594360"/>
+          </a:xfrm>
+          <a:prstGeom prst="roundRect">
+            <a:avLst>
+              <a:gd name="adj" fmla="val 12308"/>
+            </a:avLst>
+          </a:prstGeom>
+          <a:solidFill>
+            <a:srgbClr val="13131A"/>
+          </a:solidFill>
+          <a:ln/>
+        </p:spPr>
+      </p:sp>
+      <p:sp>
+        <p:nvSpPr>
+          <p:cNvPr id="12" name="Shape 10"/>
+          <p:cNvSpPr/>
+          <p:nvPr/>
+        </p:nvSpPr>
+        <p:spPr>
+          <a:xfrm>
+            <a:off x="640080" y="2560320"/>
+            <a:ext cx="54864" cy="594360"/>
+          </a:xfrm>
+          <a:prstGeom prst="rect">
+            <a:avLst/>
+          </a:prstGeom>
+          <a:solidFill>
+            <a:srgbClr val="6C5CE7"/>
+          </a:solidFill>
+          <a:ln/>
+        </p:spPr>
+      </p:sp>
+      <p:sp>
+        <p:nvSpPr>
+          <p:cNvPr id="13" name="Text 11"/>
+          <p:cNvSpPr/>
+          <p:nvPr/>
+        </p:nvSpPr>
+        <p:spPr>
+          <a:xfrm>
+            <a:off x="1005840" y="2606040"/>
+            <a:ext cx="1828800" cy="274320"/>
+          </a:xfrm>
+          <a:prstGeom prst="rect">
+            <a:avLst/>
+          </a:prstGeom>
+          <a:noFill/>
+          <a:ln/>
+        </p:spPr>
+        <p:txBody>
+          <a:bodyPr wrap="square" lIns="0" tIns="0" rIns="0" bIns="0" rtlCol="0" anchor="ctr"/>
+          <a:lstStyle/>
+          <a:p>
+            <a:pPr indent="0" marL="0">
+              <a:buNone/>
+            </a:pPr>
+            <a:r>
+              <a:rPr lang="en-US" sz="1500" b="1" dirty="0">
+                <a:solidFill>
+                  <a:srgbClr val="FFFFFF"/>
+                </a:solidFill>
+                <a:latin typeface="Arial" pitchFamily="34" charset="0"/>
+                <a:ea typeface="Arial" pitchFamily="34" charset="-122"/>
+                <a:cs typeface="Arial" pitchFamily="34" charset="-120"/>
+              </a:rPr>
+              <a:t>Data</a:t>
+            </a:r>
+            <a:endParaRPr lang="en-US" sz="1500" dirty="0"/>
+          </a:p>
+        </p:txBody>
+      </p:sp>
+      <p:sp>
+        <p:nvSpPr>
+          <p:cNvPr id="14" name="Text 12"/>
+          <p:cNvSpPr/>
+          <p:nvPr/>
+        </p:nvSpPr>
+        <p:spPr>
+          <a:xfrm>
+            <a:off x="1005840" y="2862072"/>
+            <a:ext cx="6858000" cy="228600"/>
+          </a:xfrm>
+          <a:prstGeom prst="rect">
+            <a:avLst/>
+          </a:prstGeom>
+          <a:noFill/>
+          <a:ln/>
+        </p:spPr>
+        <p:txBody>
+          <a:bodyPr wrap="square" lIns="0" tIns="0" rIns="0" bIns="0" rtlCol="0" anchor="ctr"/>
+          <a:lstStyle/>
+          <a:p>
+            <a:pPr indent="0" marL="0">
+              <a:buNone/>
+            </a:pPr>
+            <a:r>
+              <a:rPr lang="en-US" sz="1200" dirty="0">
+                <a:solidFill>
+                  <a:srgbClr val="71717A"/>
+                </a:solidFill>
+                <a:latin typeface="Arial" pitchFamily="34" charset="0"/>
+                <a:ea typeface="Arial" pitchFamily="34" charset="-122"/>
+                <a:cs typeface="Arial" pitchFamily="34" charset="-120"/>
+              </a:rPr>
+              <a:t>BGeometrics Premium, Binance.US, Coinbase, Polymarket</a:t>
+            </a:r>
+            <a:endParaRPr lang="en-US" sz="1200" dirty="0"/>
+          </a:p>
+        </p:txBody>
+      </p:sp>
+      <p:sp>
+        <p:nvSpPr>
+          <p:cNvPr id="15" name="Shape 13"/>
+          <p:cNvSpPr/>
+          <p:nvPr/>
+        </p:nvSpPr>
+        <p:spPr>
+          <a:xfrm>
+            <a:off x="640080" y="3291840"/>
+            <a:ext cx="7863840" cy="594360"/>
+          </a:xfrm>
+          <a:prstGeom prst="roundRect">
+            <a:avLst>
+              <a:gd name="adj" fmla="val 12308"/>
+            </a:avLst>
+          </a:prstGeom>
+          <a:solidFill>
+            <a:srgbClr val="13131A"/>
+          </a:solidFill>
+          <a:ln/>
+        </p:spPr>
+      </p:sp>
+      <p:sp>
+        <p:nvSpPr>
+          <p:cNvPr id="16" name="Shape 14"/>
+          <p:cNvSpPr/>
+          <p:nvPr/>
+        </p:nvSpPr>
+        <p:spPr>
+          <a:xfrm>
+            <a:off x="640080" y="3291840"/>
+            <a:ext cx="54864" cy="594360"/>
+          </a:xfrm>
+          <a:prstGeom prst="rect">
+            <a:avLst/>
+          </a:prstGeom>
+          <a:solidFill>
+            <a:srgbClr val="FFD93D"/>
+          </a:solidFill>
+          <a:ln/>
+        </p:spPr>
+      </p:sp>
+      <p:sp>
+        <p:nvSpPr>
+          <p:cNvPr id="17" name="Text 15"/>
+          <p:cNvSpPr/>
+          <p:nvPr/>
+        </p:nvSpPr>
+        <p:spPr>
+          <a:xfrm>
+            <a:off x="1005840" y="3337560"/>
+            <a:ext cx="1828800" cy="274320"/>
+          </a:xfrm>
+          <a:prstGeom prst="rect">
+            <a:avLst/>
+          </a:prstGeom>
+          <a:noFill/>
+          <a:ln/>
+        </p:spPr>
+        <p:txBody>
+          <a:bodyPr wrap="square" lIns="0" tIns="0" rIns="0" bIns="0" rtlCol="0" anchor="ctr"/>
+          <a:lstStyle/>
+          <a:p>
+            <a:pPr indent="0" marL="0">
+              <a:buNone/>
+            </a:pPr>
+            <a:r>
+              <a:rPr lang="en-US" sz="1500" b="1" dirty="0">
+                <a:solidFill>
+                  <a:srgbClr val="FFFFFF"/>
+                </a:solidFill>
+                <a:latin typeface="Arial" pitchFamily="34" charset="0"/>
+                <a:ea typeface="Arial" pitchFamily="34" charset="-122"/>
+                <a:cs typeface="Arial" pitchFamily="34" charset="-120"/>
+              </a:rPr>
+              <a:t>Price</a:t>
+            </a:r>
+            <a:endParaRPr lang="en-US" sz="1500" dirty="0"/>
+          </a:p>
+        </p:txBody>
+      </p:sp>
+      <p:sp>
+        <p:nvSpPr>
+          <p:cNvPr id="18" name="Text 16"/>
+          <p:cNvSpPr/>
+          <p:nvPr/>
+        </p:nvSpPr>
+        <p:spPr>
+          <a:xfrm>
+            <a:off x="1005840" y="3593592"/>
+            <a:ext cx="6858000" cy="228600"/>
+          </a:xfrm>
+          <a:prstGeom prst="rect">
+            <a:avLst/>
+          </a:prstGeom>
+          <a:noFill/>
+          <a:ln/>
+        </p:spPr>
+        <p:txBody>
+          <a:bodyPr wrap="square" lIns="0" tIns="0" rIns="0" bIns="0" rtlCol="0" anchor="ctr"/>
+          <a:lstStyle/>
+          <a:p>
+            <a:pPr indent="0" marL="0">
+              <a:buNone/>
+            </a:pPr>
+            <a:r>
+              <a:rPr lang="en-US" sz="1200" dirty="0">
+                <a:solidFill>
+                  <a:srgbClr val="71717A"/>
+                </a:solidFill>
+                <a:latin typeface="Arial" pitchFamily="34" charset="0"/>
+                <a:ea typeface="Arial" pitchFamily="34" charset="-122"/>
+                <a:cs typeface="Arial" pitchFamily="34" charset="-120"/>
+              </a:rPr>
+              <a:t>TrueMarkets MCP (same source everywhere)</a:t>
+            </a:r>
+            <a:endParaRPr lang="en-US" sz="1200" dirty="0"/>
+          </a:p>
+        </p:txBody>
+      </p:sp>
+      <p:sp>
+        <p:nvSpPr>
+          <p:cNvPr id="19" name="Shape 17"/>
+          <p:cNvSpPr/>
+          <p:nvPr/>
+        </p:nvSpPr>
+        <p:spPr>
+          <a:xfrm>
+            <a:off x="640080" y="4023360"/>
+            <a:ext cx="7863840" cy="594360"/>
+          </a:xfrm>
+          <a:prstGeom prst="roundRect">
+            <a:avLst>
+              <a:gd name="adj" fmla="val 12308"/>
+            </a:avLst>
+          </a:prstGeom>
+          <a:solidFill>
+            <a:srgbClr val="13131A"/>
+          </a:solidFill>
+          <a:ln/>
+        </p:spPr>
+      </p:sp>
+      <p:sp>
+        <p:nvSpPr>
+          <p:cNvPr id="20" name="Shape 18"/>
+          <p:cNvSpPr/>
+          <p:nvPr/>
+        </p:nvSpPr>
+        <p:spPr>
+          <a:xfrm>
+            <a:off x="640080" y="4023360"/>
+            <a:ext cx="54864" cy="594360"/>
+          </a:xfrm>
+          <a:prstGeom prst="rect">
+            <a:avLst/>
+          </a:prstGeom>
+          <a:solidFill>
+            <a:srgbClr val="FF6B6B"/>
+          </a:solidFill>
+          <a:ln/>
+        </p:spPr>
+      </p:sp>
+      <p:sp>
+        <p:nvSpPr>
+          <p:cNvPr id="21" name="Text 19"/>
+          <p:cNvSpPr/>
+          <p:nvPr/>
+        </p:nvSpPr>
+        <p:spPr>
+          <a:xfrm>
+            <a:off x="1005840" y="4069080"/>
+            <a:ext cx="1828800" cy="274320"/>
+          </a:xfrm>
+          <a:prstGeom prst="rect">
+            <a:avLst/>
+          </a:prstGeom>
+          <a:noFill/>
+          <a:ln/>
+        </p:spPr>
+        <p:txBody>
+          <a:bodyPr wrap="square" lIns="0" tIns="0" rIns="0" bIns="0" rtlCol="0" anchor="ctr"/>
+          <a:lstStyle/>
+          <a:p>
+            <a:pPr indent="0" marL="0">
+              <a:buNone/>
+            </a:pPr>
+            <a:r>
+              <a:rPr lang="en-US" sz="1500" b="1" dirty="0">
+                <a:solidFill>
+                  <a:srgbClr val="FFFFFF"/>
+                </a:solidFill>
+                <a:latin typeface="Arial" pitchFamily="34" charset="0"/>
+                <a:ea typeface="Arial" pitchFamily="34" charset="-122"/>
+                <a:cs typeface="Arial" pitchFamily="34" charset="-120"/>
+              </a:rPr>
+              <a:t>Refresh</a:t>
+            </a:r>
+            <a:endParaRPr lang="en-US" sz="1500" dirty="0"/>
+          </a:p>
+        </p:txBody>
+      </p:sp>
+      <p:sp>
+        <p:nvSpPr>
+          <p:cNvPr id="22" name="Text 20"/>
+          <p:cNvSpPr/>
+          <p:nvPr/>
+        </p:nvSpPr>
+        <p:spPr>
+          <a:xfrm>
+            <a:off x="1005840" y="4325112"/>
+            <a:ext cx="6858000" cy="228600"/>
+          </a:xfrm>
+          <a:prstGeom prst="rect">
+            <a:avLst/>
+          </a:prstGeom>
+          <a:noFill/>
+          <a:ln/>
+        </p:spPr>
+        <p:txBody>
+          <a:bodyPr wrap="square" lIns="0" tIns="0" rIns="0" bIns="0" rtlCol="0" anchor="ctr"/>
+          <a:lstStyle/>
+          <a:p>
+            <a:pPr indent="0" marL="0">
+              <a:buNone/>
+            </a:pPr>
+            <a:r>
+              <a:rPr lang="en-US" sz="1200" dirty="0">
+                <a:solidFill>
+                  <a:srgbClr val="71717A"/>
+                </a:solidFill>
+                <a:latin typeface="Arial" pitchFamily="34" charset="0"/>
+                <a:ea typeface="Arial" pitchFamily="34" charset="-122"/>
+                <a:cs typeface="Arial" pitchFamily="34" charset="-120"/>
+              </a:rPr>
+              <a:t>30 seconds, all 6 signals</a:t>
+            </a:r>
+            <a:endParaRPr lang="en-US" sz="1200" dirty="0"/>
+          </a:p>
+        </p:txBody>
+      </p:sp>
+    </p:spTree>
+  </p:cSld>
+  <p:clrMapOvr>
+    <a:masterClrMapping/>
+  </p:clrMapOvr>
+</p:sld>
+</file>
+
+<file path=ppt/slides/slide11.xml><?xml version="1.0" encoding="utf-8"?>
+<p:sld xmlns:a="http://schemas.openxmlformats.org/drawingml/2006/main" xmlns:r="http://schemas.openxmlformats.org/officeDocument/2006/relationships" xmlns:p="http://schemas.openxmlformats.org/presentationml/2006/main">
+  <p:cSld name="Slide 11">
+    <p:bg>
+      <p:bgPr>
+        <a:solidFill>
+          <a:srgbClr val="0A0A0F"/>
+        </a:solidFill>
+      </p:bgPr>
+    </p:bg>
+    <p:spTree>
+      <p:nvGrpSpPr>
+        <p:cNvPr id="1" name=""/>
+        <p:cNvGrpSpPr/>
+        <p:nvPr/>
+      </p:nvGrpSpPr>
+      <p:grpSpPr>
+        <a:xfrm>
+          <a:off x="0" y="0"/>
+          <a:ext cx="0" cy="0"/>
+          <a:chOff x="0" y="0"/>
+          <a:chExt cx="0" cy="0"/>
+        </a:xfrm>
+      </p:grpSpPr>
+      <p:sp>
+        <p:nvSpPr>
+          <p:cNvPr id="2" name="Text 0"/>
+          <p:cNvSpPr/>
+          <p:nvPr/>
+        </p:nvSpPr>
+        <p:spPr>
+          <a:xfrm>
+            <a:off x="640080" y="365760"/>
+            <a:ext cx="7315200" cy="548640"/>
+          </a:xfrm>
+          <a:prstGeom prst="rect">
+            <a:avLst/>
+          </a:prstGeom>
+          <a:noFill/>
+          <a:ln/>
+        </p:spPr>
+        <p:txBody>
+          <a:bodyPr wrap="square" lIns="0" tIns="0" rIns="0" bIns="0" rtlCol="0" anchor="ctr"/>
+          <a:lstStyle/>
+          <a:p>
+            <a:pPr indent="0" marL="0">
+              <a:buNone/>
+            </a:pPr>
+            <a:r>
+              <a:rPr lang="en-US" sz="3600" b="1" dirty="0">
+                <a:solidFill>
+                  <a:srgbClr val="FFFFFF"/>
+                </a:solidFill>
+                <a:latin typeface="Arial Black" pitchFamily="34" charset="0"/>
+                <a:ea typeface="Arial Black" pitchFamily="34" charset="-122"/>
+                <a:cs typeface="Arial Black" pitchFamily="34" charset="-120"/>
+              </a:rPr>
+              <a:t>The Product</a:t>
+            </a:r>
+            <a:endParaRPr lang="en-US" sz="3600" dirty="0"/>
+          </a:p>
+        </p:txBody>
+      </p:sp>
+      <p:sp>
+        <p:nvSpPr>
+          <p:cNvPr id="3" name="Shape 1"/>
+          <p:cNvSpPr/>
+          <p:nvPr/>
+        </p:nvSpPr>
+        <p:spPr>
+          <a:xfrm>
+            <a:off x="640080" y="1097280"/>
+            <a:ext cx="3749040" cy="3474720"/>
+          </a:xfrm>
+          <a:prstGeom prst="roundRect">
+            <a:avLst>
+              <a:gd name="adj" fmla="val 2632"/>
+            </a:avLst>
+          </a:prstGeom>
+          <a:solidFill>
+            <a:srgbClr val="13131A"/>
+          </a:solidFill>
+          <a:ln/>
+        </p:spPr>
+      </p:sp>
+      <p:sp>
+        <p:nvSpPr>
+          <p:cNvPr id="4" name="Text 2"/>
+          <p:cNvSpPr/>
+          <p:nvPr/>
+        </p:nvSpPr>
+        <p:spPr>
+          <a:xfrm>
+            <a:off x="822960" y="1188720"/>
+            <a:ext cx="3200400" cy="365760"/>
+          </a:xfrm>
+          <a:prstGeom prst="rect">
+            <a:avLst/>
+          </a:prstGeom>
+          <a:noFill/>
+          <a:ln/>
+        </p:spPr>
+        <p:txBody>
+          <a:bodyPr wrap="square" lIns="0" tIns="0" rIns="0" bIns="0" rtlCol="0" anchor="ctr"/>
+          <a:lstStyle/>
+          <a:p>
+            <a:pPr indent="0" marL="0">
+              <a:buNone/>
+            </a:pPr>
+            <a:r>
+              <a:rPr lang="en-US" sz="1800" b="1" dirty="0">
+                <a:solidFill>
+                  <a:srgbClr val="00D4AA"/>
+                </a:solidFill>
+                <a:latin typeface="Arial" pitchFamily="34" charset="0"/>
+                <a:ea typeface="Arial" pitchFamily="34" charset="-122"/>
+                <a:cs typeface="Arial" pitchFamily="34" charset="-120"/>
+              </a:rPr>
+              <a:t>Market Page</a:t>
+            </a:r>
+            <a:endParaRPr lang="en-US" sz="1800" dirty="0"/>
+          </a:p>
+        </p:txBody>
+      </p:sp>
+      <p:sp>
+        <p:nvSpPr>
+          <p:cNvPr id="5" name="Text 3"/>
+          <p:cNvSpPr/>
+          <p:nvPr/>
+        </p:nvSpPr>
+        <p:spPr>
+          <a:xfrm>
+            <a:off x="822960" y="1645920"/>
+            <a:ext cx="3383280" cy="2286000"/>
+          </a:xfrm>
+          <a:prstGeom prst="rect">
+            <a:avLst/>
+          </a:prstGeom>
+          <a:noFill/>
+          <a:ln/>
+        </p:spPr>
+        <p:txBody>
+          <a:bodyPr wrap="square" rtlCol="0" anchor="ctr"/>
+          <a:lstStyle/>
+          <a:p>
+            <a:pPr marL="342900" indent="-342900">
+              <a:buSzPct val="100000"/>
+              <a:buChar char="•"/>
+            </a:pPr>
+            <a:r>
+              <a:rPr lang="en-US" sz="1200" dirty="0">
+                <a:solidFill>
+                  <a:srgbClr val="E4E4E7"/>
+                </a:solidFill>
+                <a:latin typeface="Arial" pitchFamily="34" charset="0"/>
+                <a:ea typeface="Arial" pitchFamily="34" charset="-122"/>
+                <a:cs typeface="Arial" pitchFamily="34" charset="-120"/>
+              </a:rPr>
+              <a:t>Live BTC price + chart</a:t>
+            </a:r>
+            <a:endParaRPr lang="en-US" sz="1200" dirty="0"/>
+          </a:p>
+          <a:p>
+            <a:pPr marL="342900" indent="-342900">
+              <a:buSzPct val="100000"/>
+              <a:buChar char="•"/>
+            </a:pPr>
+            <a:r>
+              <a:rPr lang="en-US" sz="1200" dirty="0">
+                <a:solidFill>
+                  <a:srgbClr val="E4E4E7"/>
+                </a:solidFill>
+                <a:latin typeface="Arial" pitchFamily="34" charset="0"/>
+                <a:ea typeface="Arial" pitchFamily="34" charset="-122"/>
+                <a:cs typeface="Arial" pitchFamily="34" charset="-120"/>
+              </a:rPr>
+              <a:t>Market cap, volume, highs/lows</a:t>
+            </a:r>
+            <a:endParaRPr lang="en-US" sz="1200" dirty="0"/>
+          </a:p>
+          <a:p>
+            <a:pPr marL="342900" indent="-342900">
+              <a:buSzPct val="100000"/>
+              <a:buChar char="•"/>
+            </a:pPr>
+            <a:r>
+              <a:rPr lang="en-US" sz="1200" dirty="0">
+                <a:solidFill>
+                  <a:srgbClr val="E4E4E7"/>
+                </a:solidFill>
+                <a:latin typeface="Arial" pitchFamily="34" charset="0"/>
+                <a:ea typeface="Arial" pitchFamily="34" charset="-122"/>
+                <a:cs typeface="Arial" pitchFamily="34" charset="-120"/>
+              </a:rPr>
+              <a:t>Fear &amp; Greed Index</a:t>
+            </a:r>
+            <a:endParaRPr lang="en-US" sz="1200" dirty="0"/>
+          </a:p>
+          <a:p>
+            <a:pPr marL="342900" indent="-342900">
+              <a:buSzPct val="100000"/>
+              <a:buChar char="•"/>
+            </a:pPr>
+            <a:r>
+              <a:rPr lang="en-US" sz="1200" dirty="0">
+                <a:solidFill>
+                  <a:srgbClr val="E4E4E7"/>
+                </a:solidFill>
+                <a:latin typeface="Arial" pitchFamily="34" charset="0"/>
+                <a:ea typeface="Arial" pitchFamily="34" charset="-122"/>
+                <a:cs typeface="Arial" pitchFamily="34" charset="-120"/>
+              </a:rPr>
+              <a:t>TM Sentiment (30+ sources)</a:t>
+            </a:r>
+            <a:endParaRPr lang="en-US" sz="1200" dirty="0"/>
+          </a:p>
+        </p:txBody>
+      </p:sp>
+      <p:sp>
+        <p:nvSpPr>
+          <p:cNvPr id="6" name="Shape 4"/>
+          <p:cNvSpPr/>
+          <p:nvPr/>
+        </p:nvSpPr>
+        <p:spPr>
+          <a:xfrm>
+            <a:off x="4754880" y="1097280"/>
+            <a:ext cx="3931920" cy="3474720"/>
+          </a:xfrm>
+          <a:prstGeom prst="roundRect">
+            <a:avLst>
+              <a:gd name="adj" fmla="val 2632"/>
+            </a:avLst>
+          </a:prstGeom>
+          <a:solidFill>
+            <a:srgbClr val="13131A"/>
+          </a:solidFill>
+          <a:ln/>
+        </p:spPr>
+      </p:sp>
+      <p:sp>
+        <p:nvSpPr>
+          <p:cNvPr id="7" name="Text 5"/>
+          <p:cNvSpPr/>
+          <p:nvPr/>
+        </p:nvSpPr>
+        <p:spPr>
+          <a:xfrm>
+            <a:off x="4937760" y="1188720"/>
+            <a:ext cx="3200400" cy="365760"/>
+          </a:xfrm>
+          <a:prstGeom prst="rect">
+            <a:avLst/>
+          </a:prstGeom>
+          <a:noFill/>
+          <a:ln/>
+        </p:spPr>
+        <p:txBody>
+          <a:bodyPr wrap="square" lIns="0" tIns="0" rIns="0" bIns="0" rtlCol="0" anchor="ctr"/>
+          <a:lstStyle/>
+          <a:p>
+            <a:pPr indent="0" marL="0">
+              <a:buNone/>
+            </a:pPr>
+            <a:r>
+              <a:rPr lang="en-US" sz="1800" b="1" dirty="0">
+                <a:solidFill>
+                  <a:srgbClr val="6C5CE7"/>
+                </a:solidFill>
+                <a:latin typeface="Arial" pitchFamily="34" charset="0"/>
+                <a:ea typeface="Arial" pitchFamily="34" charset="-122"/>
+                <a:cs typeface="Arial" pitchFamily="34" charset="-120"/>
+              </a:rPr>
+              <a:t>Prediction Page</a:t>
+            </a:r>
+            <a:endParaRPr lang="en-US" sz="1800" dirty="0"/>
+          </a:p>
+        </p:txBody>
+      </p:sp>
+      <p:sp>
+        <p:nvSpPr>
+          <p:cNvPr id="8" name="Text 6"/>
+          <p:cNvSpPr/>
+          <p:nvPr/>
+        </p:nvSpPr>
+        <p:spPr>
+          <a:xfrm>
+            <a:off x="4937760" y="1645920"/>
+            <a:ext cx="3566160" cy="2286000"/>
+          </a:xfrm>
+          <a:prstGeom prst="rect">
+            <a:avLst/>
+          </a:prstGeom>
+          <a:noFill/>
+          <a:ln/>
+        </p:spPr>
+        <p:txBody>
+          <a:bodyPr wrap="square" rtlCol="0" anchor="ctr"/>
+          <a:lstStyle/>
+          <a:p>
+            <a:pPr marL="342900" indent="-342900">
+              <a:buSzPct val="100000"/>
+              <a:buChar char="•"/>
+            </a:pPr>
+            <a:r>
+              <a:rPr lang="en-US" sz="1200" dirty="0">
+                <a:solidFill>
+                  <a:srgbClr val="E4E4E7"/>
+                </a:solidFill>
+                <a:latin typeface="Arial" pitchFamily="34" charset="0"/>
+                <a:ea typeface="Arial" pitchFamily="34" charset="-122"/>
+                <a:cs typeface="Arial" pitchFamily="34" charset="-120"/>
+              </a:rPr>
+              <a:t>BUY / SELL with 6-signal reasoning</a:t>
+            </a:r>
+            <a:endParaRPr lang="en-US" sz="1200" dirty="0"/>
+          </a:p>
+          <a:p>
+            <a:pPr marL="342900" indent="-342900">
+              <a:buSzPct val="100000"/>
+              <a:buChar char="•"/>
+            </a:pPr>
+            <a:r>
+              <a:rPr lang="en-US" sz="1200" dirty="0">
+                <a:solidFill>
+                  <a:srgbClr val="E4E4E7"/>
+                </a:solidFill>
+                <a:latin typeface="Arial" pitchFamily="34" charset="0"/>
+                <a:ea typeface="Arial" pitchFamily="34" charset="-122"/>
+                <a:cs typeface="Arial" pitchFamily="34" charset="-120"/>
+              </a:rPr>
+              <a:t>Polymarket table (18 thresholds)</a:t>
+            </a:r>
+            <a:endParaRPr lang="en-US" sz="1200" dirty="0"/>
+          </a:p>
+          <a:p>
+            <a:pPr marL="342900" indent="-342900">
+              <a:buSzPct val="100000"/>
+              <a:buChar char="•"/>
+            </a:pPr>
+            <a:r>
+              <a:rPr lang="en-US" sz="1200" dirty="0">
+                <a:solidFill>
+                  <a:srgbClr val="E4E4E7"/>
+                </a:solidFill>
+                <a:latin typeface="Arial" pitchFamily="34" charset="0"/>
+                <a:ea typeface="Arial" pitchFamily="34" charset="-122"/>
+                <a:cs typeface="Arial" pitchFamily="34" charset="-120"/>
+              </a:rPr>
+              <a:t>Binance order flow visualization</a:t>
+            </a:r>
+            <a:endParaRPr lang="en-US" sz="1200" dirty="0"/>
+          </a:p>
+          <a:p>
+            <a:pPr marL="342900" indent="-342900">
+              <a:buSzPct val="100000"/>
+              <a:buChar char="•"/>
+            </a:pPr>
+            <a:r>
+              <a:rPr lang="en-US" sz="1200" dirty="0">
+                <a:solidFill>
+                  <a:srgbClr val="E4E4E7"/>
+                </a:solidFill>
+                <a:latin typeface="Arial" pitchFamily="34" charset="0"/>
+                <a:ea typeface="Arial" pitchFamily="34" charset="-122"/>
+                <a:cs typeface="Arial" pitchFamily="34" charset="-120"/>
+              </a:rPr>
+              <a:t>RSI, MACD, Bollinger live</a:t>
+            </a:r>
+            <a:endParaRPr lang="en-US" sz="1200" dirty="0"/>
+          </a:p>
+          <a:p>
+            <a:pPr marL="342900" indent="-342900">
+              <a:buSzPct val="100000"/>
+              <a:buChar char="•"/>
+            </a:pPr>
+            <a:r>
+              <a:rPr lang="en-US" sz="1200" dirty="0">
+                <a:solidFill>
+                  <a:srgbClr val="E4E4E7"/>
+                </a:solidFill>
+                <a:latin typeface="Arial" pitchFamily="34" charset="0"/>
+                <a:ea typeface="Arial" pitchFamily="34" charset="-122"/>
+                <a:cs typeface="Arial" pitchFamily="34" charset="-120"/>
+              </a:rPr>
+              <a:t>Portfolio + order management</a:t>
+            </a:r>
+            <a:endParaRPr lang="en-US" sz="1200" dirty="0"/>
+          </a:p>
+        </p:txBody>
+      </p:sp>
+    </p:spTree>
+  </p:cSld>
+  <p:clrMapOvr>
+    <a:masterClrMapping/>
+  </p:clrMapOvr>
+</p:sld>
+</file>
+
+<file path=ppt/slides/slide12.xml><?xml version="1.0" encoding="utf-8"?>
+<p:sld xmlns:a="http://schemas.openxmlformats.org/drawingml/2006/main" xmlns:r="http://schemas.openxmlformats.org/officeDocument/2006/relationships" xmlns:p="http://schemas.openxmlformats.org/presentationml/2006/main">
+  <p:cSld name="Slide 12">
+    <p:bg>
+      <p:bgPr>
+        <a:solidFill>
+          <a:srgbClr val="0A0A0F"/>
+        </a:solidFill>
+      </p:bgPr>
+    </p:bg>
+    <p:spTree>
+      <p:nvGrpSpPr>
+        <p:cNvPr id="1" name=""/>
+        <p:cNvGrpSpPr/>
+        <p:nvPr/>
+      </p:nvGrpSpPr>
+      <p:grpSpPr>
+        <a:xfrm>
+          <a:off x="0" y="0"/>
+          <a:ext cx="0" cy="0"/>
+          <a:chOff x="0" y="0"/>
+          <a:chExt cx="0" cy="0"/>
+        </a:xfrm>
+      </p:grpSpPr>
+      <p:sp>
+        <p:nvSpPr>
+          <p:cNvPr id="2" name="Text 0"/>
+          <p:cNvSpPr/>
+          <p:nvPr/>
+        </p:nvSpPr>
+        <p:spPr>
+          <a:xfrm>
+            <a:off x="640080" y="365760"/>
+            <a:ext cx="7315200" cy="548640"/>
+          </a:xfrm>
+          <a:prstGeom prst="rect">
+            <a:avLst/>
+          </a:prstGeom>
+          <a:noFill/>
+          <a:ln/>
+        </p:spPr>
+        <p:txBody>
+          <a:bodyPr wrap="square" lIns="0" tIns="0" rIns="0" bIns="0" rtlCol="0" anchor="ctr"/>
+          <a:lstStyle/>
+          <a:p>
+            <a:pPr indent="0" marL="0">
+              <a:buNone/>
+            </a:pPr>
+            <a:r>
+              <a:rPr lang="en-US" sz="3600" b="1" dirty="0">
+                <a:solidFill>
+                  <a:srgbClr val="FFFFFF"/>
+                </a:solidFill>
+                <a:latin typeface="Arial Black" pitchFamily="34" charset="0"/>
+                <a:ea typeface="Arial Black" pitchFamily="34" charset="-122"/>
+                <a:cs typeface="Arial Black" pitchFamily="34" charset="-120"/>
+              </a:rPr>
               <a:t>The Ask</a:t>
             </a:r>
             <a:endParaRPr lang="en-US" sz="3600" dirty="0"/>
@@ -5557,24 +6805,24 @@
         </p:nvSpPr>
         <p:spPr>
           <a:xfrm>
-            <a:off x="640080" y="365760"/>
-            <a:ext cx="7315200" cy="548640"/>
-          </a:xfrm>
-          <a:prstGeom prst="rect">
-            <a:avLst/>
-          </a:prstGeom>
-          <a:noFill/>
-          <a:ln/>
-        </p:spPr>
-        <p:txBody>
-          <a:bodyPr wrap="square" lIns="0" tIns="0" rIns="0" bIns="0" rtlCol="0" anchor="ctr"/>
-          <a:lstStyle/>
-          <a:p>
-            <a:pPr indent="0" marL="0">
-              <a:buNone/>
-            </a:pPr>
-            <a:r>
-              <a:rPr lang="en-US" sz="3600" b="1" dirty="0">
+            <a:off x="640080" y="274320"/>
+            <a:ext cx="5486400" cy="457200"/>
+          </a:xfrm>
+          <a:prstGeom prst="rect">
+            <a:avLst/>
+          </a:prstGeom>
+          <a:noFill/>
+          <a:ln/>
+        </p:spPr>
+        <p:txBody>
+          <a:bodyPr wrap="square" lIns="0" tIns="0" rIns="0" bIns="0" rtlCol="0" anchor="ctr"/>
+          <a:lstStyle/>
+          <a:p>
+            <a:pPr indent="0" marL="0">
+              <a:buNone/>
+            </a:pPr>
+            <a:r>
+              <a:rPr lang="en-US" sz="3000" b="1" dirty="0">
                 <a:solidFill>
                   <a:srgbClr val="FFFFFF"/>
                 </a:solidFill>
@@ -5582,119 +6830,38 @@
                 <a:ea typeface="Arial Black" pitchFamily="34" charset="-122"/>
                 <a:cs typeface="Arial Black" pitchFamily="34" charset="-120"/>
               </a:rPr>
-              <a:t>Tech Stack</a:t>
-            </a:r>
-            <a:endParaRPr lang="en-US" sz="3600" dirty="0"/>
-          </a:p>
-        </p:txBody>
-      </p:sp>
-      <p:sp>
-        <p:nvSpPr>
-          <p:cNvPr id="3" name="Shape 1"/>
-          <p:cNvSpPr/>
-          <p:nvPr/>
-        </p:nvSpPr>
-        <p:spPr>
-          <a:xfrm>
-            <a:off x="640080" y="1097280"/>
-            <a:ext cx="7863840" cy="594360"/>
-          </a:xfrm>
-          <a:prstGeom prst="roundRect">
-            <a:avLst>
-              <a:gd name="adj" fmla="val 12308"/>
-            </a:avLst>
-          </a:prstGeom>
-          <a:solidFill>
-            <a:srgbClr val="13131A"/>
-          </a:solidFill>
-          <a:ln/>
-        </p:spPr>
-      </p:sp>
-      <p:sp>
-        <p:nvSpPr>
-          <p:cNvPr id="4" name="Shape 2"/>
-          <p:cNvSpPr/>
-          <p:nvPr/>
-        </p:nvSpPr>
-        <p:spPr>
-          <a:xfrm>
-            <a:off x="640080" y="1097280"/>
-            <a:ext cx="54864" cy="594360"/>
-          </a:xfrm>
-          <a:prstGeom prst="rect">
-            <a:avLst/>
-          </a:prstGeom>
-          <a:solidFill>
-            <a:srgbClr val="00D4AA"/>
-          </a:solidFill>
-          <a:ln/>
-        </p:spPr>
-      </p:sp>
-      <p:sp>
-        <p:nvSpPr>
-          <p:cNvPr id="5" name="Text 3"/>
-          <p:cNvSpPr/>
-          <p:nvPr/>
-        </p:nvSpPr>
-        <p:spPr>
-          <a:xfrm>
-            <a:off x="1005840" y="1143000"/>
-            <a:ext cx="1828800" cy="274320"/>
-          </a:xfrm>
-          <a:prstGeom prst="rect">
-            <a:avLst/>
-          </a:prstGeom>
-          <a:noFill/>
-          <a:ln/>
-        </p:spPr>
-        <p:txBody>
-          <a:bodyPr wrap="square" lIns="0" tIns="0" rIns="0" bIns="0" rtlCol="0" anchor="ctr"/>
-          <a:lstStyle/>
-          <a:p>
-            <a:pPr indent="0" marL="0">
-              <a:buNone/>
-            </a:pPr>
-            <a:r>
-              <a:rPr lang="en-US" sz="1500" b="1" dirty="0">
-                <a:solidFill>
-                  <a:srgbClr val="FFFFFF"/>
-                </a:solidFill>
-                <a:latin typeface="Arial" pitchFamily="34" charset="0"/>
-                <a:ea typeface="Arial" pitchFamily="34" charset="-122"/>
-                <a:cs typeface="Arial" pitchFamily="34" charset="-120"/>
-              </a:rPr>
-              <a:t>Backend</a:t>
-            </a:r>
-            <a:endParaRPr lang="en-US" sz="1500" dirty="0"/>
-          </a:p>
-        </p:txBody>
-      </p:sp>
-      <p:sp>
-        <p:nvSpPr>
-          <p:cNvPr id="6" name="Text 4"/>
-          <p:cNvSpPr/>
-          <p:nvPr/>
-        </p:nvSpPr>
-        <p:spPr>
-          <a:xfrm>
-            <a:off x="1005840" y="1399032"/>
-            <a:ext cx="6858000" cy="228600"/>
-          </a:xfrm>
-          <a:prstGeom prst="rect">
-            <a:avLst/>
-          </a:prstGeom>
-          <a:noFill/>
-          <a:ln/>
-        </p:spPr>
-        <p:txBody>
-          <a:bodyPr wrap="square" lIns="0" tIns="0" rIns="0" bIns="0" rtlCol="0" anchor="ctr"/>
-          <a:lstStyle/>
-          <a:p>
-            <a:pPr indent="0" marL="0">
-              <a:buNone/>
-            </a:pPr>
-            <a:r>
-              <a:rPr lang="en-US" sz="1200" dirty="0">
+              <a:t>All Models Tested</a:t>
+            </a:r>
+            <a:endParaRPr lang="en-US" sz="3000" dirty="0"/>
+          </a:p>
+        </p:txBody>
+      </p:sp>
+      <p:sp>
+        <p:nvSpPr>
+          <p:cNvPr id="3" name="Text 1"/>
+          <p:cNvSpPr/>
+          <p:nvPr/>
+        </p:nvSpPr>
+        <p:spPr>
+          <a:xfrm>
+            <a:off x="640080" y="731520"/>
+            <a:ext cx="7315200" cy="274320"/>
+          </a:xfrm>
+          <a:prstGeom prst="rect">
+            <a:avLst/>
+          </a:prstGeom>
+          <a:noFill/>
+          <a:ln/>
+        </p:spPr>
+        <p:txBody>
+          <a:bodyPr wrap="square" lIns="0" tIns="0" rIns="0" bIns="0" rtlCol="0" anchor="ctr"/>
+          <a:lstStyle/>
+          <a:p>
+            <a:pPr indent="0" marL="0">
+              <a:buNone/>
+            </a:pPr>
+            <a:r>
+              <a:rPr lang="en-US" sz="1300" dirty="0">
                 <a:solidFill>
                   <a:srgbClr val="71717A"/>
                 </a:solidFill>
@@ -5702,492 +6869,36 @@
                 <a:ea typeface="Arial" pitchFamily="34" charset="-122"/>
                 <a:cs typeface="Arial" pitchFamily="34" charset="-120"/>
               </a:rPr>
-              <a:t>FastAPI + Python, scikit-learn, PyTorch</a:t>
-            </a:r>
-            <a:endParaRPr lang="en-US" sz="1200" dirty="0"/>
-          </a:p>
-        </p:txBody>
-      </p:sp>
-      <p:sp>
-        <p:nvSpPr>
-          <p:cNvPr id="7" name="Shape 5"/>
-          <p:cNvSpPr/>
-          <p:nvPr/>
-        </p:nvSpPr>
-        <p:spPr>
-          <a:xfrm>
-            <a:off x="640080" y="1828800"/>
-            <a:ext cx="7863840" cy="594360"/>
-          </a:xfrm>
-          <a:prstGeom prst="roundRect">
-            <a:avLst>
-              <a:gd name="adj" fmla="val 12308"/>
-            </a:avLst>
-          </a:prstGeom>
-          <a:solidFill>
-            <a:srgbClr val="13131A"/>
-          </a:solidFill>
-          <a:ln/>
-        </p:spPr>
-      </p:sp>
-      <p:sp>
-        <p:nvSpPr>
-          <p:cNvPr id="8" name="Shape 6"/>
-          <p:cNvSpPr/>
-          <p:nvPr/>
-        </p:nvSpPr>
-        <p:spPr>
-          <a:xfrm>
-            <a:off x="640080" y="1828800"/>
-            <a:ext cx="54864" cy="594360"/>
-          </a:xfrm>
-          <a:prstGeom prst="rect">
-            <a:avLst/>
-          </a:prstGeom>
-          <a:solidFill>
-            <a:srgbClr val="4DABF7"/>
-          </a:solidFill>
-          <a:ln/>
-        </p:spPr>
-      </p:sp>
-      <p:sp>
-        <p:nvSpPr>
-          <p:cNvPr id="9" name="Text 7"/>
-          <p:cNvSpPr/>
-          <p:nvPr/>
-        </p:nvSpPr>
-        <p:spPr>
-          <a:xfrm>
-            <a:off x="1005840" y="1874520"/>
-            <a:ext cx="1828800" cy="274320"/>
-          </a:xfrm>
-          <a:prstGeom prst="rect">
-            <a:avLst/>
-          </a:prstGeom>
-          <a:noFill/>
-          <a:ln/>
-        </p:spPr>
-        <p:txBody>
-          <a:bodyPr wrap="square" lIns="0" tIns="0" rIns="0" bIns="0" rtlCol="0" anchor="ctr"/>
-          <a:lstStyle/>
-          <a:p>
-            <a:pPr indent="0" marL="0">
-              <a:buNone/>
-            </a:pPr>
-            <a:r>
-              <a:rPr lang="en-US" sz="1500" b="1" dirty="0">
-                <a:solidFill>
-                  <a:srgbClr val="FFFFFF"/>
-                </a:solidFill>
-                <a:latin typeface="Arial" pitchFamily="34" charset="0"/>
-                <a:ea typeface="Arial" pitchFamily="34" charset="-122"/>
-                <a:cs typeface="Arial" pitchFamily="34" charset="-120"/>
-              </a:rPr>
-              <a:t>Frontend</a:t>
-            </a:r>
-            <a:endParaRPr lang="en-US" sz="1500" dirty="0"/>
-          </a:p>
-        </p:txBody>
-      </p:sp>
-      <p:sp>
-        <p:nvSpPr>
-          <p:cNvPr id="10" name="Text 8"/>
-          <p:cNvSpPr/>
-          <p:nvPr/>
-        </p:nvSpPr>
-        <p:spPr>
-          <a:xfrm>
-            <a:off x="1005840" y="2130552"/>
-            <a:ext cx="6858000" cy="228600"/>
-          </a:xfrm>
-          <a:prstGeom prst="rect">
-            <a:avLst/>
-          </a:prstGeom>
-          <a:noFill/>
-          <a:ln/>
-        </p:spPr>
-        <p:txBody>
-          <a:bodyPr wrap="square" lIns="0" tIns="0" rIns="0" bIns="0" rtlCol="0" anchor="ctr"/>
-          <a:lstStyle/>
-          <a:p>
-            <a:pPr indent="0" marL="0">
-              <a:buNone/>
-            </a:pPr>
-            <a:r>
-              <a:rPr lang="en-US" sz="1200" dirty="0">
-                <a:solidFill>
-                  <a:srgbClr val="71717A"/>
-                </a:solidFill>
-                <a:latin typeface="Arial" pitchFamily="34" charset="0"/>
-                <a:ea typeface="Arial" pitchFamily="34" charset="-122"/>
-                <a:cs typeface="Arial" pitchFamily="34" charset="-120"/>
-              </a:rPr>
-              <a:t>Next.js 14, React 18, TailwindCSS</a:t>
-            </a:r>
-            <a:endParaRPr lang="en-US" sz="1200" dirty="0"/>
-          </a:p>
-        </p:txBody>
-      </p:sp>
-      <p:sp>
-        <p:nvSpPr>
-          <p:cNvPr id="11" name="Shape 9"/>
-          <p:cNvSpPr/>
-          <p:nvPr/>
-        </p:nvSpPr>
-        <p:spPr>
-          <a:xfrm>
-            <a:off x="640080" y="2560320"/>
-            <a:ext cx="7863840" cy="594360"/>
-          </a:xfrm>
-          <a:prstGeom prst="roundRect">
-            <a:avLst>
-              <a:gd name="adj" fmla="val 12308"/>
-            </a:avLst>
-          </a:prstGeom>
-          <a:solidFill>
-            <a:srgbClr val="13131A"/>
-          </a:solidFill>
-          <a:ln/>
-        </p:spPr>
-      </p:sp>
-      <p:sp>
-        <p:nvSpPr>
-          <p:cNvPr id="12" name="Shape 10"/>
-          <p:cNvSpPr/>
-          <p:nvPr/>
-        </p:nvSpPr>
-        <p:spPr>
-          <a:xfrm>
-            <a:off x="640080" y="2560320"/>
-            <a:ext cx="54864" cy="594360"/>
-          </a:xfrm>
-          <a:prstGeom prst="rect">
-            <a:avLst/>
-          </a:prstGeom>
-          <a:solidFill>
-            <a:srgbClr val="6C5CE7"/>
-          </a:solidFill>
-          <a:ln/>
-        </p:spPr>
-      </p:sp>
-      <p:sp>
-        <p:nvSpPr>
-          <p:cNvPr id="13" name="Text 11"/>
-          <p:cNvSpPr/>
-          <p:nvPr/>
-        </p:nvSpPr>
-        <p:spPr>
-          <a:xfrm>
-            <a:off x="1005840" y="2606040"/>
-            <a:ext cx="1828800" cy="274320"/>
-          </a:xfrm>
-          <a:prstGeom prst="rect">
-            <a:avLst/>
-          </a:prstGeom>
-          <a:noFill/>
-          <a:ln/>
-        </p:spPr>
-        <p:txBody>
-          <a:bodyPr wrap="square" lIns="0" tIns="0" rIns="0" bIns="0" rtlCol="0" anchor="ctr"/>
-          <a:lstStyle/>
-          <a:p>
-            <a:pPr indent="0" marL="0">
-              <a:buNone/>
-            </a:pPr>
-            <a:r>
-              <a:rPr lang="en-US" sz="1500" b="1" dirty="0">
-                <a:solidFill>
-                  <a:srgbClr val="FFFFFF"/>
-                </a:solidFill>
-                <a:latin typeface="Arial" pitchFamily="34" charset="0"/>
-                <a:ea typeface="Arial" pitchFamily="34" charset="-122"/>
-                <a:cs typeface="Arial" pitchFamily="34" charset="-120"/>
-              </a:rPr>
-              <a:t>Data</a:t>
-            </a:r>
-            <a:endParaRPr lang="en-US" sz="1500" dirty="0"/>
-          </a:p>
-        </p:txBody>
-      </p:sp>
-      <p:sp>
-        <p:nvSpPr>
-          <p:cNvPr id="14" name="Text 12"/>
-          <p:cNvSpPr/>
-          <p:nvPr/>
-        </p:nvSpPr>
-        <p:spPr>
-          <a:xfrm>
-            <a:off x="1005840" y="2862072"/>
-            <a:ext cx="6858000" cy="228600"/>
-          </a:xfrm>
-          <a:prstGeom prst="rect">
-            <a:avLst/>
-          </a:prstGeom>
-          <a:noFill/>
-          <a:ln/>
-        </p:spPr>
-        <p:txBody>
-          <a:bodyPr wrap="square" lIns="0" tIns="0" rIns="0" bIns="0" rtlCol="0" anchor="ctr"/>
-          <a:lstStyle/>
-          <a:p>
-            <a:pPr indent="0" marL="0">
-              <a:buNone/>
-            </a:pPr>
-            <a:r>
-              <a:rPr lang="en-US" sz="1200" dirty="0">
-                <a:solidFill>
-                  <a:srgbClr val="71717A"/>
-                </a:solidFill>
-                <a:latin typeface="Arial" pitchFamily="34" charset="0"/>
-                <a:ea typeface="Arial" pitchFamily="34" charset="-122"/>
-                <a:cs typeface="Arial" pitchFamily="34" charset="-120"/>
-              </a:rPr>
-              <a:t>BGeometrics Premium, Binance.US, Coinbase, Polymarket</a:t>
-            </a:r>
-            <a:endParaRPr lang="en-US" sz="1200" dirty="0"/>
-          </a:p>
-        </p:txBody>
-      </p:sp>
-      <p:sp>
-        <p:nvSpPr>
-          <p:cNvPr id="15" name="Shape 13"/>
-          <p:cNvSpPr/>
-          <p:nvPr/>
-        </p:nvSpPr>
-        <p:spPr>
-          <a:xfrm>
-            <a:off x="640080" y="3291840"/>
-            <a:ext cx="7863840" cy="594360"/>
-          </a:xfrm>
-          <a:prstGeom prst="roundRect">
-            <a:avLst>
-              <a:gd name="adj" fmla="val 12308"/>
-            </a:avLst>
-          </a:prstGeom>
-          <a:solidFill>
-            <a:srgbClr val="13131A"/>
-          </a:solidFill>
-          <a:ln/>
-        </p:spPr>
-      </p:sp>
-      <p:sp>
-        <p:nvSpPr>
-          <p:cNvPr id="16" name="Shape 14"/>
-          <p:cNvSpPr/>
-          <p:nvPr/>
-        </p:nvSpPr>
-        <p:spPr>
-          <a:xfrm>
-            <a:off x="640080" y="3291840"/>
-            <a:ext cx="54864" cy="594360"/>
-          </a:xfrm>
-          <a:prstGeom prst="rect">
-            <a:avLst/>
-          </a:prstGeom>
-          <a:solidFill>
-            <a:srgbClr val="FFD93D"/>
-          </a:solidFill>
-          <a:ln/>
-        </p:spPr>
-      </p:sp>
-      <p:sp>
-        <p:nvSpPr>
-          <p:cNvPr id="17" name="Text 15"/>
-          <p:cNvSpPr/>
-          <p:nvPr/>
-        </p:nvSpPr>
-        <p:spPr>
-          <a:xfrm>
-            <a:off x="1005840" y="3337560"/>
-            <a:ext cx="1828800" cy="274320"/>
-          </a:xfrm>
-          <a:prstGeom prst="rect">
-            <a:avLst/>
-          </a:prstGeom>
-          <a:noFill/>
-          <a:ln/>
-        </p:spPr>
-        <p:txBody>
-          <a:bodyPr wrap="square" lIns="0" tIns="0" rIns="0" bIns="0" rtlCol="0" anchor="ctr"/>
-          <a:lstStyle/>
-          <a:p>
-            <a:pPr indent="0" marL="0">
-              <a:buNone/>
-            </a:pPr>
-            <a:r>
-              <a:rPr lang="en-US" sz="1500" b="1" dirty="0">
-                <a:solidFill>
-                  <a:srgbClr val="FFFFFF"/>
-                </a:solidFill>
-                <a:latin typeface="Arial" pitchFamily="34" charset="0"/>
-                <a:ea typeface="Arial" pitchFamily="34" charset="-122"/>
-                <a:cs typeface="Arial" pitchFamily="34" charset="-120"/>
-              </a:rPr>
-              <a:t>Price</a:t>
-            </a:r>
-            <a:endParaRPr lang="en-US" sz="1500" dirty="0"/>
-          </a:p>
-        </p:txBody>
-      </p:sp>
-      <p:sp>
-        <p:nvSpPr>
-          <p:cNvPr id="18" name="Text 16"/>
-          <p:cNvSpPr/>
-          <p:nvPr/>
-        </p:nvSpPr>
-        <p:spPr>
-          <a:xfrm>
-            <a:off x="1005840" y="3593592"/>
-            <a:ext cx="6858000" cy="228600"/>
-          </a:xfrm>
-          <a:prstGeom prst="rect">
-            <a:avLst/>
-          </a:prstGeom>
-          <a:noFill/>
-          <a:ln/>
-        </p:spPr>
-        <p:txBody>
-          <a:bodyPr wrap="square" lIns="0" tIns="0" rIns="0" bIns="0" rtlCol="0" anchor="ctr"/>
-          <a:lstStyle/>
-          <a:p>
-            <a:pPr indent="0" marL="0">
-              <a:buNone/>
-            </a:pPr>
-            <a:r>
-              <a:rPr lang="en-US" sz="1200" dirty="0">
-                <a:solidFill>
-                  <a:srgbClr val="71717A"/>
-                </a:solidFill>
-                <a:latin typeface="Arial" pitchFamily="34" charset="0"/>
-                <a:ea typeface="Arial" pitchFamily="34" charset="-122"/>
-                <a:cs typeface="Arial" pitchFamily="34" charset="-120"/>
-              </a:rPr>
-              <a:t>TrueMarkets MCP (same source everywhere)</a:t>
-            </a:r>
-            <a:endParaRPr lang="en-US" sz="1200" dirty="0"/>
-          </a:p>
-        </p:txBody>
-      </p:sp>
-      <p:sp>
-        <p:nvSpPr>
-          <p:cNvPr id="19" name="Shape 17"/>
-          <p:cNvSpPr/>
-          <p:nvPr/>
-        </p:nvSpPr>
-        <p:spPr>
-          <a:xfrm>
-            <a:off x="640080" y="4023360"/>
-            <a:ext cx="7863840" cy="594360"/>
-          </a:xfrm>
-          <a:prstGeom prst="roundRect">
-            <a:avLst>
-              <a:gd name="adj" fmla="val 12308"/>
-            </a:avLst>
-          </a:prstGeom>
-          <a:solidFill>
-            <a:srgbClr val="13131A"/>
-          </a:solidFill>
-          <a:ln/>
-        </p:spPr>
-      </p:sp>
-      <p:sp>
-        <p:nvSpPr>
-          <p:cNvPr id="20" name="Shape 18"/>
-          <p:cNvSpPr/>
-          <p:nvPr/>
-        </p:nvSpPr>
-        <p:spPr>
-          <a:xfrm>
-            <a:off x="640080" y="4023360"/>
-            <a:ext cx="54864" cy="594360"/>
-          </a:xfrm>
-          <a:prstGeom prst="rect">
-            <a:avLst/>
-          </a:prstGeom>
-          <a:solidFill>
-            <a:srgbClr val="FF6B6B"/>
-          </a:solidFill>
-          <a:ln/>
-        </p:spPr>
-      </p:sp>
-      <p:sp>
-        <p:nvSpPr>
-          <p:cNvPr id="21" name="Text 19"/>
-          <p:cNvSpPr/>
-          <p:nvPr/>
-        </p:nvSpPr>
-        <p:spPr>
-          <a:xfrm>
-            <a:off x="1005840" y="4069080"/>
-            <a:ext cx="1828800" cy="274320"/>
-          </a:xfrm>
-          <a:prstGeom prst="rect">
-            <a:avLst/>
-          </a:prstGeom>
-          <a:noFill/>
-          <a:ln/>
-        </p:spPr>
-        <p:txBody>
-          <a:bodyPr wrap="square" lIns="0" tIns="0" rIns="0" bIns="0" rtlCol="0" anchor="ctr"/>
-          <a:lstStyle/>
-          <a:p>
-            <a:pPr indent="0" marL="0">
-              <a:buNone/>
-            </a:pPr>
-            <a:r>
-              <a:rPr lang="en-US" sz="1500" b="1" dirty="0">
-                <a:solidFill>
-                  <a:srgbClr val="FFFFFF"/>
-                </a:solidFill>
-                <a:latin typeface="Arial" pitchFamily="34" charset="0"/>
-                <a:ea typeface="Arial" pitchFamily="34" charset="-122"/>
-                <a:cs typeface="Arial" pitchFamily="34" charset="-120"/>
-              </a:rPr>
-              <a:t>Refresh</a:t>
-            </a:r>
-            <a:endParaRPr lang="en-US" sz="1500" dirty="0"/>
-          </a:p>
-        </p:txBody>
-      </p:sp>
-      <p:sp>
-        <p:nvSpPr>
-          <p:cNvPr id="22" name="Text 20"/>
-          <p:cNvSpPr/>
-          <p:nvPr/>
-        </p:nvSpPr>
-        <p:spPr>
-          <a:xfrm>
-            <a:off x="1005840" y="4325112"/>
-            <a:ext cx="6858000" cy="228600"/>
-          </a:xfrm>
-          <a:prstGeom prst="rect">
-            <a:avLst/>
-          </a:prstGeom>
-          <a:noFill/>
-          <a:ln/>
-        </p:spPr>
-        <p:txBody>
-          <a:bodyPr wrap="square" lIns="0" tIns="0" rIns="0" bIns="0" rtlCol="0" anchor="ctr"/>
-          <a:lstStyle/>
-          <a:p>
-            <a:pPr indent="0" marL="0">
-              <a:buNone/>
-            </a:pPr>
-            <a:r>
-              <a:rPr lang="en-US" sz="1200" dirty="0">
-                <a:solidFill>
-                  <a:srgbClr val="71717A"/>
-                </a:solidFill>
-                <a:latin typeface="Arial" pitchFamily="34" charset="0"/>
-                <a:ea typeface="Arial" pitchFamily="34" charset="-122"/>
-                <a:cs typeface="Arial" pitchFamily="34" charset="-120"/>
-              </a:rPr>
-              <a:t>30 seconds, all 6 signals</a:t>
-            </a:r>
-            <a:endParaRPr lang="en-US" sz="1200" dirty="0"/>
-          </a:p>
-        </p:txBody>
-      </p:sp>
+              <a:t>12 model configurations compared on OOS BTC direction prediction</a:t>
+            </a:r>
+            <a:endParaRPr lang="en-US" sz="1300" dirty="0"/>
+          </a:p>
+        </p:txBody>
+      </p:sp>
+      <p:pic>
+        <p:nvPicPr>
+          <p:cNvPr id="4" name="Image 0" descr="preencoded.png">    </p:cNvPr>
+          <p:cNvPicPr>
+            <a:picLocks noChangeAspect="1"/>
+          </p:cNvPicPr>
+          <p:nvPr/>
+        </p:nvPicPr>
+        <p:blipFill>
+          <a:blip r:embed="rId1"/>
+          <a:stretch>
+            <a:fillRect/>
+          </a:stretch>
+        </p:blipFill>
+        <p:spPr>
+          <a:xfrm>
+            <a:off x="182880" y="1005840"/>
+            <a:ext cx="8778240" cy="3931920"/>
+          </a:xfrm>
+          <a:prstGeom prst="rect">
+            <a:avLst/>
+          </a:prstGeom>
+        </p:spPr>
+      </p:pic>
     </p:spTree>
   </p:cSld>
   <p:clrMapOvr>
@@ -6228,7 +6939,7 @@
         </p:nvSpPr>
         <p:spPr>
           <a:xfrm>
-            <a:off x="640080" y="365760"/>
+            <a:off x="640080" y="274320"/>
             <a:ext cx="7315200" cy="548640"/>
           </a:xfrm>
           <a:prstGeom prst="rect">
@@ -6245,7 +6956,7 @@
               <a:buNone/>
             </a:pPr>
             <a:r>
-              <a:rPr lang="en-US" sz="3600" b="1" dirty="0">
+              <a:rPr lang="en-US" sz="3200" b="1" dirty="0">
                 <a:solidFill>
                   <a:srgbClr val="FFFFFF"/>
                 </a:solidFill>
@@ -6253,9 +6964,9 @@
                 <a:ea typeface="Arial Black" pitchFamily="34" charset="-122"/>
                 <a:cs typeface="Arial Black" pitchFamily="34" charset="-120"/>
               </a:rPr>
-              <a:t>The Product</a:t>
-            </a:r>
-            <a:endParaRPr lang="en-US" sz="3600" dirty="0"/>
+              <a:t>Where It Goes From Here</a:t>
+            </a:r>
+            <a:endParaRPr lang="en-US" sz="3200" dirty="0"/>
           </a:p>
         </p:txBody>
       </p:sp>
@@ -6267,12 +6978,12 @@
         </p:nvSpPr>
         <p:spPr>
           <a:xfrm>
-            <a:off x="640080" y="1097280"/>
-            <a:ext cx="3749040" cy="3474720"/>
+            <a:off x="640080" y="1005840"/>
+            <a:ext cx="3931920" cy="3840480"/>
           </a:xfrm>
           <a:prstGeom prst="roundRect">
             <a:avLst>
-              <a:gd name="adj" fmla="val 2632"/>
+              <a:gd name="adj" fmla="val 2381"/>
             </a:avLst>
           </a:prstGeom>
           <a:solidFill>
@@ -6289,24 +7000,24 @@
         </p:nvSpPr>
         <p:spPr>
           <a:xfrm>
-            <a:off x="822960" y="1188720"/>
-            <a:ext cx="3200400" cy="365760"/>
-          </a:xfrm>
-          <a:prstGeom prst="rect">
-            <a:avLst/>
-          </a:prstGeom>
-          <a:noFill/>
-          <a:ln/>
-        </p:spPr>
-        <p:txBody>
-          <a:bodyPr wrap="square" lIns="0" tIns="0" rIns="0" bIns="0" rtlCol="0" anchor="ctr"/>
-          <a:lstStyle/>
-          <a:p>
-            <a:pPr indent="0" marL="0">
-              <a:buNone/>
-            </a:pPr>
-            <a:r>
-              <a:rPr lang="en-US" sz="1800" b="1" dirty="0">
+            <a:off x="822960" y="1097280"/>
+            <a:ext cx="3200400" cy="320040"/>
+          </a:xfrm>
+          <a:prstGeom prst="rect">
+            <a:avLst/>
+          </a:prstGeom>
+          <a:noFill/>
+          <a:ln/>
+        </p:spPr>
+        <p:txBody>
+          <a:bodyPr wrap="square" lIns="0" tIns="0" rIns="0" bIns="0" rtlCol="0" anchor="ctr"/>
+          <a:lstStyle/>
+          <a:p>
+            <a:pPr indent="0" marL="0">
+              <a:buNone/>
+            </a:pPr>
+            <a:r>
+              <a:rPr lang="en-US" sz="1600" b="1" dirty="0">
                 <a:solidFill>
                   <a:srgbClr val="00D4AA"/>
                 </a:solidFill>
@@ -6314,101 +7025,360 @@
                 <a:ea typeface="Arial" pitchFamily="34" charset="-122"/>
                 <a:cs typeface="Arial" pitchFamily="34" charset="-120"/>
               </a:rPr>
-              <a:t>Market Page</a:t>
-            </a:r>
-            <a:endParaRPr lang="en-US" sz="1800" dirty="0"/>
-          </a:p>
-        </p:txBody>
-      </p:sp>
-      <p:sp>
-        <p:nvSpPr>
-          <p:cNvPr id="5" name="Text 3"/>
-          <p:cNvSpPr/>
-          <p:nvPr/>
-        </p:nvSpPr>
-        <p:spPr>
-          <a:xfrm>
-            <a:off x="822960" y="1645920"/>
-            <a:ext cx="3383280" cy="2286000"/>
-          </a:xfrm>
-          <a:prstGeom prst="rect">
-            <a:avLst/>
-          </a:prstGeom>
-          <a:noFill/>
-          <a:ln/>
-        </p:spPr>
-        <p:txBody>
-          <a:bodyPr wrap="square" rtlCol="0" anchor="ctr"/>
-          <a:lstStyle/>
-          <a:p>
-            <a:pPr marL="342900" indent="-342900">
-              <a:buSzPct val="100000"/>
-              <a:buChar char="•"/>
-            </a:pPr>
-            <a:r>
-              <a:rPr lang="en-US" sz="1200" dirty="0">
-                <a:solidFill>
-                  <a:srgbClr val="E4E4E7"/>
-                </a:solidFill>
-                <a:latin typeface="Arial" pitchFamily="34" charset="0"/>
-                <a:ea typeface="Arial" pitchFamily="34" charset="-122"/>
-                <a:cs typeface="Arial" pitchFamily="34" charset="-120"/>
-              </a:rPr>
-              <a:t>Live BTC price + chart</a:t>
+              <a:t>Next Steps</a:t>
+            </a:r>
+            <a:endParaRPr lang="en-US" sz="1600" dirty="0"/>
+          </a:p>
+        </p:txBody>
+      </p:sp>
+      <p:sp>
+        <p:nvSpPr>
+          <p:cNvPr id="5" name="Shape 3"/>
+          <p:cNvSpPr/>
+          <p:nvPr/>
+        </p:nvSpPr>
+        <p:spPr>
+          <a:xfrm>
+            <a:off x="868680" y="1554480"/>
+            <a:ext cx="137160" cy="137160"/>
+          </a:xfrm>
+          <a:prstGeom prst="ellipse">
+            <a:avLst/>
+          </a:prstGeom>
+          <a:solidFill>
+            <a:srgbClr val="00D4AA"/>
+          </a:solidFill>
+          <a:ln/>
+        </p:spPr>
+      </p:sp>
+      <p:sp>
+        <p:nvSpPr>
+          <p:cNvPr id="6" name="Text 4"/>
+          <p:cNvSpPr/>
+          <p:nvPr/>
+        </p:nvSpPr>
+        <p:spPr>
+          <a:xfrm>
+            <a:off x="1143000" y="1508760"/>
+            <a:ext cx="3200400" cy="228600"/>
+          </a:xfrm>
+          <a:prstGeom prst="rect">
+            <a:avLst/>
+          </a:prstGeom>
+          <a:noFill/>
+          <a:ln/>
+        </p:spPr>
+        <p:txBody>
+          <a:bodyPr wrap="square" lIns="0" tIns="0" rIns="0" bIns="0" rtlCol="0" anchor="ctr"/>
+          <a:lstStyle/>
+          <a:p>
+            <a:pPr indent="0" marL="0">
+              <a:buNone/>
+            </a:pPr>
+            <a:r>
+              <a:rPr lang="en-US" sz="1200" b="1" dirty="0">
+                <a:solidFill>
+                  <a:srgbClr val="FFFFFF"/>
+                </a:solidFill>
+                <a:latin typeface="Arial" pitchFamily="34" charset="0"/>
+                <a:ea typeface="Arial" pitchFamily="34" charset="-122"/>
+                <a:cs typeface="Arial" pitchFamily="34" charset="-120"/>
+              </a:rPr>
+              <a:t>Glassnode Pro (87 features)</a:t>
             </a:r>
             <a:endParaRPr lang="en-US" sz="1200" dirty="0"/>
           </a:p>
-          <a:p>
-            <a:pPr marL="342900" indent="-342900">
-              <a:buSzPct val="100000"/>
-              <a:buChar char="•"/>
-            </a:pPr>
-            <a:r>
-              <a:rPr lang="en-US" sz="1200" dirty="0">
-                <a:solidFill>
-                  <a:srgbClr val="E4E4E7"/>
-                </a:solidFill>
-                <a:latin typeface="Arial" pitchFamily="34" charset="0"/>
-                <a:ea typeface="Arial" pitchFamily="34" charset="-122"/>
-                <a:cs typeface="Arial" pitchFamily="34" charset="-120"/>
-              </a:rPr>
-              <a:t>Market cap, volume, highs/lows</a:t>
+        </p:txBody>
+      </p:sp>
+      <p:sp>
+        <p:nvSpPr>
+          <p:cNvPr id="7" name="Text 5"/>
+          <p:cNvSpPr/>
+          <p:nvPr/>
+        </p:nvSpPr>
+        <p:spPr>
+          <a:xfrm>
+            <a:off x="1143000" y="1764792"/>
+            <a:ext cx="3200400" cy="457200"/>
+          </a:xfrm>
+          <a:prstGeom prst="rect">
+            <a:avLst/>
+          </a:prstGeom>
+          <a:noFill/>
+          <a:ln/>
+        </p:spPr>
+        <p:txBody>
+          <a:bodyPr wrap="square" lIns="0" tIns="0" rIns="0" bIns="0" rtlCol="0" anchor="ctr"/>
+          <a:lstStyle/>
+          <a:p>
+            <a:pPr indent="0" marL="0">
+              <a:buNone/>
+            </a:pPr>
+            <a:r>
+              <a:rPr lang="en-US" sz="1000" dirty="0">
+                <a:solidFill>
+                  <a:srgbClr val="71717A"/>
+                </a:solidFill>
+                <a:latin typeface="Arial" pitchFamily="34" charset="0"/>
+                <a:ea typeface="Arial" pitchFamily="34" charset="-122"/>
+                <a:cs typeface="Arial" pitchFamily="34" charset="-120"/>
+              </a:rPr>
+              <a:t>Paper achieves 82.44% with full Glassnode data. We have 42 features from BGeometrics. More data = higher accuracy.</a:t>
+            </a:r>
+            <a:endParaRPr lang="en-US" sz="1000" dirty="0"/>
+          </a:p>
+        </p:txBody>
+      </p:sp>
+      <p:sp>
+        <p:nvSpPr>
+          <p:cNvPr id="8" name="Shape 6"/>
+          <p:cNvSpPr/>
+          <p:nvPr/>
+        </p:nvSpPr>
+        <p:spPr>
+          <a:xfrm>
+            <a:off x="868680" y="2331720"/>
+            <a:ext cx="137160" cy="137160"/>
+          </a:xfrm>
+          <a:prstGeom prst="ellipse">
+            <a:avLst/>
+          </a:prstGeom>
+          <a:solidFill>
+            <a:srgbClr val="6C5CE7"/>
+          </a:solidFill>
+          <a:ln/>
+        </p:spPr>
+      </p:sp>
+      <p:sp>
+        <p:nvSpPr>
+          <p:cNvPr id="9" name="Text 7"/>
+          <p:cNvSpPr/>
+          <p:nvPr/>
+        </p:nvSpPr>
+        <p:spPr>
+          <a:xfrm>
+            <a:off x="1143000" y="2286000"/>
+            <a:ext cx="3200400" cy="228600"/>
+          </a:xfrm>
+          <a:prstGeom prst="rect">
+            <a:avLst/>
+          </a:prstGeom>
+          <a:noFill/>
+          <a:ln/>
+        </p:spPr>
+        <p:txBody>
+          <a:bodyPr wrap="square" lIns="0" tIns="0" rIns="0" bIns="0" rtlCol="0" anchor="ctr"/>
+          <a:lstStyle/>
+          <a:p>
+            <a:pPr indent="0" marL="0">
+              <a:buNone/>
+            </a:pPr>
+            <a:r>
+              <a:rPr lang="en-US" sz="1200" b="1" dirty="0">
+                <a:solidFill>
+                  <a:srgbClr val="FFFFFF"/>
+                </a:solidFill>
+                <a:latin typeface="Arial" pitchFamily="34" charset="0"/>
+                <a:ea typeface="Arial" pitchFamily="34" charset="-122"/>
+                <a:cs typeface="Arial" pitchFamily="34" charset="-120"/>
+              </a:rPr>
+              <a:t>CNN-LSTM architecture</a:t>
             </a:r>
             <a:endParaRPr lang="en-US" sz="1200" dirty="0"/>
           </a:p>
-          <a:p>
-            <a:pPr marL="342900" indent="-342900">
-              <a:buSzPct val="100000"/>
-              <a:buChar char="•"/>
-            </a:pPr>
-            <a:r>
-              <a:rPr lang="en-US" sz="1200" dirty="0">
-                <a:solidFill>
-                  <a:srgbClr val="E4E4E7"/>
-                </a:solidFill>
-                <a:latin typeface="Arial" pitchFamily="34" charset="0"/>
-                <a:ea typeface="Arial" pitchFamily="34" charset="-122"/>
-                <a:cs typeface="Arial" pitchFamily="34" charset="-120"/>
-              </a:rPr>
-              <a:t>Fear &amp; Greed Index</a:t>
+        </p:txBody>
+      </p:sp>
+      <p:sp>
+        <p:nvSpPr>
+          <p:cNvPr id="10" name="Text 8"/>
+          <p:cNvSpPr/>
+          <p:nvPr/>
+        </p:nvSpPr>
+        <p:spPr>
+          <a:xfrm>
+            <a:off x="1143000" y="2542032"/>
+            <a:ext cx="3200400" cy="457200"/>
+          </a:xfrm>
+          <a:prstGeom prst="rect">
+            <a:avLst/>
+          </a:prstGeom>
+          <a:noFill/>
+          <a:ln/>
+        </p:spPr>
+        <p:txBody>
+          <a:bodyPr wrap="square" lIns="0" tIns="0" rIns="0" bIns="0" rtlCol="0" anchor="ctr"/>
+          <a:lstStyle/>
+          <a:p>
+            <a:pPr indent="0" marL="0">
+              <a:buNone/>
+            </a:pPr>
+            <a:r>
+              <a:rPr lang="en-US" sz="1000" dirty="0">
+                <a:solidFill>
+                  <a:srgbClr val="71717A"/>
+                </a:solidFill>
+                <a:latin typeface="Arial" pitchFamily="34" charset="0"/>
+                <a:ea typeface="Arial" pitchFamily="34" charset="-122"/>
+                <a:cs typeface="Arial" pitchFamily="34" charset="-120"/>
+              </a:rPr>
+              <a:t>Omole &amp; Enke 2024 CNN-LSTM with 87 Glassnode features reached 82.44%. Our GradientBoosting at 67.4% is limited by data, not architecture.</a:t>
+            </a:r>
+            <a:endParaRPr lang="en-US" sz="1000" dirty="0"/>
+          </a:p>
+        </p:txBody>
+      </p:sp>
+      <p:sp>
+        <p:nvSpPr>
+          <p:cNvPr id="11" name="Shape 9"/>
+          <p:cNvSpPr/>
+          <p:nvPr/>
+        </p:nvSpPr>
+        <p:spPr>
+          <a:xfrm>
+            <a:off x="868680" y="3108960"/>
+            <a:ext cx="137160" cy="137160"/>
+          </a:xfrm>
+          <a:prstGeom prst="ellipse">
+            <a:avLst/>
+          </a:prstGeom>
+          <a:solidFill>
+            <a:srgbClr val="4DABF7"/>
+          </a:solidFill>
+          <a:ln/>
+        </p:spPr>
+      </p:sp>
+      <p:sp>
+        <p:nvSpPr>
+          <p:cNvPr id="12" name="Text 10"/>
+          <p:cNvSpPr/>
+          <p:nvPr/>
+        </p:nvSpPr>
+        <p:spPr>
+          <a:xfrm>
+            <a:off x="1143000" y="3063240"/>
+            <a:ext cx="3200400" cy="228600"/>
+          </a:xfrm>
+          <a:prstGeom prst="rect">
+            <a:avLst/>
+          </a:prstGeom>
+          <a:noFill/>
+          <a:ln/>
+        </p:spPr>
+        <p:txBody>
+          <a:bodyPr wrap="square" lIns="0" tIns="0" rIns="0" bIns="0" rtlCol="0" anchor="ctr"/>
+          <a:lstStyle/>
+          <a:p>
+            <a:pPr indent="0" marL="0">
+              <a:buNone/>
+            </a:pPr>
+            <a:r>
+              <a:rPr lang="en-US" sz="1200" b="1" dirty="0">
+                <a:solidFill>
+                  <a:srgbClr val="FFFFFF"/>
+                </a:solidFill>
+                <a:latin typeface="Arial" pitchFamily="34" charset="0"/>
+                <a:ea typeface="Arial" pitchFamily="34" charset="-122"/>
+                <a:cs typeface="Arial" pitchFamily="34" charset="-120"/>
+              </a:rPr>
+              <a:t>Expand to ETH, SOL</a:t>
             </a:r>
             <a:endParaRPr lang="en-US" sz="1200" dirty="0"/>
           </a:p>
-          <a:p>
-            <a:pPr marL="342900" indent="-342900">
-              <a:buSzPct val="100000"/>
-              <a:buChar char="•"/>
-            </a:pPr>
-            <a:r>
-              <a:rPr lang="en-US" sz="1200" dirty="0">
-                <a:solidFill>
-                  <a:srgbClr val="E4E4E7"/>
-                </a:solidFill>
-                <a:latin typeface="Arial" pitchFamily="34" charset="0"/>
-                <a:ea typeface="Arial" pitchFamily="34" charset="-122"/>
-                <a:cs typeface="Arial" pitchFamily="34" charset="-120"/>
-              </a:rPr>
-              <a:t>TM Sentiment (30+ sources)</a:t>
+        </p:txBody>
+      </p:sp>
+      <p:sp>
+        <p:nvSpPr>
+          <p:cNvPr id="13" name="Text 11"/>
+          <p:cNvSpPr/>
+          <p:nvPr/>
+        </p:nvSpPr>
+        <p:spPr>
+          <a:xfrm>
+            <a:off x="1143000" y="3319272"/>
+            <a:ext cx="3200400" cy="457200"/>
+          </a:xfrm>
+          <a:prstGeom prst="rect">
+            <a:avLst/>
+          </a:prstGeom>
+          <a:noFill/>
+          <a:ln/>
+        </p:spPr>
+        <p:txBody>
+          <a:bodyPr wrap="square" lIns="0" tIns="0" rIns="0" bIns="0" rtlCol="0" anchor="ctr"/>
+          <a:lstStyle/>
+          <a:p>
+            <a:pPr indent="0" marL="0">
+              <a:buNone/>
+            </a:pPr>
+            <a:r>
+              <a:rPr lang="en-US" sz="1000" dirty="0">
+                <a:solidFill>
+                  <a:srgbClr val="71717A"/>
+                </a:solidFill>
+                <a:latin typeface="Arial" pitchFamily="34" charset="0"/>
+                <a:ea typeface="Arial" pitchFamily="34" charset="-122"/>
+                <a:cs typeface="Arial" pitchFamily="34" charset="-120"/>
+              </a:rPr>
+              <a:t>Same 6-signal architecture per coin. BGeometrics supports ETH on-chain. Polymarket has ETH/SOL markets.</a:t>
+            </a:r>
+            <a:endParaRPr lang="en-US" sz="1000" dirty="0"/>
+          </a:p>
+        </p:txBody>
+      </p:sp>
+      <p:sp>
+        <p:nvSpPr>
+          <p:cNvPr id="14" name="Shape 12"/>
+          <p:cNvSpPr/>
+          <p:nvPr/>
+        </p:nvSpPr>
+        <p:spPr>
+          <a:xfrm>
+            <a:off x="868680" y="3886200"/>
+            <a:ext cx="137160" cy="137160"/>
+          </a:xfrm>
+          <a:prstGeom prst="ellipse">
+            <a:avLst/>
+          </a:prstGeom>
+          <a:solidFill>
+            <a:srgbClr val="FFD93D"/>
+          </a:solidFill>
+          <a:ln/>
+        </p:spPr>
+      </p:sp>
+      <p:sp>
+        <p:nvSpPr>
+          <p:cNvPr id="15" name="Text 13"/>
+          <p:cNvSpPr/>
+          <p:nvPr/>
+        </p:nvSpPr>
+        <p:spPr>
+          <a:xfrm>
+            <a:off x="1143000" y="3840480"/>
+            <a:ext cx="3200400" cy="228600"/>
+          </a:xfrm>
+          <a:prstGeom prst="rect">
+            <a:avLst/>
+          </a:prstGeom>
+          <a:noFill/>
+          <a:ln/>
+        </p:spPr>
+        <p:txBody>
+          <a:bodyPr wrap="square" lIns="0" tIns="0" rIns="0" bIns="0" rtlCol="0" anchor="ctr"/>
+          <a:lstStyle/>
+          <a:p>
+            <a:pPr indent="0" marL="0">
+              <a:buNone/>
+            </a:pPr>
+            <a:r>
+              <a:rPr lang="en-US" sz="1200" b="1" dirty="0">
+                <a:solidFill>
+                  <a:srgbClr val="FFFFFF"/>
+                </a:solidFill>
+                <a:latin typeface="Arial" pitchFamily="34" charset="0"/>
+                <a:ea typeface="Arial" pitchFamily="34" charset="-122"/>
+                <a:cs typeface="Arial" pitchFamily="34" charset="-120"/>
+              </a:rPr>
+              <a:t>Hourly predictions</a:t>
             </a:r>
             <a:endParaRPr lang="en-US" sz="1200" dirty="0"/>
           </a:p>
@@ -6416,18 +7386,57 @@
       </p:sp>
       <p:sp>
         <p:nvSpPr>
-          <p:cNvPr id="6" name="Shape 4"/>
-          <p:cNvSpPr/>
-          <p:nvPr/>
-        </p:nvSpPr>
-        <p:spPr>
-          <a:xfrm>
-            <a:off x="4754880" y="1097280"/>
-            <a:ext cx="3931920" cy="3474720"/>
+          <p:cNvPr id="16" name="Text 14"/>
+          <p:cNvSpPr/>
+          <p:nvPr/>
+        </p:nvSpPr>
+        <p:spPr>
+          <a:xfrm>
+            <a:off x="1143000" y="4096512"/>
+            <a:ext cx="3200400" cy="457200"/>
+          </a:xfrm>
+          <a:prstGeom prst="rect">
+            <a:avLst/>
+          </a:prstGeom>
+          <a:noFill/>
+          <a:ln/>
+        </p:spPr>
+        <p:txBody>
+          <a:bodyPr wrap="square" lIns="0" tIns="0" rIns="0" bIns="0" rtlCol="0" anchor="ctr"/>
+          <a:lstStyle/>
+          <a:p>
+            <a:pPr indent="0" marL="0">
+              <a:buNone/>
+            </a:pPr>
+            <a:r>
+              <a:rPr lang="en-US" sz="1000" dirty="0">
+                <a:solidFill>
+                  <a:srgbClr val="71717A"/>
+                </a:solidFill>
+                <a:latin typeface="Arial" pitchFamily="34" charset="0"/>
+                <a:ea typeface="Arial" pitchFamily="34" charset="-122"/>
+                <a:cs typeface="Arial" pitchFamily="34" charset="-120"/>
+              </a:rPr>
+              <a:t>Currently daily. With Glassnode hourly data, can predict intraday moves for higher-frequency trading.</a:t>
+            </a:r>
+            <a:endParaRPr lang="en-US" sz="1000" dirty="0"/>
+          </a:p>
+        </p:txBody>
+      </p:sp>
+      <p:sp>
+        <p:nvSpPr>
+          <p:cNvPr id="17" name="Shape 15"/>
+          <p:cNvSpPr/>
+          <p:nvPr/>
+        </p:nvSpPr>
+        <p:spPr>
+          <a:xfrm>
+            <a:off x="4846320" y="1005840"/>
+            <a:ext cx="3931920" cy="3840480"/>
           </a:xfrm>
           <a:prstGeom prst="roundRect">
             <a:avLst>
-              <a:gd name="adj" fmla="val 2632"/>
+              <a:gd name="adj" fmla="val 2381"/>
             </a:avLst>
           </a:prstGeom>
           <a:solidFill>
@@ -6438,152 +7447,632 @@
       </p:sp>
       <p:sp>
         <p:nvSpPr>
-          <p:cNvPr id="7" name="Text 5"/>
-          <p:cNvSpPr/>
-          <p:nvPr/>
-        </p:nvSpPr>
-        <p:spPr>
-          <a:xfrm>
-            <a:off x="4937760" y="1188720"/>
-            <a:ext cx="3200400" cy="365760"/>
-          </a:xfrm>
-          <a:prstGeom prst="rect">
-            <a:avLst/>
-          </a:prstGeom>
-          <a:noFill/>
-          <a:ln/>
-        </p:spPr>
-        <p:txBody>
-          <a:bodyPr wrap="square" lIns="0" tIns="0" rIns="0" bIns="0" rtlCol="0" anchor="ctr"/>
-          <a:lstStyle/>
-          <a:p>
-            <a:pPr indent="0" marL="0">
-              <a:buNone/>
-            </a:pPr>
-            <a:r>
-              <a:rPr lang="en-US" sz="1800" b="1" dirty="0">
-                <a:solidFill>
-                  <a:srgbClr val="6C5CE7"/>
-                </a:solidFill>
-                <a:latin typeface="Arial" pitchFamily="34" charset="0"/>
-                <a:ea typeface="Arial" pitchFamily="34" charset="-122"/>
-                <a:cs typeface="Arial" pitchFamily="34" charset="-120"/>
-              </a:rPr>
-              <a:t>Prediction Page</a:t>
-            </a:r>
-            <a:endParaRPr lang="en-US" sz="1800" dirty="0"/>
-          </a:p>
-        </p:txBody>
-      </p:sp>
-      <p:sp>
-        <p:nvSpPr>
-          <p:cNvPr id="8" name="Text 6"/>
-          <p:cNvSpPr/>
-          <p:nvPr/>
-        </p:nvSpPr>
-        <p:spPr>
-          <a:xfrm>
-            <a:off x="4937760" y="1645920"/>
-            <a:ext cx="3566160" cy="2286000"/>
-          </a:xfrm>
-          <a:prstGeom prst="rect">
-            <a:avLst/>
-          </a:prstGeom>
-          <a:noFill/>
-          <a:ln/>
-        </p:spPr>
-        <p:txBody>
-          <a:bodyPr wrap="square" rtlCol="0" anchor="ctr"/>
-          <a:lstStyle/>
-          <a:p>
-            <a:pPr marL="342900" indent="-342900">
-              <a:buSzPct val="100000"/>
-              <a:buChar char="•"/>
-            </a:pPr>
-            <a:r>
-              <a:rPr lang="en-US" sz="1200" dirty="0">
-                <a:solidFill>
-                  <a:srgbClr val="E4E4E7"/>
-                </a:solidFill>
-                <a:latin typeface="Arial" pitchFamily="34" charset="0"/>
-                <a:ea typeface="Arial" pitchFamily="34" charset="-122"/>
-                <a:cs typeface="Arial" pitchFamily="34" charset="-120"/>
-              </a:rPr>
-              <a:t>BUY / SELL with 6-signal reasoning</a:t>
-            </a:r>
-            <a:endParaRPr lang="en-US" sz="1200" dirty="0"/>
-          </a:p>
-          <a:p>
-            <a:pPr marL="342900" indent="-342900">
-              <a:buSzPct val="100000"/>
-              <a:buChar char="•"/>
-            </a:pPr>
-            <a:r>
-              <a:rPr lang="en-US" sz="1200" dirty="0">
-                <a:solidFill>
-                  <a:srgbClr val="E4E4E7"/>
-                </a:solidFill>
-                <a:latin typeface="Arial" pitchFamily="34" charset="0"/>
-                <a:ea typeface="Arial" pitchFamily="34" charset="-122"/>
-                <a:cs typeface="Arial" pitchFamily="34" charset="-120"/>
-              </a:rPr>
-              <a:t>Polymarket table (18 thresholds)</a:t>
-            </a:r>
-            <a:endParaRPr lang="en-US" sz="1200" dirty="0"/>
-          </a:p>
-          <a:p>
-            <a:pPr marL="342900" indent="-342900">
-              <a:buSzPct val="100000"/>
-              <a:buChar char="•"/>
-            </a:pPr>
-            <a:r>
-              <a:rPr lang="en-US" sz="1200" dirty="0">
-                <a:solidFill>
-                  <a:srgbClr val="E4E4E7"/>
-                </a:solidFill>
-                <a:latin typeface="Arial" pitchFamily="34" charset="0"/>
-                <a:ea typeface="Arial" pitchFamily="34" charset="-122"/>
-                <a:cs typeface="Arial" pitchFamily="34" charset="-120"/>
-              </a:rPr>
-              <a:t>Binance order flow visualization</a:t>
-            </a:r>
-            <a:endParaRPr lang="en-US" sz="1200" dirty="0"/>
-          </a:p>
-          <a:p>
-            <a:pPr marL="342900" indent="-342900">
-              <a:buSzPct val="100000"/>
-              <a:buChar char="•"/>
-            </a:pPr>
-            <a:r>
-              <a:rPr lang="en-US" sz="1200" dirty="0">
-                <a:solidFill>
-                  <a:srgbClr val="E4E4E7"/>
-                </a:solidFill>
-                <a:latin typeface="Arial" pitchFamily="34" charset="0"/>
-                <a:ea typeface="Arial" pitchFamily="34" charset="-122"/>
-                <a:cs typeface="Arial" pitchFamily="34" charset="-120"/>
-              </a:rPr>
-              <a:t>RSI, MACD, Bollinger live</a:t>
-            </a:r>
-            <a:endParaRPr lang="en-US" sz="1200" dirty="0"/>
-          </a:p>
-          <a:p>
-            <a:pPr marL="342900" indent="-342900">
-              <a:buSzPct val="100000"/>
-              <a:buChar char="•"/>
-            </a:pPr>
-            <a:r>
-              <a:rPr lang="en-US" sz="1200" dirty="0">
-                <a:solidFill>
-                  <a:srgbClr val="E4E4E7"/>
-                </a:solidFill>
-                <a:latin typeface="Arial" pitchFamily="34" charset="0"/>
-                <a:ea typeface="Arial" pitchFamily="34" charset="-122"/>
-                <a:cs typeface="Arial" pitchFamily="34" charset="-120"/>
-              </a:rPr>
-              <a:t>Portfolio + order management</a:t>
-            </a:r>
-            <a:endParaRPr lang="en-US" sz="1200" dirty="0"/>
+          <p:cNvPr id="18" name="Text 16"/>
+          <p:cNvSpPr/>
+          <p:nvPr/>
+        </p:nvSpPr>
+        <p:spPr>
+          <a:xfrm>
+            <a:off x="5029200" y="1097280"/>
+            <a:ext cx="3200400" cy="320040"/>
+          </a:xfrm>
+          <a:prstGeom prst="rect">
+            <a:avLst/>
+          </a:prstGeom>
+          <a:noFill/>
+          <a:ln/>
+        </p:spPr>
+        <p:txBody>
+          <a:bodyPr wrap="square" lIns="0" tIns="0" rIns="0" bIns="0" rtlCol="0" anchor="ctr"/>
+          <a:lstStyle/>
+          <a:p>
+            <a:pPr indent="0" marL="0">
+              <a:buNone/>
+            </a:pPr>
+            <a:r>
+              <a:rPr lang="en-US" sz="1600" b="1" dirty="0">
+                <a:solidFill>
+                  <a:srgbClr val="FFD93D"/>
+                </a:solidFill>
+                <a:latin typeface="Arial" pitchFamily="34" charset="0"/>
+                <a:ea typeface="Arial" pitchFamily="34" charset="-122"/>
+                <a:cs typeface="Arial" pitchFamily="34" charset="-120"/>
+              </a:rPr>
+              <a:t>The Data Gap</a:t>
+            </a:r>
+            <a:endParaRPr lang="en-US" sz="1600" dirty="0"/>
+          </a:p>
+        </p:txBody>
+      </p:sp>
+      <p:sp>
+        <p:nvSpPr>
+          <p:cNvPr id="19" name="Text 17"/>
+          <p:cNvSpPr/>
+          <p:nvPr/>
+        </p:nvSpPr>
+        <p:spPr>
+          <a:xfrm>
+            <a:off x="5029200" y="1554480"/>
+            <a:ext cx="1371600" cy="228600"/>
+          </a:xfrm>
+          <a:prstGeom prst="rect">
+            <a:avLst/>
+          </a:prstGeom>
+          <a:noFill/>
+          <a:ln/>
+        </p:spPr>
+        <p:txBody>
+          <a:bodyPr wrap="square" lIns="0" tIns="0" rIns="0" bIns="0" rtlCol="0" anchor="ctr"/>
+          <a:lstStyle/>
+          <a:p>
+            <a:pPr indent="0" marL="0">
+              <a:buNone/>
+            </a:pPr>
+            <a:r>
+              <a:rPr lang="en-US" sz="1100" b="1" dirty="0">
+                <a:solidFill>
+                  <a:srgbClr val="71717A"/>
+                </a:solidFill>
+                <a:latin typeface="Arial" pitchFamily="34" charset="0"/>
+                <a:ea typeface="Arial" pitchFamily="34" charset="-122"/>
+                <a:cs typeface="Arial" pitchFamily="34" charset="-120"/>
+              </a:rPr>
+              <a:t>Current</a:t>
+            </a:r>
+            <a:endParaRPr lang="en-US" sz="1100" dirty="0"/>
+          </a:p>
+        </p:txBody>
+      </p:sp>
+      <p:sp>
+        <p:nvSpPr>
+          <p:cNvPr id="20" name="Text 18"/>
+          <p:cNvSpPr/>
+          <p:nvPr/>
+        </p:nvSpPr>
+        <p:spPr>
+          <a:xfrm>
+            <a:off x="6858000" y="1554480"/>
+            <a:ext cx="1645920" cy="228600"/>
+          </a:xfrm>
+          <a:prstGeom prst="rect">
+            <a:avLst/>
+          </a:prstGeom>
+          <a:noFill/>
+          <a:ln/>
+        </p:spPr>
+        <p:txBody>
+          <a:bodyPr wrap="square" lIns="0" tIns="0" rIns="0" bIns="0" rtlCol="0" anchor="ctr"/>
+          <a:lstStyle/>
+          <a:p>
+            <a:pPr algn="r" indent="0" marL="0">
+              <a:buNone/>
+            </a:pPr>
+            <a:r>
+              <a:rPr lang="en-US" sz="1400" b="1" dirty="0">
+                <a:solidFill>
+                  <a:srgbClr val="00D4AA"/>
+                </a:solidFill>
+                <a:latin typeface="Arial" pitchFamily="34" charset="0"/>
+                <a:ea typeface="Arial" pitchFamily="34" charset="-122"/>
+                <a:cs typeface="Arial" pitchFamily="34" charset="-120"/>
+              </a:rPr>
+              <a:t>67.4%</a:t>
+            </a:r>
+            <a:endParaRPr lang="en-US" sz="1400" dirty="0"/>
+          </a:p>
+        </p:txBody>
+      </p:sp>
+      <p:sp>
+        <p:nvSpPr>
+          <p:cNvPr id="21" name="Text 19"/>
+          <p:cNvSpPr/>
+          <p:nvPr/>
+        </p:nvSpPr>
+        <p:spPr>
+          <a:xfrm>
+            <a:off x="5029200" y="1783080"/>
+            <a:ext cx="3657600" cy="182880"/>
+          </a:xfrm>
+          <a:prstGeom prst="rect">
+            <a:avLst/>
+          </a:prstGeom>
+          <a:noFill/>
+          <a:ln/>
+        </p:spPr>
+        <p:txBody>
+          <a:bodyPr wrap="square" lIns="0" tIns="0" rIns="0" bIns="0" rtlCol="0" anchor="ctr"/>
+          <a:lstStyle/>
+          <a:p>
+            <a:pPr indent="0" marL="0">
+              <a:buNone/>
+            </a:pPr>
+            <a:r>
+              <a:rPr lang="en-US" sz="1000" dirty="0">
+                <a:solidFill>
+                  <a:srgbClr val="71717A"/>
+                </a:solidFill>
+                <a:latin typeface="Arial" pitchFamily="34" charset="0"/>
+                <a:ea typeface="Arial" pitchFamily="34" charset="-122"/>
+                <a:cs typeface="Arial" pitchFamily="34" charset="-120"/>
+              </a:rPr>
+              <a:t>42 features from BGeometrics</a:t>
+            </a:r>
+            <a:endParaRPr lang="en-US" sz="1000" dirty="0"/>
+          </a:p>
+        </p:txBody>
+      </p:sp>
+      <p:sp>
+        <p:nvSpPr>
+          <p:cNvPr id="22" name="Shape 20"/>
+          <p:cNvSpPr/>
+          <p:nvPr/>
+        </p:nvSpPr>
+        <p:spPr>
+          <a:xfrm>
+            <a:off x="5029200" y="2103120"/>
+            <a:ext cx="3474720" cy="0"/>
+          </a:xfrm>
+          <a:prstGeom prst="line">
+            <a:avLst/>
+          </a:prstGeom>
+          <a:noFill/>
+          <a:ln w="12700">
+            <a:solidFill>
+              <a:srgbClr val="1E1E2E"/>
+            </a:solidFill>
+            <a:prstDash val="solid"/>
+          </a:ln>
+        </p:spPr>
+      </p:sp>
+      <p:sp>
+        <p:nvSpPr>
+          <p:cNvPr id="23" name="Text 21"/>
+          <p:cNvSpPr/>
+          <p:nvPr/>
+        </p:nvSpPr>
+        <p:spPr>
+          <a:xfrm>
+            <a:off x="5029200" y="2286000"/>
+            <a:ext cx="1371600" cy="228600"/>
+          </a:xfrm>
+          <a:prstGeom prst="rect">
+            <a:avLst/>
+          </a:prstGeom>
+          <a:noFill/>
+          <a:ln/>
+        </p:spPr>
+        <p:txBody>
+          <a:bodyPr wrap="square" lIns="0" tIns="0" rIns="0" bIns="0" rtlCol="0" anchor="ctr"/>
+          <a:lstStyle/>
+          <a:p>
+            <a:pPr indent="0" marL="0">
+              <a:buNone/>
+            </a:pPr>
+            <a:r>
+              <a:rPr lang="en-US" sz="1100" b="1" dirty="0">
+                <a:solidFill>
+                  <a:srgbClr val="71717A"/>
+                </a:solidFill>
+                <a:latin typeface="Arial" pitchFamily="34" charset="0"/>
+                <a:ea typeface="Arial" pitchFamily="34" charset="-122"/>
+                <a:cs typeface="Arial" pitchFamily="34" charset="-120"/>
+              </a:rPr>
+              <a:t>Target</a:t>
+            </a:r>
+            <a:endParaRPr lang="en-US" sz="1100" dirty="0"/>
+          </a:p>
+        </p:txBody>
+      </p:sp>
+      <p:sp>
+        <p:nvSpPr>
+          <p:cNvPr id="24" name="Text 22"/>
+          <p:cNvSpPr/>
+          <p:nvPr/>
+        </p:nvSpPr>
+        <p:spPr>
+          <a:xfrm>
+            <a:off x="6858000" y="2286000"/>
+            <a:ext cx="1645920" cy="228600"/>
+          </a:xfrm>
+          <a:prstGeom prst="rect">
+            <a:avLst/>
+          </a:prstGeom>
+          <a:noFill/>
+          <a:ln/>
+        </p:spPr>
+        <p:txBody>
+          <a:bodyPr wrap="square" lIns="0" tIns="0" rIns="0" bIns="0" rtlCol="0" anchor="ctr"/>
+          <a:lstStyle/>
+          <a:p>
+            <a:pPr algn="r" indent="0" marL="0">
+              <a:buNone/>
+            </a:pPr>
+            <a:r>
+              <a:rPr lang="en-US" sz="1400" b="1" dirty="0">
+                <a:solidFill>
+                  <a:srgbClr val="FFD93D"/>
+                </a:solidFill>
+                <a:latin typeface="Arial" pitchFamily="34" charset="0"/>
+                <a:ea typeface="Arial" pitchFamily="34" charset="-122"/>
+                <a:cs typeface="Arial" pitchFamily="34" charset="-120"/>
+              </a:rPr>
+              <a:t>82.4%</a:t>
+            </a:r>
+            <a:endParaRPr lang="en-US" sz="1400" dirty="0"/>
+          </a:p>
+        </p:txBody>
+      </p:sp>
+      <p:sp>
+        <p:nvSpPr>
+          <p:cNvPr id="25" name="Text 23"/>
+          <p:cNvSpPr/>
+          <p:nvPr/>
+        </p:nvSpPr>
+        <p:spPr>
+          <a:xfrm>
+            <a:off x="5029200" y="2514600"/>
+            <a:ext cx="3657600" cy="182880"/>
+          </a:xfrm>
+          <a:prstGeom prst="rect">
+            <a:avLst/>
+          </a:prstGeom>
+          <a:noFill/>
+          <a:ln/>
+        </p:spPr>
+        <p:txBody>
+          <a:bodyPr wrap="square" lIns="0" tIns="0" rIns="0" bIns="0" rtlCol="0" anchor="ctr"/>
+          <a:lstStyle/>
+          <a:p>
+            <a:pPr indent="0" marL="0">
+              <a:buNone/>
+            </a:pPr>
+            <a:r>
+              <a:rPr lang="en-US" sz="1000" dirty="0">
+                <a:solidFill>
+                  <a:srgbClr val="71717A"/>
+                </a:solidFill>
+                <a:latin typeface="Arial" pitchFamily="34" charset="0"/>
+                <a:ea typeface="Arial" pitchFamily="34" charset="-122"/>
+                <a:cs typeface="Arial" pitchFamily="34" charset="-120"/>
+              </a:rPr>
+              <a:t>87 features from Glassnode Pro ($799/mo)</a:t>
+            </a:r>
+            <a:endParaRPr lang="en-US" sz="1000" dirty="0"/>
+          </a:p>
+        </p:txBody>
+      </p:sp>
+      <p:sp>
+        <p:nvSpPr>
+          <p:cNvPr id="26" name="Shape 24"/>
+          <p:cNvSpPr/>
+          <p:nvPr/>
+        </p:nvSpPr>
+        <p:spPr>
+          <a:xfrm>
+            <a:off x="5029200" y="2834640"/>
+            <a:ext cx="3474720" cy="0"/>
+          </a:xfrm>
+          <a:prstGeom prst="line">
+            <a:avLst/>
+          </a:prstGeom>
+          <a:noFill/>
+          <a:ln w="12700">
+            <a:solidFill>
+              <a:srgbClr val="1E1E2E"/>
+            </a:solidFill>
+            <a:prstDash val="solid"/>
+          </a:ln>
+        </p:spPr>
+      </p:sp>
+      <p:sp>
+        <p:nvSpPr>
+          <p:cNvPr id="27" name="Text 25"/>
+          <p:cNvSpPr/>
+          <p:nvPr/>
+        </p:nvSpPr>
+        <p:spPr>
+          <a:xfrm>
+            <a:off x="5029200" y="3017520"/>
+            <a:ext cx="3657600" cy="228600"/>
+          </a:xfrm>
+          <a:prstGeom prst="rect">
+            <a:avLst/>
+          </a:prstGeom>
+          <a:noFill/>
+          <a:ln/>
+        </p:spPr>
+        <p:txBody>
+          <a:bodyPr wrap="square" lIns="0" tIns="0" rIns="0" bIns="0" rtlCol="0" anchor="ctr"/>
+          <a:lstStyle/>
+          <a:p>
+            <a:pPr indent="0" marL="0">
+              <a:buNone/>
+            </a:pPr>
+            <a:r>
+              <a:rPr lang="en-US" sz="1100" b="1" dirty="0">
+                <a:solidFill>
+                  <a:srgbClr val="FFFFFF"/>
+                </a:solidFill>
+                <a:latin typeface="Arial" pitchFamily="34" charset="0"/>
+                <a:ea typeface="Arial" pitchFamily="34" charset="-122"/>
+                <a:cs typeface="Arial" pitchFamily="34" charset="-120"/>
+              </a:rPr>
+              <a:t>What’s missing:</a:t>
+            </a:r>
+            <a:endParaRPr lang="en-US" sz="1100" dirty="0"/>
+          </a:p>
+        </p:txBody>
+      </p:sp>
+      <p:sp>
+        <p:nvSpPr>
+          <p:cNvPr id="28" name="Text 26"/>
+          <p:cNvSpPr/>
+          <p:nvPr/>
+        </p:nvSpPr>
+        <p:spPr>
+          <a:xfrm>
+            <a:off x="5212080" y="3291840"/>
+            <a:ext cx="3474720" cy="201168"/>
+          </a:xfrm>
+          <a:prstGeom prst="rect">
+            <a:avLst/>
+          </a:prstGeom>
+          <a:noFill/>
+          <a:ln/>
+        </p:spPr>
+        <p:txBody>
+          <a:bodyPr wrap="square" lIns="0" tIns="0" rIns="0" bIns="0" rtlCol="0" anchor="ctr"/>
+          <a:lstStyle/>
+          <a:p>
+            <a:pPr indent="0" marL="0">
+              <a:buNone/>
+            </a:pPr>
+            <a:r>
+              <a:rPr lang="en-US" sz="900" dirty="0">
+                <a:solidFill>
+                  <a:srgbClr val="71717A"/>
+                </a:solidFill>
+                <a:latin typeface="Arial" pitchFamily="34" charset="0"/>
+                <a:ea typeface="Arial" pitchFamily="34" charset="-122"/>
+                <a:cs typeface="Arial" pitchFamily="34" charset="-120"/>
+              </a:rPr>
+              <a:t>• HODL waves (all 15 age bands vs our 13)</a:t>
+            </a:r>
+            <a:endParaRPr lang="en-US" sz="900" dirty="0"/>
+          </a:p>
+        </p:txBody>
+      </p:sp>
+      <p:sp>
+        <p:nvSpPr>
+          <p:cNvPr id="29" name="Text 27"/>
+          <p:cNvSpPr/>
+          <p:nvPr/>
+        </p:nvSpPr>
+        <p:spPr>
+          <a:xfrm>
+            <a:off x="5212080" y="3520440"/>
+            <a:ext cx="3474720" cy="201168"/>
+          </a:xfrm>
+          <a:prstGeom prst="rect">
+            <a:avLst/>
+          </a:prstGeom>
+          <a:noFill/>
+          <a:ln/>
+        </p:spPr>
+        <p:txBody>
+          <a:bodyPr wrap="square" lIns="0" tIns="0" rIns="0" bIns="0" rtlCol="0" anchor="ctr"/>
+          <a:lstStyle/>
+          <a:p>
+            <a:pPr indent="0" marL="0">
+              <a:buNone/>
+            </a:pPr>
+            <a:r>
+              <a:rPr lang="en-US" sz="900" dirty="0">
+                <a:solidFill>
+                  <a:srgbClr val="71717A"/>
+                </a:solidFill>
+                <a:latin typeface="Arial" pitchFamily="34" charset="0"/>
+                <a:ea typeface="Arial" pitchFamily="34" charset="-122"/>
+                <a:cs typeface="Arial" pitchFamily="34" charset="-120"/>
+              </a:rPr>
+              <a:t>• Realized cap HODL waves</a:t>
+            </a:r>
+            <a:endParaRPr lang="en-US" sz="900" dirty="0"/>
+          </a:p>
+        </p:txBody>
+      </p:sp>
+      <p:sp>
+        <p:nvSpPr>
+          <p:cNvPr id="30" name="Text 28"/>
+          <p:cNvSpPr/>
+          <p:nvPr/>
+        </p:nvSpPr>
+        <p:spPr>
+          <a:xfrm>
+            <a:off x="5212080" y="3749040"/>
+            <a:ext cx="3474720" cy="201168"/>
+          </a:xfrm>
+          <a:prstGeom prst="rect">
+            <a:avLst/>
+          </a:prstGeom>
+          <a:noFill/>
+          <a:ln/>
+        </p:spPr>
+        <p:txBody>
+          <a:bodyPr wrap="square" lIns="0" tIns="0" rIns="0" bIns="0" rtlCol="0" anchor="ctr"/>
+          <a:lstStyle/>
+          <a:p>
+            <a:pPr indent="0" marL="0">
+              <a:buNone/>
+            </a:pPr>
+            <a:r>
+              <a:rPr lang="en-US" sz="900" dirty="0">
+                <a:solidFill>
+                  <a:srgbClr val="71717A"/>
+                </a:solidFill>
+                <a:latin typeface="Arial" pitchFamily="34" charset="0"/>
+                <a:ea typeface="Arial" pitchFamily="34" charset="-122"/>
+                <a:cs typeface="Arial" pitchFamily="34" charset="-120"/>
+              </a:rPr>
+              <a:t>• Entity-adjusted dormancy flow</a:t>
+            </a:r>
+            <a:endParaRPr lang="en-US" sz="900" dirty="0"/>
+          </a:p>
+        </p:txBody>
+      </p:sp>
+      <p:sp>
+        <p:nvSpPr>
+          <p:cNvPr id="31" name="Text 29"/>
+          <p:cNvSpPr/>
+          <p:nvPr/>
+        </p:nvSpPr>
+        <p:spPr>
+          <a:xfrm>
+            <a:off x="5212080" y="3977640"/>
+            <a:ext cx="3474720" cy="201168"/>
+          </a:xfrm>
+          <a:prstGeom prst="rect">
+            <a:avLst/>
+          </a:prstGeom>
+          <a:noFill/>
+          <a:ln/>
+        </p:spPr>
+        <p:txBody>
+          <a:bodyPr wrap="square" lIns="0" tIns="0" rIns="0" bIns="0" rtlCol="0" anchor="ctr"/>
+          <a:lstStyle/>
+          <a:p>
+            <a:pPr indent="0" marL="0">
+              <a:buNone/>
+            </a:pPr>
+            <a:r>
+              <a:rPr lang="en-US" sz="900" dirty="0">
+                <a:solidFill>
+                  <a:srgbClr val="71717A"/>
+                </a:solidFill>
+                <a:latin typeface="Arial" pitchFamily="34" charset="0"/>
+                <a:ea typeface="Arial" pitchFamily="34" charset="-122"/>
+                <a:cs typeface="Arial" pitchFamily="34" charset="-120"/>
+              </a:rPr>
+              <a:t>• Stock-to-flow ratio</a:t>
+            </a:r>
+            <a:endParaRPr lang="en-US" sz="900" dirty="0"/>
+          </a:p>
+        </p:txBody>
+      </p:sp>
+      <p:sp>
+        <p:nvSpPr>
+          <p:cNvPr id="32" name="Text 30"/>
+          <p:cNvSpPr/>
+          <p:nvPr/>
+        </p:nvSpPr>
+        <p:spPr>
+          <a:xfrm>
+            <a:off x="5212080" y="4206240"/>
+            <a:ext cx="3474720" cy="201168"/>
+          </a:xfrm>
+          <a:prstGeom prst="rect">
+            <a:avLst/>
+          </a:prstGeom>
+          <a:noFill/>
+          <a:ln/>
+        </p:spPr>
+        <p:txBody>
+          <a:bodyPr wrap="square" lIns="0" tIns="0" rIns="0" bIns="0" rtlCol="0" anchor="ctr"/>
+          <a:lstStyle/>
+          <a:p>
+            <a:pPr indent="0" marL="0">
+              <a:buNone/>
+            </a:pPr>
+            <a:r>
+              <a:rPr lang="en-US" sz="900" dirty="0">
+                <a:solidFill>
+                  <a:srgbClr val="71717A"/>
+                </a:solidFill>
+                <a:latin typeface="Arial" pitchFamily="34" charset="0"/>
+                <a:ea typeface="Arial" pitchFamily="34" charset="-122"/>
+                <a:cs typeface="Arial" pitchFamily="34" charset="-120"/>
+              </a:rPr>
+              <a:t>• Difficulty ribbon compression</a:t>
+            </a:r>
+            <a:endParaRPr lang="en-US" sz="900" dirty="0"/>
+          </a:p>
+        </p:txBody>
+      </p:sp>
+      <p:sp>
+        <p:nvSpPr>
+          <p:cNvPr id="33" name="Text 31"/>
+          <p:cNvSpPr/>
+          <p:nvPr/>
+        </p:nvSpPr>
+        <p:spPr>
+          <a:xfrm>
+            <a:off x="5212080" y="4434840"/>
+            <a:ext cx="3474720" cy="201168"/>
+          </a:xfrm>
+          <a:prstGeom prst="rect">
+            <a:avLst/>
+          </a:prstGeom>
+          <a:noFill/>
+          <a:ln/>
+        </p:spPr>
+        <p:txBody>
+          <a:bodyPr wrap="square" lIns="0" tIns="0" rIns="0" bIns="0" rtlCol="0" anchor="ctr"/>
+          <a:lstStyle/>
+          <a:p>
+            <a:pPr indent="0" marL="0">
+              <a:buNone/>
+            </a:pPr>
+            <a:r>
+              <a:rPr lang="en-US" sz="900" dirty="0">
+                <a:solidFill>
+                  <a:srgbClr val="71717A"/>
+                </a:solidFill>
+                <a:latin typeface="Arial" pitchFamily="34" charset="0"/>
+                <a:ea typeface="Arial" pitchFamily="34" charset="-122"/>
+                <a:cs typeface="Arial" pitchFamily="34" charset="-120"/>
+              </a:rPr>
+              <a:t>• 45 additional on-chain indicators</a:t>
+            </a:r>
+            <a:endParaRPr lang="en-US" sz="900" dirty="0"/>
+          </a:p>
+        </p:txBody>
+      </p:sp>
+      <p:sp>
+        <p:nvSpPr>
+          <p:cNvPr id="34" name="Text 32"/>
+          <p:cNvSpPr/>
+          <p:nvPr/>
+        </p:nvSpPr>
+        <p:spPr>
+          <a:xfrm>
+            <a:off x="5029200" y="4572000"/>
+            <a:ext cx="3474720" cy="182880"/>
+          </a:xfrm>
+          <a:prstGeom prst="rect">
+            <a:avLst/>
+          </a:prstGeom>
+          <a:noFill/>
+          <a:ln/>
+        </p:spPr>
+        <p:txBody>
+          <a:bodyPr wrap="square" lIns="0" tIns="0" rIns="0" bIns="0" rtlCol="0" anchor="ctr"/>
+          <a:lstStyle/>
+          <a:p>
+            <a:pPr indent="0" marL="0">
+              <a:buNone/>
+            </a:pPr>
+            <a:r>
+              <a:rPr lang="en-US" sz="900" i="1" dirty="0">
+                <a:solidFill>
+                  <a:srgbClr val="FFD93D"/>
+                </a:solidFill>
+                <a:latin typeface="Arial" pitchFamily="34" charset="0"/>
+                <a:ea typeface="Arial" pitchFamily="34" charset="-122"/>
+                <a:cs typeface="Arial" pitchFamily="34" charset="-120"/>
+              </a:rPr>
+              <a:t>More data is the single biggest lever to improve accuracy.</a:t>
+            </a:r>
+            <a:endParaRPr lang="en-US" sz="900" dirty="0"/>
           </a:p>
         </p:txBody>
       </p:sp>

--- a/TrueMarkets_Pitch_Deck.pptx
+++ b/TrueMarkets_Pitch_Deck.pptx
@@ -4,6 +4,9 @@
   <p:sldMasterIdLst>
     <p:sldMasterId id="2147483648" r:id="rId1"/>
   </p:sldMasterIdLst>
+  <p:notesMasterIdLst>
+    <p:notesMasterId r:id="rId13"/>
+  </p:notesMasterIdLst>
   <p:sldIdLst>
     <p:sldId id="256" r:id="rId2"/>
     <p:sldId id="257" r:id="rId3"/>
@@ -16,12 +19,8 @@
     <p:sldId id="264" r:id="rId10"/>
     <p:sldId id="265" r:id="rId11"/>
     <p:sldId id="266" r:id="rId12"/>
-    <p:sldId id="267" r:id="rId13"/>
   </p:sldIdLst>
-  <p:notesMasterIdLst>
-    <p:notesMasterId r:id="rId14"/>
-  </p:notesMasterIdLst>
-  <p:sldSz cx="9144000" cy="5143500"/>
+  <p:sldSz cx="9144000" cy="5143500" type="screen16x9"/>
   <p:notesSz cx="5143500" cy="9144000"/>
   <p:defaultTextStyle>
     <a:lvl1pPr marL="0" algn="l" defTabSz="914400" rtl="0" eaLnBrk="1" latinLnBrk="0" hangingPunct="1">
@@ -115,6 +114,11 @@
       </a:defRPr>
     </a:lvl9pPr>
   </p:defaultTextStyle>
+  <p:extLst>
+    <p:ext uri="{EFAFB233-063F-42B5-8137-9DF3F51BA10A}">
+      <p15:sldGuideLst xmlns:p15="http://schemas.microsoft.com/office/powerpoint/2012/main"/>
+    </p:ext>
+  </p:extLst>
 </p:presentation>
 </file>
 
@@ -140,234 +144,10 @@
           <a:chExt cx="0" cy="0"/>
         </a:xfrm>
       </p:grpSpPr>
-      <p:sp>
-        <p:nvSpPr>
-          <p:cNvPr id="2" name="Header Placeholder 1"/>
-          <p:cNvSpPr>
-            <a:spLocks noGrp="1"/>
-          </p:cNvSpPr>
-          <p:nvPr>
-            <p:ph type="hdr" sz="quarter"/>
-          </p:nvPr>
-        </p:nvSpPr>
-        <p:spPr>
-          <a:xfrm>
-            <a:off x="0" y="0"/>
-            <a:ext cx="2971800" cy="458788"/>
-          </a:xfrm>
-          <a:prstGeom prst="rect">
-            <a:avLst/>
-          </a:prstGeom>
-        </p:spPr>
-        <p:txBody>
-          <a:bodyPr vert="horz" lIns="91440" tIns="45720" rIns="91440" bIns="45720" rtlCol="0"/>
-          <a:lstStyle>
-            <a:lvl1pPr algn="l">
-              <a:defRPr sz="1200"/>
-            </a:lvl1pPr>
-          </a:lstStyle>
-          <a:p>
-            <a:endParaRPr lang="en-US"/>
-          </a:p>
-        </p:txBody>
-      </p:sp>
-      <p:sp>
-        <p:nvSpPr>
-          <p:cNvPr id="3" name="Date Placeholder 2"/>
-          <p:cNvSpPr>
-            <a:spLocks noGrp="1"/>
-          </p:cNvSpPr>
-          <p:nvPr>
-            <p:ph type="dt" idx="1"/>
-          </p:nvPr>
-        </p:nvSpPr>
-        <p:spPr>
-          <a:xfrm>
-            <a:off x="3884613" y="0"/>
-            <a:ext cx="2971800" cy="458788"/>
-          </a:xfrm>
-          <a:prstGeom prst="rect">
-            <a:avLst/>
-          </a:prstGeom>
-        </p:spPr>
-        <p:txBody>
-          <a:bodyPr vert="horz" lIns="91440" tIns="45720" rIns="91440" bIns="45720" rtlCol="0"/>
-          <a:lstStyle>
-            <a:lvl1pPr algn="r">
-              <a:defRPr sz="1200"/>
-            </a:lvl1pPr>
-          </a:lstStyle>
-          <a:p>
-            <a:fld id="{5282F153-3F37-0F45-9E97-73ACFA13230C}" type="datetimeFigureOut">
-              <a:rPr lang="en-US"/>
-              <a:t>7/23/19</a:t>
-            </a:fld>
-            <a:endParaRPr lang="en-US"/>
-          </a:p>
-        </p:txBody>
-      </p:sp>
-      <p:sp>
-        <p:nvSpPr>
-          <p:cNvPr id="4" name="Slide Image Placeholder 3"/>
-          <p:cNvSpPr>
-            <a:spLocks noGrp="1" noRot="1" noChangeAspect="1"/>
-          </p:cNvSpPr>
-          <p:nvPr>
-            <p:ph type="sldImg" idx="2"/>
-          </p:nvPr>
-        </p:nvSpPr>
-        <p:spPr>
-          <a:xfrm>
-            <a:off x="685800" y="1143000"/>
-            <a:ext cx="5486400" cy="3086100"/>
-          </a:xfrm>
-          <a:prstGeom prst="rect">
-            <a:avLst/>
-          </a:prstGeom>
-          <a:noFill/>
-          <a:ln w="12700">
-            <a:solidFill>
-              <a:prstClr val="black"/>
-            </a:solidFill>
-          </a:ln>
-        </p:spPr>
-        <p:txBody>
-          <a:bodyPr vert="horz" lIns="91440" tIns="45720" rIns="91440" bIns="45720" rtlCol="0" anchor="ctr"/>
-          <a:lstStyle/>
-          <a:p>
-            <a:endParaRPr lang="en-US"/>
-          </a:p>
-        </p:txBody>
-      </p:sp>
-      <p:sp>
-        <p:nvSpPr>
-          <p:cNvPr id="5" name="Notes Placeholder 4"/>
-          <p:cNvSpPr>
-            <a:spLocks noGrp="1"/>
-          </p:cNvSpPr>
-          <p:nvPr>
-            <p:ph type="body" sz="quarter" idx="3"/>
-          </p:nvPr>
-        </p:nvSpPr>
-        <p:spPr>
-          <a:xfrm>
-            <a:off x="685800" y="4400550"/>
-            <a:ext cx="5486400" cy="3600450"/>
-          </a:xfrm>
-          <a:prstGeom prst="rect">
-            <a:avLst/>
-          </a:prstGeom>
-        </p:spPr>
-        <p:txBody>
-          <a:bodyPr vert="horz" lIns="91440" tIns="45720" rIns="91440" bIns="45720" rtlCol="0"/>
-          <a:lstStyle/>
-          <a:p>
-            <a:pPr lvl="0"/>
-            <a:r>
-              <a:rPr lang="en-US"/>
-              <a:t>Click to edit Master text styles</a:t>
-            </a:r>
-          </a:p>
-          <a:p>
-            <a:pPr lvl="1"/>
-            <a:r>
-              <a:rPr lang="en-US"/>
-              <a:t>Second level</a:t>
-            </a:r>
-          </a:p>
-          <a:p>
-            <a:pPr lvl="2"/>
-            <a:r>
-              <a:rPr lang="en-US"/>
-              <a:t>Third level</a:t>
-            </a:r>
-          </a:p>
-          <a:p>
-            <a:pPr lvl="3"/>
-            <a:r>
-              <a:rPr lang="en-US"/>
-              <a:t>Fourth level</a:t>
-            </a:r>
-          </a:p>
-          <a:p>
-            <a:pPr lvl="4"/>
-            <a:r>
-              <a:rPr lang="en-US"/>
-              <a:t>Fifth level</a:t>
-            </a:r>
-          </a:p>
-        </p:txBody>
-      </p:sp>
-      <p:sp>
-        <p:nvSpPr>
-          <p:cNvPr id="6" name="Footer Placeholder 5"/>
-          <p:cNvSpPr>
-            <a:spLocks noGrp="1"/>
-          </p:cNvSpPr>
-          <p:nvPr>
-            <p:ph type="ftr" sz="quarter" idx="4"/>
-          </p:nvPr>
-        </p:nvSpPr>
-        <p:spPr>
-          <a:xfrm>
-            <a:off x="0" y="8685213"/>
-            <a:ext cx="2971800" cy="458787"/>
-          </a:xfrm>
-          <a:prstGeom prst="rect">
-            <a:avLst/>
-          </a:prstGeom>
-        </p:spPr>
-        <p:txBody>
-          <a:bodyPr vert="horz" lIns="91440" tIns="45720" rIns="91440" bIns="45720" rtlCol="0" anchor="b"/>
-          <a:lstStyle>
-            <a:lvl1pPr algn="l">
-              <a:defRPr sz="1200"/>
-            </a:lvl1pPr>
-          </a:lstStyle>
-          <a:p>
-            <a:endParaRPr lang="en-US"/>
-          </a:p>
-        </p:txBody>
-      </p:sp>
-      <p:sp>
-        <p:nvSpPr>
-          <p:cNvPr id="7" name="Slide Number Placeholder 6"/>
-          <p:cNvSpPr>
-            <a:spLocks noGrp="1"/>
-          </p:cNvSpPr>
-          <p:nvPr>
-            <p:ph type="sldNum" sz="quarter" idx="5"/>
-          </p:nvPr>
-        </p:nvSpPr>
-        <p:spPr>
-          <a:xfrm>
-            <a:off x="3884613" y="8685213"/>
-            <a:ext cx="2971800" cy="458787"/>
-          </a:xfrm>
-          <a:prstGeom prst="rect">
-            <a:avLst/>
-          </a:prstGeom>
-        </p:spPr>
-        <p:txBody>
-          <a:bodyPr vert="horz" lIns="91440" tIns="45720" rIns="91440" bIns="45720" rtlCol="0" anchor="b"/>
-          <a:lstStyle>
-            <a:lvl1pPr algn="r">
-              <a:defRPr sz="1200"/>
-            </a:lvl1pPr>
-          </a:lstStyle>
-          <a:p>
-            <a:fld id="{CE5E9CC1-C706-0F49-92D6-E571CC5EEA8F}" type="slidenum">
-              <a:rPr lang="en-US"/>
-              <a:t>‹#›</a:t>
-            </a:fld>
-            <a:endParaRPr lang="en-US"/>
-          </a:p>
-        </p:txBody>
-      </p:sp>
     </p:spTree>
     <p:extLst>
       <p:ext uri="{BB962C8B-B14F-4D97-AF65-F5344CB8AC3E}">
-        <p14:creationId xmlns:p14="http://schemas.microsoft.com/office/powerpoint/2010/main" val="1024086991"/>
+        <p14:creationId xmlns:p14="http://schemas.microsoft.com/office/powerpoint/2010/main" val="3592679754"/>
       </p:ext>
     </p:extLst>
   </p:cSld>
@@ -511,10 +291,6 @@
           <a:bodyPr/>
           <a:lstStyle/>
           <a:p>
-            <a:r>
-              <a:rPr lang="en-US" dirty="0"/>
-              <a:t/>
-            </a:r>
             <a:endParaRPr lang="en-US" dirty="0"/>
           </a:p>
         </p:txBody>
@@ -599,10 +375,6 @@
           <a:bodyPr/>
           <a:lstStyle/>
           <a:p>
-            <a:r>
-              <a:rPr lang="en-US" dirty="0"/>
-              <a:t/>
-            </a:r>
             <a:endParaRPr lang="en-US" dirty="0"/>
           </a:p>
         </p:txBody>
@@ -687,10 +459,6 @@
           <a:bodyPr/>
           <a:lstStyle/>
           <a:p>
-            <a:r>
-              <a:rPr lang="en-US" dirty="0"/>
-              <a:t/>
-            </a:r>
             <a:endParaRPr lang="en-US" dirty="0"/>
           </a:p>
         </p:txBody>
@@ -713,94 +481,6 @@
             <a:fld id="{F7021451-1387-4CA6-816F-3879F97B5CBC}" type="slidenum">
               <a:rPr lang="en-US"/>
               <a:t>11</a:t>
-            </a:fld>
-            <a:endParaRPr lang="en-US"/>
-          </a:p>
-        </p:txBody>
-      </p:sp>
-    </p:spTree>
-    <p:extLst>
-      <p:ext uri="{BB962C8B-B14F-4D97-AF65-F5344CB8AC3E}">
-        <p14:creationId xmlns:p14="http://schemas.microsoft.com/office/powerpoint/2010/main" val="1024086991"/>
-      </p:ext>
-    </p:extLst>
-  </p:cSld>
-  <p:clrMapOvr>
-    <a:masterClrMapping/>
-  </p:clrMapOvr>
-</p:notes>
-</file>
-
-<file path=ppt/notesSlides/notesSlide12.xml><?xml version="1.0" encoding="utf-8"?>
-<p:notes xmlns:a="http://schemas.openxmlformats.org/drawingml/2006/main" xmlns:r="http://schemas.openxmlformats.org/officeDocument/2006/relationships" xmlns:p="http://schemas.openxmlformats.org/presentationml/2006/main">
-  <p:cSld>
-    <p:spTree>
-      <p:nvGrpSpPr>
-        <p:cNvPr id="1" name=""/>
-        <p:cNvGrpSpPr/>
-        <p:nvPr/>
-      </p:nvGrpSpPr>
-      <p:grpSpPr>
-        <a:xfrm>
-          <a:off x="0" y="0"/>
-          <a:ext cx="0" cy="0"/>
-          <a:chOff x="0" y="0"/>
-          <a:chExt cx="0" cy="0"/>
-        </a:xfrm>
-      </p:grpSpPr>
-      <p:sp>
-        <p:nvSpPr>
-          <p:cNvPr id="2" name="Slide Image Placeholder 1"/>
-          <p:cNvSpPr>
-            <a:spLocks noGrp="1" noRot="1" noChangeAspect="1"/>
-          </p:cNvSpPr>
-          <p:nvPr>
-            <p:ph type="sldImg"/>
-          </p:nvPr>
-        </p:nvSpPr>
-        <p:spPr/>
-      </p:sp>
-      <p:sp>
-        <p:nvSpPr>
-          <p:cNvPr id="3" name="Notes Placeholder 2"/>
-          <p:cNvSpPr>
-            <a:spLocks noGrp="1"/>
-          </p:cNvSpPr>
-          <p:nvPr>
-            <p:ph type="body" idx="1"/>
-          </p:nvPr>
-        </p:nvSpPr>
-        <p:spPr/>
-        <p:txBody>
-          <a:bodyPr/>
-          <a:lstStyle/>
-          <a:p>
-            <a:r>
-              <a:rPr lang="en-US" dirty="0"/>
-              <a:t/>
-            </a:r>
-            <a:endParaRPr lang="en-US" dirty="0"/>
-          </a:p>
-        </p:txBody>
-      </p:sp>
-      <p:sp>
-        <p:nvSpPr>
-          <p:cNvPr id="4" name="Slide Number Placeholder 3"/>
-          <p:cNvSpPr>
-            <a:spLocks noGrp="1"/>
-          </p:cNvSpPr>
-          <p:nvPr>
-            <p:ph type="sldNum" sz="quarter" idx="10"/>
-          </p:nvPr>
-        </p:nvSpPr>
-        <p:spPr/>
-        <p:txBody>
-          <a:bodyPr/>
-          <a:lstStyle/>
-          <a:p>
-            <a:fld id="{F7021451-1387-4CA6-816F-3879F97B5CBC}" type="slidenum">
-              <a:rPr lang="en-US"/>
-              <a:t>12</a:t>
             </a:fld>
             <a:endParaRPr lang="en-US"/>
           </a:p>
@@ -863,10 +543,6 @@
           <a:bodyPr/>
           <a:lstStyle/>
           <a:p>
-            <a:r>
-              <a:rPr lang="en-US" dirty="0"/>
-              <a:t/>
-            </a:r>
             <a:endParaRPr lang="en-US" dirty="0"/>
           </a:p>
         </p:txBody>
@@ -951,10 +627,6 @@
           <a:bodyPr/>
           <a:lstStyle/>
           <a:p>
-            <a:r>
-              <a:rPr lang="en-US" dirty="0"/>
-              <a:t/>
-            </a:r>
             <a:endParaRPr lang="en-US" dirty="0"/>
           </a:p>
         </p:txBody>
@@ -1039,10 +711,6 @@
           <a:bodyPr/>
           <a:lstStyle/>
           <a:p>
-            <a:r>
-              <a:rPr lang="en-US" dirty="0"/>
-              <a:t/>
-            </a:r>
             <a:endParaRPr lang="en-US" dirty="0"/>
           </a:p>
         </p:txBody>
@@ -1127,10 +795,6 @@
           <a:bodyPr/>
           <a:lstStyle/>
           <a:p>
-            <a:r>
-              <a:rPr lang="en-US" dirty="0"/>
-              <a:t/>
-            </a:r>
             <a:endParaRPr lang="en-US" dirty="0"/>
           </a:p>
         </p:txBody>
@@ -1215,10 +879,6 @@
           <a:bodyPr/>
           <a:lstStyle/>
           <a:p>
-            <a:r>
-              <a:rPr lang="en-US" dirty="0"/>
-              <a:t/>
-            </a:r>
             <a:endParaRPr lang="en-US" dirty="0"/>
           </a:p>
         </p:txBody>
@@ -1303,10 +963,6 @@
           <a:bodyPr/>
           <a:lstStyle/>
           <a:p>
-            <a:r>
-              <a:rPr lang="en-US" dirty="0"/>
-              <a:t/>
-            </a:r>
             <a:endParaRPr lang="en-US" dirty="0"/>
           </a:p>
         </p:txBody>
@@ -1391,10 +1047,6 @@
           <a:bodyPr/>
           <a:lstStyle/>
           <a:p>
-            <a:r>
-              <a:rPr lang="en-US" dirty="0"/>
-              <a:t/>
-            </a:r>
             <a:endParaRPr lang="en-US" dirty="0"/>
           </a:p>
         </p:txBody>
@@ -1479,10 +1131,6 @@
           <a:bodyPr/>
           <a:lstStyle/>
           <a:p>
-            <a:r>
-              <a:rPr lang="en-US" dirty="0"/>
-              <a:t/>
-            </a:r>
             <a:endParaRPr lang="en-US" dirty="0"/>
           </a:p>
         </p:txBody>
@@ -1556,6 +1204,11 @@
 <file path=ppt/slideMasters/slideMaster1.xml><?xml version="1.0" encoding="utf-8"?>
 <p:sldMaster xmlns:a="http://schemas.openxmlformats.org/drawingml/2006/main" xmlns:r="http://schemas.openxmlformats.org/officeDocument/2006/relationships" xmlns:p="http://schemas.openxmlformats.org/presentationml/2006/main">
   <p:cSld>
+    <p:bg>
+      <p:bgRef idx="1001">
+        <a:schemeClr val="bg1"/>
+      </p:bgRef>
+    </p:bg>
     <p:spTree>
       <p:nvGrpSpPr>
         <p:cNvPr id="1" name=""/>
@@ -1838,6 +1491,7 @@
         <a:solidFill>
           <a:srgbClr val="0A0A0F"/>
         </a:solidFill>
+        <a:effectLst/>
       </p:bgPr>
     </p:bg>
     <p:spTree>
@@ -1895,7 +1549,7 @@
           <a:bodyPr wrap="square" lIns="0" tIns="0" rIns="0" bIns="0" rtlCol="0" anchor="ctr"/>
           <a:lstStyle/>
           <a:p>
-            <a:pPr indent="0" marL="0">
+            <a:pPr marL="0" indent="0">
               <a:buNone/>
             </a:pPr>
             <a:r>
@@ -1934,7 +1588,7 @@
           <a:bodyPr wrap="square" lIns="0" tIns="0" rIns="0" bIns="0" rtlCol="0" anchor="ctr"/>
           <a:lstStyle/>
           <a:p>
-            <a:pPr indent="0" marL="0">
+            <a:pPr marL="0" indent="0">
               <a:buNone/>
             </a:pPr>
             <a:r>
@@ -1973,7 +1627,7 @@
           <a:bodyPr wrap="square" lIns="0" tIns="0" rIns="0" bIns="0" rtlCol="0" anchor="ctr"/>
           <a:lstStyle/>
           <a:p>
-            <a:pPr indent="0" marL="0">
+            <a:pPr marL="0" indent="0">
               <a:buNone/>
             </a:pPr>
             <a:r>
@@ -2007,6 +1661,7 @@
         <a:solidFill>
           <a:srgbClr val="0A0A0F"/>
         </a:solidFill>
+        <a:effectLst/>
       </p:bgPr>
     </p:bg>
     <p:spTree>
@@ -2044,7 +1699,7 @@
           <a:bodyPr wrap="square" lIns="0" tIns="0" rIns="0" bIns="0" rtlCol="0" anchor="ctr"/>
           <a:lstStyle/>
           <a:p>
-            <a:pPr indent="0" marL="0">
+            <a:pPr marL="0" indent="0">
               <a:buNone/>
             </a:pPr>
             <a:r>
@@ -2125,7 +1780,7 @@
           <a:bodyPr wrap="square" lIns="0" tIns="0" rIns="0" bIns="0" rtlCol="0" anchor="ctr"/>
           <a:lstStyle/>
           <a:p>
-            <a:pPr indent="0" marL="0">
+            <a:pPr marL="0" indent="0">
               <a:buNone/>
             </a:pPr>
             <a:r>
@@ -2164,7 +1819,7 @@
           <a:bodyPr wrap="square" lIns="0" tIns="0" rIns="0" bIns="0" rtlCol="0" anchor="ctr"/>
           <a:lstStyle/>
           <a:p>
-            <a:pPr indent="0" marL="0">
+            <a:pPr marL="0" indent="0">
               <a:buNone/>
             </a:pPr>
             <a:r>
@@ -2245,7 +1900,7 @@
           <a:bodyPr wrap="square" lIns="0" tIns="0" rIns="0" bIns="0" rtlCol="0" anchor="ctr"/>
           <a:lstStyle/>
           <a:p>
-            <a:pPr indent="0" marL="0">
+            <a:pPr marL="0" indent="0">
               <a:buNone/>
             </a:pPr>
             <a:r>
@@ -2284,7 +1939,7 @@
           <a:bodyPr wrap="square" lIns="0" tIns="0" rIns="0" bIns="0" rtlCol="0" anchor="ctr"/>
           <a:lstStyle/>
           <a:p>
-            <a:pPr indent="0" marL="0">
+            <a:pPr marL="0" indent="0">
               <a:buNone/>
             </a:pPr>
             <a:r>
@@ -2365,7 +2020,7 @@
           <a:bodyPr wrap="square" lIns="0" tIns="0" rIns="0" bIns="0" rtlCol="0" anchor="ctr"/>
           <a:lstStyle/>
           <a:p>
-            <a:pPr indent="0" marL="0">
+            <a:pPr marL="0" indent="0">
               <a:buNone/>
             </a:pPr>
             <a:r>
@@ -2404,7 +2059,7 @@
           <a:bodyPr wrap="square" lIns="0" tIns="0" rIns="0" bIns="0" rtlCol="0" anchor="ctr"/>
           <a:lstStyle/>
           <a:p>
-            <a:pPr indent="0" marL="0">
+            <a:pPr marL="0" indent="0">
               <a:buNone/>
             </a:pPr>
             <a:r>
@@ -2485,7 +2140,7 @@
           <a:bodyPr wrap="square" lIns="0" tIns="0" rIns="0" bIns="0" rtlCol="0" anchor="ctr"/>
           <a:lstStyle/>
           <a:p>
-            <a:pPr indent="0" marL="0">
+            <a:pPr marL="0" indent="0">
               <a:buNone/>
             </a:pPr>
             <a:r>
@@ -2524,7 +2179,7 @@
           <a:bodyPr wrap="square" lIns="0" tIns="0" rIns="0" bIns="0" rtlCol="0" anchor="ctr"/>
           <a:lstStyle/>
           <a:p>
-            <a:pPr indent="0" marL="0">
+            <a:pPr marL="0" indent="0">
               <a:buNone/>
             </a:pPr>
             <a:r>
@@ -2605,7 +2260,7 @@
           <a:bodyPr wrap="square" lIns="0" tIns="0" rIns="0" bIns="0" rtlCol="0" anchor="ctr"/>
           <a:lstStyle/>
           <a:p>
-            <a:pPr indent="0" marL="0">
+            <a:pPr marL="0" indent="0">
               <a:buNone/>
             </a:pPr>
             <a:r>
@@ -2644,7 +2299,7 @@
           <a:bodyPr wrap="square" lIns="0" tIns="0" rIns="0" bIns="0" rtlCol="0" anchor="ctr"/>
           <a:lstStyle/>
           <a:p>
-            <a:pPr indent="0" marL="0">
+            <a:pPr marL="0" indent="0">
               <a:buNone/>
             </a:pPr>
             <a:r>
@@ -2678,6 +2333,7 @@
         <a:solidFill>
           <a:srgbClr val="0A0A0F"/>
         </a:solidFill>
+        <a:effectLst/>
       </p:bgPr>
     </p:bg>
     <p:spTree>
@@ -2715,7 +2371,7 @@
           <a:bodyPr wrap="square" lIns="0" tIns="0" rIns="0" bIns="0" rtlCol="0" anchor="ctr"/>
           <a:lstStyle/>
           <a:p>
-            <a:pPr indent="0" marL="0">
+            <a:pPr marL="0" indent="0">
               <a:buNone/>
             </a:pPr>
             <a:r>
@@ -2776,7 +2432,7 @@
           <a:bodyPr wrap="square" lIns="0" tIns="0" rIns="0" bIns="0" rtlCol="0" anchor="ctr"/>
           <a:lstStyle/>
           <a:p>
-            <a:pPr indent="0" marL="0">
+            <a:pPr marL="0" indent="0">
               <a:buNone/>
             </a:pPr>
             <a:r>
@@ -2931,7 +2587,7 @@
           <a:bodyPr wrap="square" lIns="0" tIns="0" rIns="0" bIns="0" rtlCol="0" anchor="ctr"/>
           <a:lstStyle/>
           <a:p>
-            <a:pPr indent="0" marL="0">
+            <a:pPr marL="0" indent="0">
               <a:buNone/>
             </a:pPr>
             <a:r>
@@ -3069,14 +2725,15 @@
 </p:sld>
 </file>
 
-<file path=ppt/slides/slide12.xml><?xml version="1.0" encoding="utf-8"?>
+<file path=ppt/slides/slide2.xml><?xml version="1.0" encoding="utf-8"?>
 <p:sld xmlns:a="http://schemas.openxmlformats.org/drawingml/2006/main" xmlns:r="http://schemas.openxmlformats.org/officeDocument/2006/relationships" xmlns:p="http://schemas.openxmlformats.org/presentationml/2006/main">
-  <p:cSld name="Slide 12">
+  <p:cSld name="Slide 2">
     <p:bg>
       <p:bgPr>
         <a:solidFill>
           <a:srgbClr val="0A0A0F"/>
         </a:solidFill>
+        <a:effectLst/>
       </p:bgPr>
     </p:bg>
     <p:spTree>
@@ -3114,7 +2771,7 @@
           <a:bodyPr wrap="square" lIns="0" tIns="0" rIns="0" bIns="0" rtlCol="0" anchor="ctr"/>
           <a:lstStyle/>
           <a:p>
-            <a:pPr indent="0" marL="0">
+            <a:pPr marL="0" indent="0">
               <a:buNone/>
             </a:pPr>
             <a:r>
@@ -3126,7 +2783,7 @@
                 <a:ea typeface="Arial Black" pitchFamily="34" charset="-122"/>
                 <a:cs typeface="Arial Black" pitchFamily="34" charset="-120"/>
               </a:rPr>
-              <a:t>The Ask</a:t>
+              <a:t>The Problem</a:t>
             </a:r>
             <a:endParaRPr lang="en-US" sz="3600" dirty="0"/>
           </a:p>
@@ -3140,12 +2797,12 @@
         </p:nvSpPr>
         <p:spPr>
           <a:xfrm>
-            <a:off x="640080" y="1097280"/>
-            <a:ext cx="3657600" cy="1371600"/>
+            <a:off x="640080" y="1188720"/>
+            <a:ext cx="7863840" cy="1005840"/>
           </a:xfrm>
           <a:prstGeom prst="roundRect">
             <a:avLst>
-              <a:gd name="adj" fmla="val 6667"/>
+              <a:gd name="adj" fmla="val 9091"/>
             </a:avLst>
           </a:prstGeom>
           <a:solidFill>
@@ -3162,34 +2819,34 @@
         </p:nvSpPr>
         <p:spPr>
           <a:xfrm>
-            <a:off x="822960" y="1188720"/>
-            <a:ext cx="3200400" cy="548640"/>
-          </a:xfrm>
-          <a:prstGeom prst="rect">
-            <a:avLst/>
-          </a:prstGeom>
-          <a:noFill/>
-          <a:ln/>
-        </p:spPr>
-        <p:txBody>
-          <a:bodyPr wrap="square" lIns="0" tIns="0" rIns="0" bIns="0" rtlCol="0" anchor="ctr"/>
-          <a:lstStyle/>
-          <a:p>
-            <a:pPr indent="0" marL="0">
-              <a:buNone/>
-            </a:pPr>
-            <a:r>
-              <a:rPr lang="en-US" sz="4000" b="1" dirty="0">
-                <a:solidFill>
-                  <a:srgbClr val="00D4AA"/>
-                </a:solidFill>
-                <a:latin typeface="Arial Black" pitchFamily="34" charset="0"/>
-                <a:ea typeface="Arial Black" pitchFamily="34" charset="-122"/>
-                <a:cs typeface="Arial Black" pitchFamily="34" charset="-120"/>
-              </a:rPr>
-              <a:t>$500K</a:t>
-            </a:r>
-            <a:endParaRPr lang="en-US" sz="4000" dirty="0"/>
+            <a:off x="914400" y="1325880"/>
+            <a:ext cx="6400800" cy="320040"/>
+          </a:xfrm>
+          <a:prstGeom prst="rect">
+            <a:avLst/>
+          </a:prstGeom>
+          <a:noFill/>
+          <a:ln/>
+        </p:spPr>
+        <p:txBody>
+          <a:bodyPr wrap="square" lIns="0" tIns="0" rIns="0" bIns="0" rtlCol="0" anchor="ctr"/>
+          <a:lstStyle/>
+          <a:p>
+            <a:pPr marL="0" indent="0">
+              <a:buNone/>
+            </a:pPr>
+            <a:r>
+              <a:rPr lang="en-US" sz="1800" b="1" dirty="0">
+                <a:solidFill>
+                  <a:srgbClr val="FF6B6B"/>
+                </a:solidFill>
+                <a:latin typeface="Arial" pitchFamily="34" charset="0"/>
+                <a:ea typeface="Arial" pitchFamily="34" charset="-122"/>
+                <a:cs typeface="Arial" pitchFamily="34" charset="-120"/>
+              </a:rPr>
+              <a:t>Volatile Markets</a:t>
+            </a:r>
+            <a:endParaRPr lang="en-US" sz="1800" dirty="0"/>
           </a:p>
         </p:txBody>
       </p:sp>
@@ -3201,24 +2858,24 @@
         </p:nvSpPr>
         <p:spPr>
           <a:xfrm>
-            <a:off x="822960" y="1737360"/>
-            <a:ext cx="3200400" cy="274320"/>
-          </a:xfrm>
-          <a:prstGeom prst="rect">
-            <a:avLst/>
-          </a:prstGeom>
-          <a:noFill/>
-          <a:ln/>
-        </p:spPr>
-        <p:txBody>
-          <a:bodyPr wrap="square" lIns="0" tIns="0" rIns="0" bIns="0" rtlCol="0" anchor="ctr"/>
-          <a:lstStyle/>
-          <a:p>
-            <a:pPr indent="0" marL="0">
-              <a:buNone/>
-            </a:pPr>
-            <a:r>
-              <a:rPr lang="en-US" sz="1600" dirty="0">
+            <a:off x="914400" y="1691640"/>
+            <a:ext cx="7315200" cy="365760"/>
+          </a:xfrm>
+          <a:prstGeom prst="rect">
+            <a:avLst/>
+          </a:prstGeom>
+          <a:noFill/>
+          <a:ln/>
+        </p:spPr>
+        <p:txBody>
+          <a:bodyPr wrap="square" lIns="0" tIns="0" rIns="0" bIns="0" rtlCol="0" anchor="ctr"/>
+          <a:lstStyle/>
+          <a:p>
+            <a:pPr marL="0" indent="0">
+              <a:buNone/>
+            </a:pPr>
+            <a:r>
+              <a:rPr lang="en-US" sz="1300" dirty="0">
                 <a:solidFill>
                   <a:srgbClr val="71717A"/>
                 </a:solidFill>
@@ -3226,21 +2883,82 @@
                 <a:ea typeface="Arial" pitchFamily="34" charset="-122"/>
                 <a:cs typeface="Arial" pitchFamily="34" charset="-120"/>
               </a:rPr>
-              <a:t>at $5M valuation</a:t>
-            </a:r>
-            <a:endParaRPr lang="en-US" sz="1600" dirty="0"/>
-          </a:p>
-        </p:txBody>
-      </p:sp>
-      <p:sp>
-        <p:nvSpPr>
-          <p:cNvPr id="6" name="Text 4"/>
-          <p:cNvSpPr/>
-          <p:nvPr/>
-        </p:nvSpPr>
-        <p:spPr>
-          <a:xfrm>
-            <a:off x="640080" y="2743200"/>
+              <a:t>BTC swings 5-10% in a day. Retail investors get wiped out.</a:t>
+            </a:r>
+            <a:endParaRPr lang="en-US" sz="1300" dirty="0"/>
+          </a:p>
+        </p:txBody>
+      </p:sp>
+      <p:sp>
+        <p:nvSpPr>
+          <p:cNvPr id="6" name="Shape 4"/>
+          <p:cNvSpPr/>
+          <p:nvPr/>
+        </p:nvSpPr>
+        <p:spPr>
+          <a:xfrm>
+            <a:off x="640080" y="2377440"/>
+            <a:ext cx="7863840" cy="1005840"/>
+          </a:xfrm>
+          <a:prstGeom prst="roundRect">
+            <a:avLst>
+              <a:gd name="adj" fmla="val 9091"/>
+            </a:avLst>
+          </a:prstGeom>
+          <a:solidFill>
+            <a:srgbClr val="13131A"/>
+          </a:solidFill>
+          <a:ln/>
+        </p:spPr>
+      </p:sp>
+      <p:sp>
+        <p:nvSpPr>
+          <p:cNvPr id="7" name="Text 5"/>
+          <p:cNvSpPr/>
+          <p:nvPr/>
+        </p:nvSpPr>
+        <p:spPr>
+          <a:xfrm>
+            <a:off x="914400" y="2514600"/>
+            <a:ext cx="6400800" cy="320040"/>
+          </a:xfrm>
+          <a:prstGeom prst="rect">
+            <a:avLst/>
+          </a:prstGeom>
+          <a:noFill/>
+          <a:ln/>
+        </p:spPr>
+        <p:txBody>
+          <a:bodyPr wrap="square" lIns="0" tIns="0" rIns="0" bIns="0" rtlCol="0" anchor="ctr"/>
+          <a:lstStyle/>
+          <a:p>
+            <a:pPr marL="0" indent="0">
+              <a:buNone/>
+            </a:pPr>
+            <a:r>
+              <a:rPr lang="en-US" sz="1800" b="1" dirty="0">
+                <a:solidFill>
+                  <a:srgbClr val="FF6B6B"/>
+                </a:solidFill>
+                <a:latin typeface="Arial" pitchFamily="34" charset="0"/>
+                <a:ea typeface="Arial" pitchFamily="34" charset="-122"/>
+                <a:cs typeface="Arial" pitchFamily="34" charset="-120"/>
+              </a:rPr>
+              <a:t>No Institutional Tools</a:t>
+            </a:r>
+            <a:endParaRPr lang="en-US" sz="1800" dirty="0"/>
+          </a:p>
+        </p:txBody>
+      </p:sp>
+      <p:sp>
+        <p:nvSpPr>
+          <p:cNvPr id="8" name="Text 6"/>
+          <p:cNvSpPr/>
+          <p:nvPr/>
+        </p:nvSpPr>
+        <p:spPr>
+          <a:xfrm>
+            <a:off x="914400" y="2880360"/>
             <a:ext cx="7315200" cy="365760"/>
           </a:xfrm>
           <a:prstGeom prst="rect">
@@ -3253,19 +2971,80 @@
           <a:bodyPr wrap="square" lIns="0" tIns="0" rIns="0" bIns="0" rtlCol="0" anchor="ctr"/>
           <a:lstStyle/>
           <a:p>
-            <a:pPr indent="0" marL="0">
+            <a:pPr marL="0" indent="0">
+              <a:buNone/>
+            </a:pPr>
+            <a:r>
+              <a:rPr lang="en-US" sz="1300" dirty="0">
+                <a:solidFill>
+                  <a:srgbClr val="71717A"/>
+                </a:solidFill>
+                <a:latin typeface="Arial" pitchFamily="34" charset="0"/>
+                <a:ea typeface="Arial" pitchFamily="34" charset="-122"/>
+                <a:cs typeface="Arial" pitchFamily="34" charset="-120"/>
+              </a:rPr>
+              <a:t>Hedge funds use on-chain analytics, ML models. Retail has nothing.</a:t>
+            </a:r>
+            <a:endParaRPr lang="en-US" sz="1300" dirty="0"/>
+          </a:p>
+        </p:txBody>
+      </p:sp>
+      <p:sp>
+        <p:nvSpPr>
+          <p:cNvPr id="9" name="Shape 7"/>
+          <p:cNvSpPr/>
+          <p:nvPr/>
+        </p:nvSpPr>
+        <p:spPr>
+          <a:xfrm>
+            <a:off x="640080" y="3566160"/>
+            <a:ext cx="7863840" cy="1005840"/>
+          </a:xfrm>
+          <a:prstGeom prst="roundRect">
+            <a:avLst>
+              <a:gd name="adj" fmla="val 9091"/>
+            </a:avLst>
+          </a:prstGeom>
+          <a:solidFill>
+            <a:srgbClr val="13131A"/>
+          </a:solidFill>
+          <a:ln/>
+        </p:spPr>
+      </p:sp>
+      <p:sp>
+        <p:nvSpPr>
+          <p:cNvPr id="10" name="Text 8"/>
+          <p:cNvSpPr/>
+          <p:nvPr/>
+        </p:nvSpPr>
+        <p:spPr>
+          <a:xfrm>
+            <a:off x="914400" y="3703320"/>
+            <a:ext cx="6400800" cy="320040"/>
+          </a:xfrm>
+          <a:prstGeom prst="rect">
+            <a:avLst/>
+          </a:prstGeom>
+          <a:noFill/>
+          <a:ln/>
+        </p:spPr>
+        <p:txBody>
+          <a:bodyPr wrap="square" lIns="0" tIns="0" rIns="0" bIns="0" rtlCol="0" anchor="ctr"/>
+          <a:lstStyle/>
+          <a:p>
+            <a:pPr marL="0" indent="0">
               <a:buNone/>
             </a:pPr>
             <a:r>
               <a:rPr lang="en-US" sz="1800" b="1" dirty="0">
                 <a:solidFill>
-                  <a:srgbClr val="FFFFFF"/>
-                </a:solidFill>
-                <a:latin typeface="Arial" pitchFamily="34" charset="0"/>
-                <a:ea typeface="Arial" pitchFamily="34" charset="-122"/>
-                <a:cs typeface="Arial" pitchFamily="34" charset="-120"/>
-              </a:rPr>
-              <a:t>Use of Funds</a:t>
+                  <a:srgbClr val="FF6B6B"/>
+                </a:solidFill>
+                <a:latin typeface="Arial" pitchFamily="34" charset="0"/>
+                <a:ea typeface="Arial" pitchFamily="34" charset="-122"/>
+                <a:cs typeface="Arial" pitchFamily="34" charset="-120"/>
+              </a:rPr>
+              <a:t>Black Box Predictions</a:t>
             </a:r>
             <a:endParaRPr lang="en-US" sz="1800" dirty="0"/>
           </a:p>
@@ -3273,393 +3052,40 @@
       </p:sp>
       <p:sp>
         <p:nvSpPr>
-          <p:cNvPr id="7" name="Shape 5"/>
-          <p:cNvSpPr/>
-          <p:nvPr/>
-        </p:nvSpPr>
-        <p:spPr>
-          <a:xfrm>
-            <a:off x="822960" y="3273552"/>
-            <a:ext cx="164592" cy="164592"/>
-          </a:xfrm>
-          <a:prstGeom prst="ellipse">
-            <a:avLst/>
-          </a:prstGeom>
-          <a:solidFill>
-            <a:srgbClr val="00D4AA"/>
-          </a:solidFill>
-          <a:ln/>
-        </p:spPr>
-      </p:sp>
-      <p:sp>
-        <p:nvSpPr>
-          <p:cNvPr id="8" name="Text 6"/>
-          <p:cNvSpPr/>
-          <p:nvPr/>
-        </p:nvSpPr>
-        <p:spPr>
-          <a:xfrm>
-            <a:off x="1188720" y="3200400"/>
-            <a:ext cx="3657600" cy="228600"/>
-          </a:xfrm>
-          <a:prstGeom prst="rect">
-            <a:avLst/>
-          </a:prstGeom>
-          <a:noFill/>
-          <a:ln/>
-        </p:spPr>
-        <p:txBody>
-          <a:bodyPr wrap="square" lIns="0" tIns="0" rIns="0" bIns="0" rtlCol="0" anchor="ctr"/>
-          <a:lstStyle/>
-          <a:p>
-            <a:pPr indent="0" marL="0">
-              <a:buNone/>
-            </a:pPr>
-            <a:r>
-              <a:rPr lang="en-US" sz="1300" b="1" dirty="0">
-                <a:solidFill>
-                  <a:srgbClr val="FFFFFF"/>
-                </a:solidFill>
-                <a:latin typeface="Arial" pitchFamily="34" charset="0"/>
-                <a:ea typeface="Arial" pitchFamily="34" charset="-122"/>
-                <a:cs typeface="Arial" pitchFamily="34" charset="-120"/>
-              </a:rPr>
-              <a:t>Glassnode Pro ($799/mo)</a:t>
+          <p:cNvPr id="11" name="Text 9"/>
+          <p:cNvSpPr/>
+          <p:nvPr/>
+        </p:nvSpPr>
+        <p:spPr>
+          <a:xfrm>
+            <a:off x="914400" y="4069080"/>
+            <a:ext cx="7315200" cy="365760"/>
+          </a:xfrm>
+          <a:prstGeom prst="rect">
+            <a:avLst/>
+          </a:prstGeom>
+          <a:noFill/>
+          <a:ln/>
+        </p:spPr>
+        <p:txBody>
+          <a:bodyPr wrap="square" lIns="0" tIns="0" rIns="0" bIns="0" rtlCol="0" anchor="ctr"/>
+          <a:lstStyle/>
+          <a:p>
+            <a:pPr marL="0" indent="0">
+              <a:buNone/>
+            </a:pPr>
+            <a:r>
+              <a:rPr lang="en-US" sz="1300" dirty="0">
+                <a:solidFill>
+                  <a:srgbClr val="71717A"/>
+                </a:solidFill>
+                <a:latin typeface="Arial" pitchFamily="34" charset="0"/>
+                <a:ea typeface="Arial" pitchFamily="34" charset="-122"/>
+                <a:cs typeface="Arial" pitchFamily="34" charset="-120"/>
+              </a:rPr>
+              <a:t>Existing tools show a number with no reasoning. No transparency.</a:t>
             </a:r>
             <a:endParaRPr lang="en-US" sz="1300" dirty="0"/>
-          </a:p>
-        </p:txBody>
-      </p:sp>
-      <p:sp>
-        <p:nvSpPr>
-          <p:cNvPr id="9" name="Text 7"/>
-          <p:cNvSpPr/>
-          <p:nvPr/>
-        </p:nvSpPr>
-        <p:spPr>
-          <a:xfrm>
-            <a:off x="5029200" y="3200400"/>
-            <a:ext cx="3657600" cy="228600"/>
-          </a:xfrm>
-          <a:prstGeom prst="rect">
-            <a:avLst/>
-          </a:prstGeom>
-          <a:noFill/>
-          <a:ln/>
-        </p:spPr>
-        <p:txBody>
-          <a:bodyPr wrap="square" lIns="0" tIns="0" rIns="0" bIns="0" rtlCol="0" anchor="ctr"/>
-          <a:lstStyle/>
-          <a:p>
-            <a:pPr indent="0" marL="0">
-              <a:buNone/>
-            </a:pPr>
-            <a:r>
-              <a:rPr lang="en-US" sz="1100" dirty="0">
-                <a:solidFill>
-                  <a:srgbClr val="71717A"/>
-                </a:solidFill>
-                <a:latin typeface="Arial" pitchFamily="34" charset="0"/>
-                <a:ea typeface="Arial" pitchFamily="34" charset="-122"/>
-                <a:cs typeface="Arial" pitchFamily="34" charset="-120"/>
-              </a:rPr>
-              <a:t>87 features → target 82%+ accuracy</a:t>
-            </a:r>
-            <a:endParaRPr lang="en-US" sz="1100" dirty="0"/>
-          </a:p>
-        </p:txBody>
-      </p:sp>
-      <p:sp>
-        <p:nvSpPr>
-          <p:cNvPr id="10" name="Shape 8"/>
-          <p:cNvSpPr/>
-          <p:nvPr/>
-        </p:nvSpPr>
-        <p:spPr>
-          <a:xfrm>
-            <a:off x="822960" y="3685032"/>
-            <a:ext cx="164592" cy="164592"/>
-          </a:xfrm>
-          <a:prstGeom prst="ellipse">
-            <a:avLst/>
-          </a:prstGeom>
-          <a:solidFill>
-            <a:srgbClr val="4DABF7"/>
-          </a:solidFill>
-          <a:ln/>
-        </p:spPr>
-      </p:sp>
-      <p:sp>
-        <p:nvSpPr>
-          <p:cNvPr id="11" name="Text 9"/>
-          <p:cNvSpPr/>
-          <p:nvPr/>
-        </p:nvSpPr>
-        <p:spPr>
-          <a:xfrm>
-            <a:off x="1188720" y="3611880"/>
-            <a:ext cx="3657600" cy="228600"/>
-          </a:xfrm>
-          <a:prstGeom prst="rect">
-            <a:avLst/>
-          </a:prstGeom>
-          <a:noFill/>
-          <a:ln/>
-        </p:spPr>
-        <p:txBody>
-          <a:bodyPr wrap="square" lIns="0" tIns="0" rIns="0" bIns="0" rtlCol="0" anchor="ctr"/>
-          <a:lstStyle/>
-          <a:p>
-            <a:pPr indent="0" marL="0">
-              <a:buNone/>
-            </a:pPr>
-            <a:r>
-              <a:rPr lang="en-US" sz="1300" b="1" dirty="0">
-                <a:solidFill>
-                  <a:srgbClr val="FFFFFF"/>
-                </a:solidFill>
-                <a:latin typeface="Arial" pitchFamily="34" charset="0"/>
-                <a:ea typeface="Arial" pitchFamily="34" charset="-122"/>
-                <a:cs typeface="Arial" pitchFamily="34" charset="-120"/>
-              </a:rPr>
-              <a:t>Expand to ETH, SOL, top 10</a:t>
-            </a:r>
-            <a:endParaRPr lang="en-US" sz="1300" dirty="0"/>
-          </a:p>
-        </p:txBody>
-      </p:sp>
-      <p:sp>
-        <p:nvSpPr>
-          <p:cNvPr id="12" name="Text 10"/>
-          <p:cNvSpPr/>
-          <p:nvPr/>
-        </p:nvSpPr>
-        <p:spPr>
-          <a:xfrm>
-            <a:off x="5029200" y="3611880"/>
-            <a:ext cx="3657600" cy="228600"/>
-          </a:xfrm>
-          <a:prstGeom prst="rect">
-            <a:avLst/>
-          </a:prstGeom>
-          <a:noFill/>
-          <a:ln/>
-        </p:spPr>
-        <p:txBody>
-          <a:bodyPr wrap="square" lIns="0" tIns="0" rIns="0" bIns="0" rtlCol="0" anchor="ctr"/>
-          <a:lstStyle/>
-          <a:p>
-            <a:pPr indent="0" marL="0">
-              <a:buNone/>
-            </a:pPr>
-            <a:r>
-              <a:rPr lang="en-US" sz="1100" dirty="0">
-                <a:solidFill>
-                  <a:srgbClr val="71717A"/>
-                </a:solidFill>
-                <a:latin typeface="Arial" pitchFamily="34" charset="0"/>
-                <a:ea typeface="Arial" pitchFamily="34" charset="-122"/>
-                <a:cs typeface="Arial" pitchFamily="34" charset="-120"/>
-              </a:rPr>
-              <a:t>Same architecture, per-coin models</a:t>
-            </a:r>
-            <a:endParaRPr lang="en-US" sz="1100" dirty="0"/>
-          </a:p>
-        </p:txBody>
-      </p:sp>
-      <p:sp>
-        <p:nvSpPr>
-          <p:cNvPr id="13" name="Shape 11"/>
-          <p:cNvSpPr/>
-          <p:nvPr/>
-        </p:nvSpPr>
-        <p:spPr>
-          <a:xfrm>
-            <a:off x="822960" y="4096512"/>
-            <a:ext cx="164592" cy="164592"/>
-          </a:xfrm>
-          <a:prstGeom prst="ellipse">
-            <a:avLst/>
-          </a:prstGeom>
-          <a:solidFill>
-            <a:srgbClr val="6C5CE7"/>
-          </a:solidFill>
-          <a:ln/>
-        </p:spPr>
-      </p:sp>
-      <p:sp>
-        <p:nvSpPr>
-          <p:cNvPr id="14" name="Text 12"/>
-          <p:cNvSpPr/>
-          <p:nvPr/>
-        </p:nvSpPr>
-        <p:spPr>
-          <a:xfrm>
-            <a:off x="1188720" y="4023360"/>
-            <a:ext cx="3657600" cy="228600"/>
-          </a:xfrm>
-          <a:prstGeom prst="rect">
-            <a:avLst/>
-          </a:prstGeom>
-          <a:noFill/>
-          <a:ln/>
-        </p:spPr>
-        <p:txBody>
-          <a:bodyPr wrap="square" lIns="0" tIns="0" rIns="0" bIns="0" rtlCol="0" anchor="ctr"/>
-          <a:lstStyle/>
-          <a:p>
-            <a:pPr indent="0" marL="0">
-              <a:buNone/>
-            </a:pPr>
-            <a:r>
-              <a:rPr lang="en-US" sz="1300" b="1" dirty="0">
-                <a:solidFill>
-                  <a:srgbClr val="FFFFFF"/>
-                </a:solidFill>
-                <a:latin typeface="Arial" pitchFamily="34" charset="0"/>
-                <a:ea typeface="Arial" pitchFamily="34" charset="-122"/>
-                <a:cs typeface="Arial" pitchFamily="34" charset="-120"/>
-              </a:rPr>
-              <a:t>Mobile app (React Native)</a:t>
-            </a:r>
-            <a:endParaRPr lang="en-US" sz="1300" dirty="0"/>
-          </a:p>
-        </p:txBody>
-      </p:sp>
-      <p:sp>
-        <p:nvSpPr>
-          <p:cNvPr id="15" name="Text 13"/>
-          <p:cNvSpPr/>
-          <p:nvPr/>
-        </p:nvSpPr>
-        <p:spPr>
-          <a:xfrm>
-            <a:off x="5029200" y="4023360"/>
-            <a:ext cx="3657600" cy="228600"/>
-          </a:xfrm>
-          <a:prstGeom prst="rect">
-            <a:avLst/>
-          </a:prstGeom>
-          <a:noFill/>
-          <a:ln/>
-        </p:spPr>
-        <p:txBody>
-          <a:bodyPr wrap="square" lIns="0" tIns="0" rIns="0" bIns="0" rtlCol="0" anchor="ctr"/>
-          <a:lstStyle/>
-          <a:p>
-            <a:pPr indent="0" marL="0">
-              <a:buNone/>
-            </a:pPr>
-            <a:r>
-              <a:rPr lang="en-US" sz="1100" dirty="0">
-                <a:solidFill>
-                  <a:srgbClr val="71717A"/>
-                </a:solidFill>
-                <a:latin typeface="Arial" pitchFamily="34" charset="0"/>
-                <a:ea typeface="Arial" pitchFamily="34" charset="-122"/>
-                <a:cs typeface="Arial" pitchFamily="34" charset="-120"/>
-              </a:rPr>
-              <a:t>Push notifications on signal changes</a:t>
-            </a:r>
-            <a:endParaRPr lang="en-US" sz="1100" dirty="0"/>
-          </a:p>
-        </p:txBody>
-      </p:sp>
-      <p:sp>
-        <p:nvSpPr>
-          <p:cNvPr id="16" name="Shape 14"/>
-          <p:cNvSpPr/>
-          <p:nvPr/>
-        </p:nvSpPr>
-        <p:spPr>
-          <a:xfrm>
-            <a:off x="822960" y="4507992"/>
-            <a:ext cx="164592" cy="164592"/>
-          </a:xfrm>
-          <a:prstGeom prst="ellipse">
-            <a:avLst/>
-          </a:prstGeom>
-          <a:solidFill>
-            <a:srgbClr val="FFD93D"/>
-          </a:solidFill>
-          <a:ln/>
-        </p:spPr>
-      </p:sp>
-      <p:sp>
-        <p:nvSpPr>
-          <p:cNvPr id="17" name="Text 15"/>
-          <p:cNvSpPr/>
-          <p:nvPr/>
-        </p:nvSpPr>
-        <p:spPr>
-          <a:xfrm>
-            <a:off x="1188720" y="4434840"/>
-            <a:ext cx="3657600" cy="228600"/>
-          </a:xfrm>
-          <a:prstGeom prst="rect">
-            <a:avLst/>
-          </a:prstGeom>
-          <a:noFill/>
-          <a:ln/>
-        </p:spPr>
-        <p:txBody>
-          <a:bodyPr wrap="square" lIns="0" tIns="0" rIns="0" bIns="0" rtlCol="0" anchor="ctr"/>
-          <a:lstStyle/>
-          <a:p>
-            <a:pPr indent="0" marL="0">
-              <a:buNone/>
-            </a:pPr>
-            <a:r>
-              <a:rPr lang="en-US" sz="1300" b="1" dirty="0">
-                <a:solidFill>
-                  <a:srgbClr val="FFFFFF"/>
-                </a:solidFill>
-                <a:latin typeface="Arial" pitchFamily="34" charset="0"/>
-                <a:ea typeface="Arial" pitchFamily="34" charset="-122"/>
-                <a:cs typeface="Arial" pitchFamily="34" charset="-120"/>
-              </a:rPr>
-              <a:t>Team: ML eng + full-stack</a:t>
-            </a:r>
-            <a:endParaRPr lang="en-US" sz="1300" dirty="0"/>
-          </a:p>
-        </p:txBody>
-      </p:sp>
-      <p:sp>
-        <p:nvSpPr>
-          <p:cNvPr id="18" name="Text 16"/>
-          <p:cNvSpPr/>
-          <p:nvPr/>
-        </p:nvSpPr>
-        <p:spPr>
-          <a:xfrm>
-            <a:off x="5029200" y="4434840"/>
-            <a:ext cx="3657600" cy="228600"/>
-          </a:xfrm>
-          <a:prstGeom prst="rect">
-            <a:avLst/>
-          </a:prstGeom>
-          <a:noFill/>
-          <a:ln/>
-        </p:spPr>
-        <p:txBody>
-          <a:bodyPr wrap="square" lIns="0" tIns="0" rIns="0" bIns="0" rtlCol="0" anchor="ctr"/>
-          <a:lstStyle/>
-          <a:p>
-            <a:pPr indent="0" marL="0">
-              <a:buNone/>
-            </a:pPr>
-            <a:r>
-              <a:rPr lang="en-US" sz="1100" dirty="0">
-                <a:solidFill>
-                  <a:srgbClr val="71717A"/>
-                </a:solidFill>
-                <a:latin typeface="Arial" pitchFamily="34" charset="0"/>
-                <a:ea typeface="Arial" pitchFamily="34" charset="-122"/>
-                <a:cs typeface="Arial" pitchFamily="34" charset="-120"/>
-              </a:rPr>
-              <a:t>Scale infra, more data sources</a:t>
-            </a:r>
-            <a:endParaRPr lang="en-US" sz="1100" dirty="0"/>
           </a:p>
         </p:txBody>
       </p:sp>
@@ -3671,14 +3097,15 @@
 </p:sld>
 </file>
 
-<file path=ppt/slides/slide2.xml><?xml version="1.0" encoding="utf-8"?>
+<file path=ppt/slides/slide3.xml><?xml version="1.0" encoding="utf-8"?>
 <p:sld xmlns:a="http://schemas.openxmlformats.org/drawingml/2006/main" xmlns:r="http://schemas.openxmlformats.org/officeDocument/2006/relationships" xmlns:p="http://schemas.openxmlformats.org/presentationml/2006/main">
-  <p:cSld name="Slide 2">
+  <p:cSld name="Slide 3">
     <p:bg>
       <p:bgPr>
         <a:solidFill>
           <a:srgbClr val="0A0A0F"/>
         </a:solidFill>
+        <a:effectLst/>
       </p:bgPr>
     </p:bg>
     <p:spTree>
@@ -3716,7 +3143,7 @@
           <a:bodyPr wrap="square" lIns="0" tIns="0" rIns="0" bIns="0" rtlCol="0" anchor="ctr"/>
           <a:lstStyle/>
           <a:p>
-            <a:pPr indent="0" marL="0">
+            <a:pPr marL="0" indent="0">
               <a:buNone/>
             </a:pPr>
             <a:r>
@@ -3728,7 +3155,7 @@
                 <a:ea typeface="Arial Black" pitchFamily="34" charset="-122"/>
                 <a:cs typeface="Arial Black" pitchFamily="34" charset="-120"/>
               </a:rPr>
-              <a:t>The Problem</a:t>
+              <a:t>Our Solution</a:t>
             </a:r>
             <a:endParaRPr lang="en-US" sz="3600" dirty="0"/>
           </a:p>
@@ -3743,11 +3170,11 @@
         <p:spPr>
           <a:xfrm>
             <a:off x="640080" y="1188720"/>
-            <a:ext cx="7863840" cy="1005840"/>
+            <a:ext cx="3749040" cy="1463040"/>
           </a:xfrm>
           <a:prstGeom prst="roundRect">
             <a:avLst>
-              <a:gd name="adj" fmla="val 9091"/>
+              <a:gd name="adj" fmla="val 6250"/>
             </a:avLst>
           </a:prstGeom>
           <a:solidFill>
@@ -3764,34 +3191,34 @@
         </p:nvSpPr>
         <p:spPr>
           <a:xfrm>
-            <a:off x="914400" y="1325880"/>
-            <a:ext cx="6400800" cy="320040"/>
-          </a:xfrm>
-          <a:prstGeom prst="rect">
-            <a:avLst/>
-          </a:prstGeom>
-          <a:noFill/>
-          <a:ln/>
-        </p:spPr>
-        <p:txBody>
-          <a:bodyPr wrap="square" lIns="0" tIns="0" rIns="0" bIns="0" rtlCol="0" anchor="ctr"/>
-          <a:lstStyle/>
-          <a:p>
-            <a:pPr indent="0" marL="0">
-              <a:buNone/>
-            </a:pPr>
-            <a:r>
-              <a:rPr lang="en-US" sz="1800" b="1" dirty="0">
-                <a:solidFill>
-                  <a:srgbClr val="FF6B6B"/>
-                </a:solidFill>
-                <a:latin typeface="Arial" pitchFamily="34" charset="0"/>
-                <a:ea typeface="Arial" pitchFamily="34" charset="-122"/>
-                <a:cs typeface="Arial" pitchFamily="34" charset="-120"/>
-              </a:rPr>
-              <a:t>Volatile Markets</a:t>
-            </a:r>
-            <a:endParaRPr lang="en-US" sz="1800" dirty="0"/>
+            <a:off x="914400" y="1371600"/>
+            <a:ext cx="1371600" cy="457200"/>
+          </a:xfrm>
+          <a:prstGeom prst="rect">
+            <a:avLst/>
+          </a:prstGeom>
+          <a:noFill/>
+          <a:ln/>
+        </p:spPr>
+        <p:txBody>
+          <a:bodyPr wrap="square" lIns="0" tIns="0" rIns="0" bIns="0" rtlCol="0" anchor="ctr"/>
+          <a:lstStyle/>
+          <a:p>
+            <a:pPr marL="0" indent="0">
+              <a:buNone/>
+            </a:pPr>
+            <a:r>
+              <a:rPr lang="en-US" sz="3200" b="1" dirty="0">
+                <a:solidFill>
+                  <a:srgbClr val="00D4AA"/>
+                </a:solidFill>
+                <a:latin typeface="Arial Black" pitchFamily="34" charset="0"/>
+                <a:ea typeface="Arial Black" pitchFamily="34" charset="-122"/>
+                <a:cs typeface="Arial Black" pitchFamily="34" charset="-120"/>
+              </a:rPr>
+              <a:t>6</a:t>
+            </a:r>
+            <a:endParaRPr lang="en-US" sz="3200" dirty="0"/>
           </a:p>
         </p:txBody>
       </p:sp>
@@ -3803,24 +3230,63 @@
         </p:nvSpPr>
         <p:spPr>
           <a:xfrm>
-            <a:off x="914400" y="1691640"/>
-            <a:ext cx="7315200" cy="365760"/>
-          </a:xfrm>
-          <a:prstGeom prst="rect">
-            <a:avLst/>
-          </a:prstGeom>
-          <a:noFill/>
-          <a:ln/>
-        </p:spPr>
-        <p:txBody>
-          <a:bodyPr wrap="square" lIns="0" tIns="0" rIns="0" bIns="0" rtlCol="0" anchor="ctr"/>
-          <a:lstStyle/>
-          <a:p>
-            <a:pPr indent="0" marL="0">
-              <a:buNone/>
-            </a:pPr>
-            <a:r>
-              <a:rPr lang="en-US" sz="1300" dirty="0">
+            <a:off x="914400" y="1828800"/>
+            <a:ext cx="3200400" cy="274320"/>
+          </a:xfrm>
+          <a:prstGeom prst="rect">
+            <a:avLst/>
+          </a:prstGeom>
+          <a:noFill/>
+          <a:ln/>
+        </p:spPr>
+        <p:txBody>
+          <a:bodyPr wrap="square" lIns="0" tIns="0" rIns="0" bIns="0" rtlCol="0" anchor="ctr"/>
+          <a:lstStyle/>
+          <a:p>
+            <a:pPr marL="0" indent="0">
+              <a:buNone/>
+            </a:pPr>
+            <a:r>
+              <a:rPr lang="en-US" sz="1600" b="1" dirty="0">
+                <a:solidFill>
+                  <a:srgbClr val="FFFFFF"/>
+                </a:solidFill>
+                <a:latin typeface="Arial" pitchFamily="34" charset="0"/>
+                <a:ea typeface="Arial" pitchFamily="34" charset="-122"/>
+                <a:cs typeface="Arial" pitchFamily="34" charset="-120"/>
+              </a:rPr>
+              <a:t>Real-Time Signals</a:t>
+            </a:r>
+            <a:endParaRPr lang="en-US" sz="1600" dirty="0"/>
+          </a:p>
+        </p:txBody>
+      </p:sp>
+      <p:sp>
+        <p:nvSpPr>
+          <p:cNvPr id="6" name="Text 4"/>
+          <p:cNvSpPr/>
+          <p:nvPr/>
+        </p:nvSpPr>
+        <p:spPr>
+          <a:xfrm>
+            <a:off x="914400" y="2103120"/>
+            <a:ext cx="3200400" cy="365760"/>
+          </a:xfrm>
+          <a:prstGeom prst="rect">
+            <a:avLst/>
+          </a:prstGeom>
+          <a:noFill/>
+          <a:ln/>
+        </p:spPr>
+        <p:txBody>
+          <a:bodyPr wrap="square" lIns="0" tIns="0" rIns="0" bIns="0" rtlCol="0" anchor="ctr"/>
+          <a:lstStyle/>
+          <a:p>
+            <a:pPr marL="0" indent="0">
+              <a:buNone/>
+            </a:pPr>
+            <a:r>
+              <a:rPr lang="en-US" sz="1100" dirty="0">
                 <a:solidFill>
                   <a:srgbClr val="71717A"/>
                 </a:solidFill>
@@ -3828,26 +3294,26 @@
                 <a:ea typeface="Arial" pitchFamily="34" charset="-122"/>
                 <a:cs typeface="Arial" pitchFamily="34" charset="-120"/>
               </a:rPr>
-              <a:t>BTC swings 5-10% in a day. Retail investors get wiped out.</a:t>
-            </a:r>
-            <a:endParaRPr lang="en-US" sz="1300" dirty="0"/>
-          </a:p>
-        </p:txBody>
-      </p:sp>
-      <p:sp>
-        <p:nvSpPr>
-          <p:cNvPr id="6" name="Shape 4"/>
-          <p:cNvSpPr/>
-          <p:nvPr/>
-        </p:nvSpPr>
-        <p:spPr>
-          <a:xfrm>
-            <a:off x="640080" y="2377440"/>
-            <a:ext cx="7863840" cy="1005840"/>
+              <a:t>Polymarket, Binance order flow, ML model, technicals, sentiment, F&amp;G</a:t>
+            </a:r>
+            <a:endParaRPr lang="en-US" sz="1100" dirty="0"/>
+          </a:p>
+        </p:txBody>
+      </p:sp>
+      <p:sp>
+        <p:nvSpPr>
+          <p:cNvPr id="7" name="Shape 5"/>
+          <p:cNvSpPr/>
+          <p:nvPr/>
+        </p:nvSpPr>
+        <p:spPr>
+          <a:xfrm>
+            <a:off x="4754880" y="1188720"/>
+            <a:ext cx="3749040" cy="1463040"/>
           </a:xfrm>
           <a:prstGeom prst="roundRect">
             <a:avLst>
-              <a:gd name="adj" fmla="val 9091"/>
+              <a:gd name="adj" fmla="val 6250"/>
             </a:avLst>
           </a:prstGeom>
           <a:solidFill>
@@ -3858,69 +3324,108 @@
       </p:sp>
       <p:sp>
         <p:nvSpPr>
-          <p:cNvPr id="7" name="Text 5"/>
-          <p:cNvSpPr/>
-          <p:nvPr/>
-        </p:nvSpPr>
-        <p:spPr>
-          <a:xfrm>
-            <a:off x="914400" y="2514600"/>
-            <a:ext cx="6400800" cy="320040"/>
-          </a:xfrm>
-          <a:prstGeom prst="rect">
-            <a:avLst/>
-          </a:prstGeom>
-          <a:noFill/>
-          <a:ln/>
-        </p:spPr>
-        <p:txBody>
-          <a:bodyPr wrap="square" lIns="0" tIns="0" rIns="0" bIns="0" rtlCol="0" anchor="ctr"/>
-          <a:lstStyle/>
-          <a:p>
-            <a:pPr indent="0" marL="0">
-              <a:buNone/>
-            </a:pPr>
-            <a:r>
-              <a:rPr lang="en-US" sz="1800" b="1" dirty="0">
-                <a:solidFill>
-                  <a:srgbClr val="FF6B6B"/>
-                </a:solidFill>
-                <a:latin typeface="Arial" pitchFamily="34" charset="0"/>
-                <a:ea typeface="Arial" pitchFamily="34" charset="-122"/>
-                <a:cs typeface="Arial" pitchFamily="34" charset="-120"/>
-              </a:rPr>
-              <a:t>No Institutional Tools</a:t>
-            </a:r>
-            <a:endParaRPr lang="en-US" sz="1800" dirty="0"/>
-          </a:p>
-        </p:txBody>
-      </p:sp>
-      <p:sp>
-        <p:nvSpPr>
           <p:cNvPr id="8" name="Text 6"/>
           <p:cNvSpPr/>
           <p:nvPr/>
         </p:nvSpPr>
         <p:spPr>
           <a:xfrm>
-            <a:off x="914400" y="2880360"/>
-            <a:ext cx="7315200" cy="365760"/>
-          </a:xfrm>
-          <a:prstGeom prst="rect">
-            <a:avLst/>
-          </a:prstGeom>
-          <a:noFill/>
-          <a:ln/>
-        </p:spPr>
-        <p:txBody>
-          <a:bodyPr wrap="square" lIns="0" tIns="0" rIns="0" bIns="0" rtlCol="0" anchor="ctr"/>
-          <a:lstStyle/>
-          <a:p>
-            <a:pPr indent="0" marL="0">
-              <a:buNone/>
-            </a:pPr>
-            <a:r>
-              <a:rPr lang="en-US" sz="1300" dirty="0">
+            <a:off x="5029200" y="1371600"/>
+            <a:ext cx="1371600" cy="457200"/>
+          </a:xfrm>
+          <a:prstGeom prst="rect">
+            <a:avLst/>
+          </a:prstGeom>
+          <a:noFill/>
+          <a:ln/>
+        </p:spPr>
+        <p:txBody>
+          <a:bodyPr wrap="square" lIns="0" tIns="0" rIns="0" bIns="0" rtlCol="0" anchor="ctr"/>
+          <a:lstStyle/>
+          <a:p>
+            <a:pPr marL="0" indent="0">
+              <a:buNone/>
+            </a:pPr>
+            <a:r>
+              <a:rPr lang="en-US" sz="3200" b="1" dirty="0">
+                <a:solidFill>
+                  <a:srgbClr val="00D4AA"/>
+                </a:solidFill>
+                <a:latin typeface="Arial Black" pitchFamily="34" charset="0"/>
+                <a:ea typeface="Arial Black" pitchFamily="34" charset="-122"/>
+                <a:cs typeface="Arial Black" pitchFamily="34" charset="-120"/>
+              </a:rPr>
+              <a:t>67%</a:t>
+            </a:r>
+            <a:endParaRPr lang="en-US" sz="3200" dirty="0"/>
+          </a:p>
+        </p:txBody>
+      </p:sp>
+      <p:sp>
+        <p:nvSpPr>
+          <p:cNvPr id="9" name="Text 7"/>
+          <p:cNvSpPr/>
+          <p:nvPr/>
+        </p:nvSpPr>
+        <p:spPr>
+          <a:xfrm>
+            <a:off x="5029200" y="1828800"/>
+            <a:ext cx="3200400" cy="274320"/>
+          </a:xfrm>
+          <a:prstGeom prst="rect">
+            <a:avLst/>
+          </a:prstGeom>
+          <a:noFill/>
+          <a:ln/>
+        </p:spPr>
+        <p:txBody>
+          <a:bodyPr wrap="square" lIns="0" tIns="0" rIns="0" bIns="0" rtlCol="0" anchor="ctr"/>
+          <a:lstStyle/>
+          <a:p>
+            <a:pPr marL="0" indent="0">
+              <a:buNone/>
+            </a:pPr>
+            <a:r>
+              <a:rPr lang="en-US" sz="1600" b="1" dirty="0">
+                <a:solidFill>
+                  <a:srgbClr val="FFFFFF"/>
+                </a:solidFill>
+                <a:latin typeface="Arial" pitchFamily="34" charset="0"/>
+                <a:ea typeface="Arial" pitchFamily="34" charset="-122"/>
+                <a:cs typeface="Arial" pitchFamily="34" charset="-120"/>
+              </a:rPr>
+              <a:t>Model Accuracy</a:t>
+            </a:r>
+            <a:endParaRPr lang="en-US" sz="1600" dirty="0"/>
+          </a:p>
+        </p:txBody>
+      </p:sp>
+      <p:sp>
+        <p:nvSpPr>
+          <p:cNvPr id="10" name="Text 8"/>
+          <p:cNvSpPr/>
+          <p:nvPr/>
+        </p:nvSpPr>
+        <p:spPr>
+          <a:xfrm>
+            <a:off x="5029200" y="2103120"/>
+            <a:ext cx="3200400" cy="365760"/>
+          </a:xfrm>
+          <a:prstGeom prst="rect">
+            <a:avLst/>
+          </a:prstGeom>
+          <a:noFill/>
+          <a:ln/>
+        </p:spPr>
+        <p:txBody>
+          <a:bodyPr wrap="square" lIns="0" tIns="0" rIns="0" bIns="0" rtlCol="0" anchor="ctr"/>
+          <a:lstStyle/>
+          <a:p>
+            <a:pPr marL="0" indent="0">
+              <a:buNone/>
+            </a:pPr>
+            <a:r>
+              <a:rPr lang="en-US" sz="1100" dirty="0">
                 <a:solidFill>
                   <a:srgbClr val="71717A"/>
                 </a:solidFill>
@@ -3928,26 +3433,26 @@
                 <a:ea typeface="Arial" pitchFamily="34" charset="-122"/>
                 <a:cs typeface="Arial" pitchFamily="34" charset="-120"/>
               </a:rPr>
-              <a:t>Hedge funds use on-chain analytics, ML models. Retail has nothing.</a:t>
-            </a:r>
-            <a:endParaRPr lang="en-US" sz="1300" dirty="0"/>
-          </a:p>
-        </p:txBody>
-      </p:sp>
-      <p:sp>
-        <p:nvSpPr>
-          <p:cNvPr id="9" name="Shape 7"/>
-          <p:cNvSpPr/>
-          <p:nvPr/>
-        </p:nvSpPr>
-        <p:spPr>
-          <a:xfrm>
-            <a:off x="640080" y="3566160"/>
-            <a:ext cx="7863840" cy="1005840"/>
+              <a:t>On-chain ML model, 359 out-of-sample test days</a:t>
+            </a:r>
+            <a:endParaRPr lang="en-US" sz="1100" dirty="0"/>
+          </a:p>
+        </p:txBody>
+      </p:sp>
+      <p:sp>
+        <p:nvSpPr>
+          <p:cNvPr id="11" name="Shape 9"/>
+          <p:cNvSpPr/>
+          <p:nvPr/>
+        </p:nvSpPr>
+        <p:spPr>
+          <a:xfrm>
+            <a:off x="640080" y="2926080"/>
+            <a:ext cx="3749040" cy="1463040"/>
           </a:xfrm>
           <a:prstGeom prst="roundRect">
             <a:avLst>
-              <a:gd name="adj" fmla="val 9091"/>
+              <a:gd name="adj" fmla="val 6250"/>
             </a:avLst>
           </a:prstGeom>
           <a:solidFill>
@@ -3958,69 +3463,108 @@
       </p:sp>
       <p:sp>
         <p:nvSpPr>
-          <p:cNvPr id="10" name="Text 8"/>
-          <p:cNvSpPr/>
-          <p:nvPr/>
-        </p:nvSpPr>
-        <p:spPr>
-          <a:xfrm>
-            <a:off x="914400" y="3703320"/>
-            <a:ext cx="6400800" cy="320040"/>
-          </a:xfrm>
-          <a:prstGeom prst="rect">
-            <a:avLst/>
-          </a:prstGeom>
-          <a:noFill/>
-          <a:ln/>
-        </p:spPr>
-        <p:txBody>
-          <a:bodyPr wrap="square" lIns="0" tIns="0" rIns="0" bIns="0" rtlCol="0" anchor="ctr"/>
-          <a:lstStyle/>
-          <a:p>
-            <a:pPr indent="0" marL="0">
-              <a:buNone/>
-            </a:pPr>
-            <a:r>
-              <a:rPr lang="en-US" sz="1800" b="1" dirty="0">
-                <a:solidFill>
-                  <a:srgbClr val="FF6B6B"/>
-                </a:solidFill>
-                <a:latin typeface="Arial" pitchFamily="34" charset="0"/>
-                <a:ea typeface="Arial" pitchFamily="34" charset="-122"/>
-                <a:cs typeface="Arial" pitchFamily="34" charset="-120"/>
-              </a:rPr>
-              <a:t>Black Box Predictions</a:t>
-            </a:r>
-            <a:endParaRPr lang="en-US" sz="1800" dirty="0"/>
-          </a:p>
-        </p:txBody>
-      </p:sp>
-      <p:sp>
-        <p:nvSpPr>
-          <p:cNvPr id="11" name="Text 9"/>
-          <p:cNvSpPr/>
-          <p:nvPr/>
-        </p:nvSpPr>
-        <p:spPr>
-          <a:xfrm>
-            <a:off x="914400" y="4069080"/>
-            <a:ext cx="7315200" cy="365760"/>
-          </a:xfrm>
-          <a:prstGeom prst="rect">
-            <a:avLst/>
-          </a:prstGeom>
-          <a:noFill/>
-          <a:ln/>
-        </p:spPr>
-        <p:txBody>
-          <a:bodyPr wrap="square" lIns="0" tIns="0" rIns="0" bIns="0" rtlCol="0" anchor="ctr"/>
-          <a:lstStyle/>
-          <a:p>
-            <a:pPr indent="0" marL="0">
-              <a:buNone/>
-            </a:pPr>
-            <a:r>
-              <a:rPr lang="en-US" sz="1300" dirty="0">
+          <p:cNvPr id="12" name="Text 10"/>
+          <p:cNvSpPr/>
+          <p:nvPr/>
+        </p:nvSpPr>
+        <p:spPr>
+          <a:xfrm>
+            <a:off x="914400" y="3108960"/>
+            <a:ext cx="1371600" cy="457200"/>
+          </a:xfrm>
+          <a:prstGeom prst="rect">
+            <a:avLst/>
+          </a:prstGeom>
+          <a:noFill/>
+          <a:ln/>
+        </p:spPr>
+        <p:txBody>
+          <a:bodyPr wrap="square" lIns="0" tIns="0" rIns="0" bIns="0" rtlCol="0" anchor="ctr"/>
+          <a:lstStyle/>
+          <a:p>
+            <a:pPr marL="0" indent="0">
+              <a:buNone/>
+            </a:pPr>
+            <a:r>
+              <a:rPr lang="en-US" sz="3200" b="1" dirty="0">
+                <a:solidFill>
+                  <a:srgbClr val="00D4AA"/>
+                </a:solidFill>
+                <a:latin typeface="Arial Black" pitchFamily="34" charset="0"/>
+                <a:ea typeface="Arial Black" pitchFamily="34" charset="-122"/>
+                <a:cs typeface="Arial Black" pitchFamily="34" charset="-120"/>
+              </a:rPr>
+              <a:t>30s</a:t>
+            </a:r>
+            <a:endParaRPr lang="en-US" sz="3200" dirty="0"/>
+          </a:p>
+        </p:txBody>
+      </p:sp>
+      <p:sp>
+        <p:nvSpPr>
+          <p:cNvPr id="13" name="Text 11"/>
+          <p:cNvSpPr/>
+          <p:nvPr/>
+        </p:nvSpPr>
+        <p:spPr>
+          <a:xfrm>
+            <a:off x="914400" y="3566160"/>
+            <a:ext cx="3200400" cy="274320"/>
+          </a:xfrm>
+          <a:prstGeom prst="rect">
+            <a:avLst/>
+          </a:prstGeom>
+          <a:noFill/>
+          <a:ln/>
+        </p:spPr>
+        <p:txBody>
+          <a:bodyPr wrap="square" lIns="0" tIns="0" rIns="0" bIns="0" rtlCol="0" anchor="ctr"/>
+          <a:lstStyle/>
+          <a:p>
+            <a:pPr marL="0" indent="0">
+              <a:buNone/>
+            </a:pPr>
+            <a:r>
+              <a:rPr lang="en-US" sz="1600" b="1" dirty="0">
+                <a:solidFill>
+                  <a:srgbClr val="FFFFFF"/>
+                </a:solidFill>
+                <a:latin typeface="Arial" pitchFamily="34" charset="0"/>
+                <a:ea typeface="Arial" pitchFamily="34" charset="-122"/>
+                <a:cs typeface="Arial" pitchFamily="34" charset="-120"/>
+              </a:rPr>
+              <a:t>Refresh Rate</a:t>
+            </a:r>
+            <a:endParaRPr lang="en-US" sz="1600" dirty="0"/>
+          </a:p>
+        </p:txBody>
+      </p:sp>
+      <p:sp>
+        <p:nvSpPr>
+          <p:cNvPr id="14" name="Text 12"/>
+          <p:cNvSpPr/>
+          <p:nvPr/>
+        </p:nvSpPr>
+        <p:spPr>
+          <a:xfrm>
+            <a:off x="914400" y="3840480"/>
+            <a:ext cx="3200400" cy="365760"/>
+          </a:xfrm>
+          <a:prstGeom prst="rect">
+            <a:avLst/>
+          </a:prstGeom>
+          <a:noFill/>
+          <a:ln/>
+        </p:spPr>
+        <p:txBody>
+          <a:bodyPr wrap="square" lIns="0" tIns="0" rIns="0" bIns="0" rtlCol="0" anchor="ctr"/>
+          <a:lstStyle/>
+          <a:p>
+            <a:pPr marL="0" indent="0">
+              <a:buNone/>
+            </a:pPr>
+            <a:r>
+              <a:rPr lang="en-US" sz="1100" dirty="0">
                 <a:solidFill>
                   <a:srgbClr val="71717A"/>
                 </a:solidFill>
@@ -4028,9 +3572,148 @@
                 <a:ea typeface="Arial" pitchFamily="34" charset="-122"/>
                 <a:cs typeface="Arial" pitchFamily="34" charset="-120"/>
               </a:rPr>
-              <a:t>Existing tools show a number with no reasoning. No transparency.</a:t>
-            </a:r>
-            <a:endParaRPr lang="en-US" sz="1300" dirty="0"/>
+              <a:t>Every signal updates every 30 seconds</a:t>
+            </a:r>
+            <a:endParaRPr lang="en-US" sz="1100" dirty="0"/>
+          </a:p>
+        </p:txBody>
+      </p:sp>
+      <p:sp>
+        <p:nvSpPr>
+          <p:cNvPr id="15" name="Shape 13"/>
+          <p:cNvSpPr/>
+          <p:nvPr/>
+        </p:nvSpPr>
+        <p:spPr>
+          <a:xfrm>
+            <a:off x="4754880" y="2926080"/>
+            <a:ext cx="3749040" cy="1463040"/>
+          </a:xfrm>
+          <a:prstGeom prst="roundRect">
+            <a:avLst>
+              <a:gd name="adj" fmla="val 6250"/>
+            </a:avLst>
+          </a:prstGeom>
+          <a:solidFill>
+            <a:srgbClr val="13131A"/>
+          </a:solidFill>
+          <a:ln/>
+        </p:spPr>
+      </p:sp>
+      <p:sp>
+        <p:nvSpPr>
+          <p:cNvPr id="16" name="Text 14"/>
+          <p:cNvSpPr/>
+          <p:nvPr/>
+        </p:nvSpPr>
+        <p:spPr>
+          <a:xfrm>
+            <a:off x="5029200" y="3108960"/>
+            <a:ext cx="1371600" cy="457200"/>
+          </a:xfrm>
+          <a:prstGeom prst="rect">
+            <a:avLst/>
+          </a:prstGeom>
+          <a:noFill/>
+          <a:ln/>
+        </p:spPr>
+        <p:txBody>
+          <a:bodyPr wrap="square" lIns="0" tIns="0" rIns="0" bIns="0" rtlCol="0" anchor="ctr"/>
+          <a:lstStyle/>
+          <a:p>
+            <a:pPr marL="0" indent="0">
+              <a:buNone/>
+            </a:pPr>
+            <a:r>
+              <a:rPr lang="en-US" sz="3200" b="1" dirty="0">
+                <a:solidFill>
+                  <a:srgbClr val="00D4AA"/>
+                </a:solidFill>
+                <a:latin typeface="Arial Black" pitchFamily="34" charset="0"/>
+                <a:ea typeface="Arial Black" pitchFamily="34" charset="-122"/>
+                <a:cs typeface="Arial Black" pitchFamily="34" charset="-120"/>
+              </a:rPr>
+              <a:t>0</a:t>
+            </a:r>
+            <a:endParaRPr lang="en-US" sz="3200" dirty="0"/>
+          </a:p>
+        </p:txBody>
+      </p:sp>
+      <p:sp>
+        <p:nvSpPr>
+          <p:cNvPr id="17" name="Text 15"/>
+          <p:cNvSpPr/>
+          <p:nvPr/>
+        </p:nvSpPr>
+        <p:spPr>
+          <a:xfrm>
+            <a:off x="5029200" y="3566160"/>
+            <a:ext cx="3200400" cy="274320"/>
+          </a:xfrm>
+          <a:prstGeom prst="rect">
+            <a:avLst/>
+          </a:prstGeom>
+          <a:noFill/>
+          <a:ln/>
+        </p:spPr>
+        <p:txBody>
+          <a:bodyPr wrap="square" lIns="0" tIns="0" rIns="0" bIns="0" rtlCol="0" anchor="ctr"/>
+          <a:lstStyle/>
+          <a:p>
+            <a:pPr marL="0" indent="0">
+              <a:buNone/>
+            </a:pPr>
+            <a:r>
+              <a:rPr lang="en-US" sz="1600" b="1" dirty="0">
+                <a:solidFill>
+                  <a:srgbClr val="FFFFFF"/>
+                </a:solidFill>
+                <a:latin typeface="Arial" pitchFamily="34" charset="0"/>
+                <a:ea typeface="Arial" pitchFamily="34" charset="-122"/>
+                <a:cs typeface="Arial" pitchFamily="34" charset="-120"/>
+              </a:rPr>
+              <a:t>Black Boxes</a:t>
+            </a:r>
+            <a:endParaRPr lang="en-US" sz="1600" dirty="0"/>
+          </a:p>
+        </p:txBody>
+      </p:sp>
+      <p:sp>
+        <p:nvSpPr>
+          <p:cNvPr id="18" name="Text 16"/>
+          <p:cNvSpPr/>
+          <p:nvPr/>
+        </p:nvSpPr>
+        <p:spPr>
+          <a:xfrm>
+            <a:off x="5029200" y="3840480"/>
+            <a:ext cx="3200400" cy="365760"/>
+          </a:xfrm>
+          <a:prstGeom prst="rect">
+            <a:avLst/>
+          </a:prstGeom>
+          <a:noFill/>
+          <a:ln/>
+        </p:spPr>
+        <p:txBody>
+          <a:bodyPr wrap="square" lIns="0" tIns="0" rIns="0" bIns="0" rtlCol="0" anchor="ctr"/>
+          <a:lstStyle/>
+          <a:p>
+            <a:pPr marL="0" indent="0">
+              <a:buNone/>
+            </a:pPr>
+            <a:r>
+              <a:rPr lang="en-US" sz="1100" dirty="0">
+                <a:solidFill>
+                  <a:srgbClr val="71717A"/>
+                </a:solidFill>
+                <a:latin typeface="Arial" pitchFamily="34" charset="0"/>
+                <a:ea typeface="Arial" pitchFamily="34" charset="-122"/>
+                <a:cs typeface="Arial" pitchFamily="34" charset="-120"/>
+              </a:rPr>
+              <a:t>Every signal shows its reasoning under BUY/SELL</a:t>
+            </a:r>
+            <a:endParaRPr lang="en-US" sz="1100" dirty="0"/>
           </a:p>
         </p:txBody>
       </p:sp>
@@ -4042,14 +3725,15 @@
 </p:sld>
 </file>
 
-<file path=ppt/slides/slide3.xml><?xml version="1.0" encoding="utf-8"?>
+<file path=ppt/slides/slide4.xml><?xml version="1.0" encoding="utf-8"?>
 <p:sld xmlns:a="http://schemas.openxmlformats.org/drawingml/2006/main" xmlns:r="http://schemas.openxmlformats.org/officeDocument/2006/relationships" xmlns:p="http://schemas.openxmlformats.org/presentationml/2006/main">
-  <p:cSld name="Slide 3">
+  <p:cSld name="Slide 4">
     <p:bg>
       <p:bgPr>
         <a:solidFill>
           <a:srgbClr val="0A0A0F"/>
         </a:solidFill>
+        <a:effectLst/>
       </p:bgPr>
     </p:bg>
     <p:spTree>
@@ -4087,7 +3771,7 @@
           <a:bodyPr wrap="square" lIns="0" tIns="0" rIns="0" bIns="0" rtlCol="0" anchor="ctr"/>
           <a:lstStyle/>
           <a:p>
-            <a:pPr indent="0" marL="0">
+            <a:pPr marL="0" indent="0">
               <a:buNone/>
             </a:pPr>
             <a:r>
@@ -4099,7 +3783,7 @@
                 <a:ea typeface="Arial Black" pitchFamily="34" charset="-122"/>
                 <a:cs typeface="Arial Black" pitchFamily="34" charset="-120"/>
               </a:rPr>
-              <a:t>Our Solution</a:t>
+              <a:t>The 6 Signals</a:t>
             </a:r>
             <a:endParaRPr lang="en-US" sz="3600" dirty="0"/>
           </a:p>
@@ -4113,16 +3797,16 @@
         </p:nvSpPr>
         <p:spPr>
           <a:xfrm>
-            <a:off x="640080" y="1188720"/>
-            <a:ext cx="3749040" cy="1463040"/>
+            <a:off x="640080" y="1097280"/>
+            <a:ext cx="7863840" cy="365760"/>
           </a:xfrm>
           <a:prstGeom prst="roundRect">
             <a:avLst>
-              <a:gd name="adj" fmla="val 6250"/>
+              <a:gd name="adj" fmla="val 12500"/>
             </a:avLst>
           </a:prstGeom>
           <a:solidFill>
-            <a:srgbClr val="13131A"/>
+            <a:srgbClr val="1E1E2E"/>
           </a:solidFill>
           <a:ln/>
         </p:spPr>
@@ -4135,63 +3819,298 @@
         </p:nvSpPr>
         <p:spPr>
           <a:xfrm>
-            <a:off x="914400" y="1371600"/>
-            <a:ext cx="1371600" cy="457200"/>
-          </a:xfrm>
-          <a:prstGeom prst="rect">
-            <a:avLst/>
-          </a:prstGeom>
-          <a:noFill/>
-          <a:ln/>
-        </p:spPr>
-        <p:txBody>
-          <a:bodyPr wrap="square" lIns="0" tIns="0" rIns="0" bIns="0" rtlCol="0" anchor="ctr"/>
-          <a:lstStyle/>
-          <a:p>
-            <a:pPr indent="0" marL="0">
-              <a:buNone/>
-            </a:pPr>
-            <a:r>
-              <a:rPr lang="en-US" sz="3200" b="1" dirty="0">
+            <a:off x="822960" y="1115568"/>
+            <a:ext cx="2286000" cy="320040"/>
+          </a:xfrm>
+          <a:prstGeom prst="rect">
+            <a:avLst/>
+          </a:prstGeom>
+          <a:noFill/>
+          <a:ln/>
+        </p:spPr>
+        <p:txBody>
+          <a:bodyPr wrap="square" lIns="0" tIns="0" rIns="0" bIns="0" rtlCol="0" anchor="ctr"/>
+          <a:lstStyle/>
+          <a:p>
+            <a:pPr marL="0" indent="0">
+              <a:buNone/>
+            </a:pPr>
+            <a:r>
+              <a:rPr lang="en-US" sz="1100" b="1" dirty="0">
+                <a:solidFill>
+                  <a:srgbClr val="71717A"/>
+                </a:solidFill>
+                <a:latin typeface="Arial" pitchFamily="34" charset="0"/>
+                <a:ea typeface="Arial" pitchFamily="34" charset="-122"/>
+                <a:cs typeface="Arial" pitchFamily="34" charset="-120"/>
+              </a:rPr>
+              <a:t>Signal</a:t>
+            </a:r>
+            <a:endParaRPr lang="en-US" sz="1100" dirty="0"/>
+          </a:p>
+        </p:txBody>
+      </p:sp>
+      <p:sp>
+        <p:nvSpPr>
+          <p:cNvPr id="5" name="Text 3"/>
+          <p:cNvSpPr/>
+          <p:nvPr/>
+        </p:nvSpPr>
+        <p:spPr>
+          <a:xfrm>
+            <a:off x="3200400" y="1115568"/>
+            <a:ext cx="914400" cy="320040"/>
+          </a:xfrm>
+          <a:prstGeom prst="rect">
+            <a:avLst/>
+          </a:prstGeom>
+          <a:noFill/>
+          <a:ln/>
+        </p:spPr>
+        <p:txBody>
+          <a:bodyPr wrap="square" lIns="0" tIns="0" rIns="0" bIns="0" rtlCol="0" anchor="ctr"/>
+          <a:lstStyle/>
+          <a:p>
+            <a:pPr marL="0" indent="0">
+              <a:buNone/>
+            </a:pPr>
+            <a:r>
+              <a:rPr lang="en-US" sz="1100" b="1" dirty="0">
+                <a:solidFill>
+                  <a:srgbClr val="71717A"/>
+                </a:solidFill>
+                <a:latin typeface="Arial" pitchFamily="34" charset="0"/>
+                <a:ea typeface="Arial" pitchFamily="34" charset="-122"/>
+                <a:cs typeface="Arial" pitchFamily="34" charset="-120"/>
+              </a:rPr>
+              <a:t>Weight</a:t>
+            </a:r>
+            <a:endParaRPr lang="en-US" sz="1100" dirty="0"/>
+          </a:p>
+        </p:txBody>
+      </p:sp>
+      <p:sp>
+        <p:nvSpPr>
+          <p:cNvPr id="6" name="Text 4"/>
+          <p:cNvSpPr/>
+          <p:nvPr/>
+        </p:nvSpPr>
+        <p:spPr>
+          <a:xfrm>
+            <a:off x="4572000" y="1115568"/>
+            <a:ext cx="2743200" cy="320040"/>
+          </a:xfrm>
+          <a:prstGeom prst="rect">
+            <a:avLst/>
+          </a:prstGeom>
+          <a:noFill/>
+          <a:ln/>
+        </p:spPr>
+        <p:txBody>
+          <a:bodyPr wrap="square" lIns="0" tIns="0" rIns="0" bIns="0" rtlCol="0" anchor="ctr"/>
+          <a:lstStyle/>
+          <a:p>
+            <a:pPr marL="0" indent="0">
+              <a:buNone/>
+            </a:pPr>
+            <a:r>
+              <a:rPr lang="en-US" sz="1100" b="1" dirty="0">
+                <a:solidFill>
+                  <a:srgbClr val="71717A"/>
+                </a:solidFill>
+                <a:latin typeface="Arial" pitchFamily="34" charset="0"/>
+                <a:ea typeface="Arial" pitchFamily="34" charset="-122"/>
+                <a:cs typeface="Arial" pitchFamily="34" charset="-120"/>
+              </a:rPr>
+              <a:t>Source</a:t>
+            </a:r>
+            <a:endParaRPr lang="en-US" sz="1100" dirty="0"/>
+          </a:p>
+        </p:txBody>
+      </p:sp>
+      <p:sp>
+        <p:nvSpPr>
+          <p:cNvPr id="7" name="Shape 5"/>
+          <p:cNvSpPr/>
+          <p:nvPr/>
+        </p:nvSpPr>
+        <p:spPr>
+          <a:xfrm>
+            <a:off x="822960" y="1645920"/>
+            <a:ext cx="164592" cy="164592"/>
+          </a:xfrm>
+          <a:prstGeom prst="ellipse">
+            <a:avLst/>
+          </a:prstGeom>
+          <a:solidFill>
+            <a:srgbClr val="4DABF7"/>
+          </a:solidFill>
+          <a:ln/>
+        </p:spPr>
+      </p:sp>
+      <p:sp>
+        <p:nvSpPr>
+          <p:cNvPr id="8" name="Text 6"/>
+          <p:cNvSpPr/>
+          <p:nvPr/>
+        </p:nvSpPr>
+        <p:spPr>
+          <a:xfrm>
+            <a:off x="1143000" y="1554480"/>
+            <a:ext cx="1828800" cy="365760"/>
+          </a:xfrm>
+          <a:prstGeom prst="rect">
+            <a:avLst/>
+          </a:prstGeom>
+          <a:noFill/>
+          <a:ln/>
+        </p:spPr>
+        <p:txBody>
+          <a:bodyPr wrap="square" lIns="0" tIns="0" rIns="0" bIns="0" rtlCol="0" anchor="ctr"/>
+          <a:lstStyle/>
+          <a:p>
+            <a:pPr marL="0" indent="0">
+              <a:buNone/>
+            </a:pPr>
+            <a:r>
+              <a:rPr lang="en-US" sz="1400" b="1" dirty="0">
+                <a:solidFill>
+                  <a:srgbClr val="FFFFFF"/>
+                </a:solidFill>
+                <a:latin typeface="Arial" pitchFamily="34" charset="0"/>
+                <a:ea typeface="Arial" pitchFamily="34" charset="-122"/>
+                <a:cs typeface="Arial" pitchFamily="34" charset="-120"/>
+              </a:rPr>
+              <a:t>Polymarket</a:t>
+            </a:r>
+            <a:endParaRPr lang="en-US" sz="1400" dirty="0"/>
+          </a:p>
+        </p:txBody>
+      </p:sp>
+      <p:sp>
+        <p:nvSpPr>
+          <p:cNvPr id="9" name="Text 7"/>
+          <p:cNvSpPr/>
+          <p:nvPr/>
+        </p:nvSpPr>
+        <p:spPr>
+          <a:xfrm>
+            <a:off x="3200400" y="1554480"/>
+            <a:ext cx="914400" cy="365760"/>
+          </a:xfrm>
+          <a:prstGeom prst="rect">
+            <a:avLst/>
+          </a:prstGeom>
+          <a:noFill/>
+          <a:ln/>
+        </p:spPr>
+        <p:txBody>
+          <a:bodyPr wrap="square" lIns="0" tIns="0" rIns="0" bIns="0" rtlCol="0" anchor="ctr"/>
+          <a:lstStyle/>
+          <a:p>
+            <a:pPr marL="0" indent="0">
+              <a:buNone/>
+            </a:pPr>
+            <a:r>
+              <a:rPr lang="en-US" sz="1400" b="1" dirty="0">
                 <a:solidFill>
                   <a:srgbClr val="00D4AA"/>
                 </a:solidFill>
-                <a:latin typeface="Arial Black" pitchFamily="34" charset="0"/>
-                <a:ea typeface="Arial Black" pitchFamily="34" charset="-122"/>
-                <a:cs typeface="Arial Black" pitchFamily="34" charset="-120"/>
-              </a:rPr>
-              <a:t>6</a:t>
-            </a:r>
-            <a:endParaRPr lang="en-US" sz="3200" dirty="0"/>
-          </a:p>
-        </p:txBody>
-      </p:sp>
-      <p:sp>
-        <p:nvSpPr>
-          <p:cNvPr id="5" name="Text 3"/>
-          <p:cNvSpPr/>
-          <p:nvPr/>
-        </p:nvSpPr>
-        <p:spPr>
-          <a:xfrm>
-            <a:off x="914400" y="1828800"/>
-            <a:ext cx="3200400" cy="274320"/>
-          </a:xfrm>
-          <a:prstGeom prst="rect">
-            <a:avLst/>
-          </a:prstGeom>
-          <a:noFill/>
-          <a:ln/>
-        </p:spPr>
-        <p:txBody>
-          <a:bodyPr wrap="square" lIns="0" tIns="0" rIns="0" bIns="0" rtlCol="0" anchor="ctr"/>
-          <a:lstStyle/>
-          <a:p>
-            <a:pPr indent="0" marL="0">
-              <a:buNone/>
-            </a:pPr>
-            <a:r>
-              <a:rPr lang="en-US" sz="1600" b="1" dirty="0">
+                <a:latin typeface="Arial" pitchFamily="34" charset="0"/>
+                <a:ea typeface="Arial" pitchFamily="34" charset="-122"/>
+                <a:cs typeface="Arial" pitchFamily="34" charset="-120"/>
+              </a:rPr>
+              <a:t>20%</a:t>
+            </a:r>
+            <a:endParaRPr lang="en-US" sz="1400" dirty="0"/>
+          </a:p>
+        </p:txBody>
+      </p:sp>
+      <p:sp>
+        <p:nvSpPr>
+          <p:cNvPr id="10" name="Text 8"/>
+          <p:cNvSpPr/>
+          <p:nvPr/>
+        </p:nvSpPr>
+        <p:spPr>
+          <a:xfrm>
+            <a:off x="4572000" y="1554480"/>
+            <a:ext cx="3200400" cy="365760"/>
+          </a:xfrm>
+          <a:prstGeom prst="rect">
+            <a:avLst/>
+          </a:prstGeom>
+          <a:noFill/>
+          <a:ln/>
+        </p:spPr>
+        <p:txBody>
+          <a:bodyPr wrap="square" lIns="0" tIns="0" rIns="0" bIns="0" rtlCol="0" anchor="ctr"/>
+          <a:lstStyle/>
+          <a:p>
+            <a:pPr marL="0" indent="0">
+              <a:buNone/>
+            </a:pPr>
+            <a:r>
+              <a:rPr lang="en-US" sz="1200" dirty="0">
+                <a:solidFill>
+                  <a:srgbClr val="E4E4E7"/>
+                </a:solidFill>
+                <a:latin typeface="Arial" pitchFamily="34" charset="0"/>
+                <a:ea typeface="Arial" pitchFamily="34" charset="-122"/>
+                <a:cs typeface="Arial" pitchFamily="34" charset="-120"/>
+              </a:rPr>
+              <a:t>Gamma API</a:t>
+            </a:r>
+            <a:endParaRPr lang="en-US" sz="1200" dirty="0"/>
+          </a:p>
+        </p:txBody>
+      </p:sp>
+      <p:sp>
+        <p:nvSpPr>
+          <p:cNvPr id="11" name="Shape 9"/>
+          <p:cNvSpPr/>
+          <p:nvPr/>
+        </p:nvSpPr>
+        <p:spPr>
+          <a:xfrm>
+            <a:off x="822960" y="2148840"/>
+            <a:ext cx="164592" cy="164592"/>
+          </a:xfrm>
+          <a:prstGeom prst="ellipse">
+            <a:avLst/>
+          </a:prstGeom>
+          <a:solidFill>
+            <a:srgbClr val="6C5CE7"/>
+          </a:solidFill>
+          <a:ln/>
+        </p:spPr>
+      </p:sp>
+      <p:sp>
+        <p:nvSpPr>
+          <p:cNvPr id="12" name="Text 10"/>
+          <p:cNvSpPr/>
+          <p:nvPr/>
+        </p:nvSpPr>
+        <p:spPr>
+          <a:xfrm>
+            <a:off x="1143000" y="2057400"/>
+            <a:ext cx="1828800" cy="365760"/>
+          </a:xfrm>
+          <a:prstGeom prst="rect">
+            <a:avLst/>
+          </a:prstGeom>
+          <a:noFill/>
+          <a:ln/>
+        </p:spPr>
+        <p:txBody>
+          <a:bodyPr wrap="square" lIns="0" tIns="0" rIns="0" bIns="0" rtlCol="0" anchor="ctr"/>
+          <a:lstStyle/>
+          <a:p>
+            <a:pPr marL="0" indent="0">
+              <a:buNone/>
+            </a:pPr>
+            <a:r>
+              <a:rPr lang="en-US" sz="1400" b="1" dirty="0">
                 <a:solidFill>
                   <a:srgbClr val="FFFFFF"/>
                 </a:solidFill>
@@ -4199,21 +4118,60 @@
                 <a:ea typeface="Arial" pitchFamily="34" charset="-122"/>
                 <a:cs typeface="Arial" pitchFamily="34" charset="-120"/>
               </a:rPr>
-              <a:t>Real-Time Signals</a:t>
-            </a:r>
-            <a:endParaRPr lang="en-US" sz="1600" dirty="0"/>
-          </a:p>
-        </p:txBody>
-      </p:sp>
-      <p:sp>
-        <p:nvSpPr>
-          <p:cNvPr id="6" name="Text 4"/>
-          <p:cNvSpPr/>
-          <p:nvPr/>
-        </p:nvSpPr>
-        <p:spPr>
-          <a:xfrm>
-            <a:off x="914400" y="2103120"/>
+              <a:t>Order Flow</a:t>
+            </a:r>
+            <a:endParaRPr lang="en-US" sz="1400" dirty="0"/>
+          </a:p>
+        </p:txBody>
+      </p:sp>
+      <p:sp>
+        <p:nvSpPr>
+          <p:cNvPr id="13" name="Text 11"/>
+          <p:cNvSpPr/>
+          <p:nvPr/>
+        </p:nvSpPr>
+        <p:spPr>
+          <a:xfrm>
+            <a:off x="3200400" y="2057400"/>
+            <a:ext cx="914400" cy="365760"/>
+          </a:xfrm>
+          <a:prstGeom prst="rect">
+            <a:avLst/>
+          </a:prstGeom>
+          <a:noFill/>
+          <a:ln/>
+        </p:spPr>
+        <p:txBody>
+          <a:bodyPr wrap="square" lIns="0" tIns="0" rIns="0" bIns="0" rtlCol="0" anchor="ctr"/>
+          <a:lstStyle/>
+          <a:p>
+            <a:pPr marL="0" indent="0">
+              <a:buNone/>
+            </a:pPr>
+            <a:r>
+              <a:rPr lang="en-US" sz="1400" b="1" dirty="0">
+                <a:solidFill>
+                  <a:srgbClr val="00D4AA"/>
+                </a:solidFill>
+                <a:latin typeface="Arial" pitchFamily="34" charset="0"/>
+                <a:ea typeface="Arial" pitchFamily="34" charset="-122"/>
+                <a:cs typeface="Arial" pitchFamily="34" charset="-120"/>
+              </a:rPr>
+              <a:t>15%</a:t>
+            </a:r>
+            <a:endParaRPr lang="en-US" sz="1400" dirty="0"/>
+          </a:p>
+        </p:txBody>
+      </p:sp>
+      <p:sp>
+        <p:nvSpPr>
+          <p:cNvPr id="14" name="Text 12"/>
+          <p:cNvSpPr/>
+          <p:nvPr/>
+        </p:nvSpPr>
+        <p:spPr>
+          <a:xfrm>
+            <a:off x="4572000" y="2057400"/>
             <a:ext cx="3200400" cy="365760"/>
           </a:xfrm>
           <a:prstGeom prst="rect">
@@ -4226,111 +4184,207 @@
           <a:bodyPr wrap="square" lIns="0" tIns="0" rIns="0" bIns="0" rtlCol="0" anchor="ctr"/>
           <a:lstStyle/>
           <a:p>
-            <a:pPr indent="0" marL="0">
-              <a:buNone/>
-            </a:pPr>
-            <a:r>
-              <a:rPr lang="en-US" sz="1100" dirty="0">
-                <a:solidFill>
-                  <a:srgbClr val="71717A"/>
-                </a:solidFill>
-                <a:latin typeface="Arial" pitchFamily="34" charset="0"/>
-                <a:ea typeface="Arial" pitchFamily="34" charset="-122"/>
-                <a:cs typeface="Arial" pitchFamily="34" charset="-120"/>
-              </a:rPr>
-              <a:t>Polymarket, Binance order flow, ML model, technicals, sentiment, F&amp;G</a:t>
-            </a:r>
-            <a:endParaRPr lang="en-US" sz="1100" dirty="0"/>
-          </a:p>
-        </p:txBody>
-      </p:sp>
-      <p:sp>
-        <p:nvSpPr>
-          <p:cNvPr id="7" name="Shape 5"/>
-          <p:cNvSpPr/>
-          <p:nvPr/>
-        </p:nvSpPr>
-        <p:spPr>
-          <a:xfrm>
-            <a:off x="4754880" y="1188720"/>
-            <a:ext cx="3749040" cy="1463040"/>
-          </a:xfrm>
-          <a:prstGeom prst="roundRect">
-            <a:avLst>
-              <a:gd name="adj" fmla="val 6250"/>
-            </a:avLst>
+            <a:pPr marL="0" indent="0">
+              <a:buNone/>
+            </a:pPr>
+            <a:r>
+              <a:rPr lang="en-US" sz="1200" dirty="0">
+                <a:solidFill>
+                  <a:srgbClr val="E4E4E7"/>
+                </a:solidFill>
+                <a:latin typeface="Arial" pitchFamily="34" charset="0"/>
+                <a:ea typeface="Arial" pitchFamily="34" charset="-122"/>
+                <a:cs typeface="Arial" pitchFamily="34" charset="-120"/>
+              </a:rPr>
+              <a:t>Binance.US + Coinbase</a:t>
+            </a:r>
+            <a:endParaRPr lang="en-US" sz="1200" dirty="0"/>
+          </a:p>
+        </p:txBody>
+      </p:sp>
+      <p:sp>
+        <p:nvSpPr>
+          <p:cNvPr id="15" name="Shape 13"/>
+          <p:cNvSpPr/>
+          <p:nvPr/>
+        </p:nvSpPr>
+        <p:spPr>
+          <a:xfrm>
+            <a:off x="822960" y="2651760"/>
+            <a:ext cx="164592" cy="164592"/>
+          </a:xfrm>
+          <a:prstGeom prst="ellipse">
+            <a:avLst/>
           </a:prstGeom>
           <a:solidFill>
-            <a:srgbClr val="13131A"/>
+            <a:srgbClr val="00D4AA"/>
           </a:solidFill>
           <a:ln/>
         </p:spPr>
       </p:sp>
       <p:sp>
         <p:nvSpPr>
-          <p:cNvPr id="8" name="Text 6"/>
-          <p:cNvSpPr/>
-          <p:nvPr/>
-        </p:nvSpPr>
-        <p:spPr>
-          <a:xfrm>
-            <a:off x="5029200" y="1371600"/>
-            <a:ext cx="1371600" cy="457200"/>
-          </a:xfrm>
-          <a:prstGeom prst="rect">
-            <a:avLst/>
-          </a:prstGeom>
-          <a:noFill/>
-          <a:ln/>
-        </p:spPr>
-        <p:txBody>
-          <a:bodyPr wrap="square" lIns="0" tIns="0" rIns="0" bIns="0" rtlCol="0" anchor="ctr"/>
-          <a:lstStyle/>
-          <a:p>
-            <a:pPr indent="0" marL="0">
-              <a:buNone/>
-            </a:pPr>
-            <a:r>
-              <a:rPr lang="en-US" sz="3200" b="1" dirty="0">
+          <p:cNvPr id="16" name="Text 14"/>
+          <p:cNvSpPr/>
+          <p:nvPr/>
+        </p:nvSpPr>
+        <p:spPr>
+          <a:xfrm>
+            <a:off x="1143000" y="2560320"/>
+            <a:ext cx="1828800" cy="365760"/>
+          </a:xfrm>
+          <a:prstGeom prst="rect">
+            <a:avLst/>
+          </a:prstGeom>
+          <a:noFill/>
+          <a:ln/>
+        </p:spPr>
+        <p:txBody>
+          <a:bodyPr wrap="square" lIns="0" tIns="0" rIns="0" bIns="0" rtlCol="0" anchor="ctr"/>
+          <a:lstStyle/>
+          <a:p>
+            <a:pPr marL="0" indent="0">
+              <a:buNone/>
+            </a:pPr>
+            <a:r>
+              <a:rPr lang="en-US" sz="1400" b="1" dirty="0">
+                <a:solidFill>
+                  <a:srgbClr val="FFFFFF"/>
+                </a:solidFill>
+                <a:latin typeface="Arial" pitchFamily="34" charset="0"/>
+                <a:ea typeface="Arial" pitchFamily="34" charset="-122"/>
+                <a:cs typeface="Arial" pitchFamily="34" charset="-120"/>
+              </a:rPr>
+              <a:t>Our Model</a:t>
+            </a:r>
+            <a:endParaRPr lang="en-US" sz="1400" dirty="0"/>
+          </a:p>
+        </p:txBody>
+      </p:sp>
+      <p:sp>
+        <p:nvSpPr>
+          <p:cNvPr id="17" name="Text 15"/>
+          <p:cNvSpPr/>
+          <p:nvPr/>
+        </p:nvSpPr>
+        <p:spPr>
+          <a:xfrm>
+            <a:off x="3200400" y="2560320"/>
+            <a:ext cx="914400" cy="365760"/>
+          </a:xfrm>
+          <a:prstGeom prst="rect">
+            <a:avLst/>
+          </a:prstGeom>
+          <a:noFill/>
+          <a:ln/>
+        </p:spPr>
+        <p:txBody>
+          <a:bodyPr wrap="square" lIns="0" tIns="0" rIns="0" bIns="0" rtlCol="0" anchor="ctr"/>
+          <a:lstStyle/>
+          <a:p>
+            <a:pPr marL="0" indent="0">
+              <a:buNone/>
+            </a:pPr>
+            <a:r>
+              <a:rPr lang="en-US" sz="1400" b="1" dirty="0">
                 <a:solidFill>
                   <a:srgbClr val="00D4AA"/>
                 </a:solidFill>
-                <a:latin typeface="Arial Black" pitchFamily="34" charset="0"/>
-                <a:ea typeface="Arial Black" pitchFamily="34" charset="-122"/>
-                <a:cs typeface="Arial Black" pitchFamily="34" charset="-120"/>
-              </a:rPr>
-              <a:t>67%</a:t>
-            </a:r>
-            <a:endParaRPr lang="en-US" sz="3200" dirty="0"/>
-          </a:p>
-        </p:txBody>
-      </p:sp>
-      <p:sp>
-        <p:nvSpPr>
-          <p:cNvPr id="9" name="Text 7"/>
-          <p:cNvSpPr/>
-          <p:nvPr/>
-        </p:nvSpPr>
-        <p:spPr>
-          <a:xfrm>
-            <a:off x="5029200" y="1828800"/>
-            <a:ext cx="3200400" cy="274320"/>
-          </a:xfrm>
-          <a:prstGeom prst="rect">
-            <a:avLst/>
-          </a:prstGeom>
-          <a:noFill/>
-          <a:ln/>
-        </p:spPr>
-        <p:txBody>
-          <a:bodyPr wrap="square" lIns="0" tIns="0" rIns="0" bIns="0" rtlCol="0" anchor="ctr"/>
-          <a:lstStyle/>
-          <a:p>
-            <a:pPr indent="0" marL="0">
-              <a:buNone/>
-            </a:pPr>
-            <a:r>
-              <a:rPr lang="en-US" sz="1600" b="1" dirty="0">
+                <a:latin typeface="Arial" pitchFamily="34" charset="0"/>
+                <a:ea typeface="Arial" pitchFamily="34" charset="-122"/>
+                <a:cs typeface="Arial" pitchFamily="34" charset="-120"/>
+              </a:rPr>
+              <a:t>20%</a:t>
+            </a:r>
+            <a:endParaRPr lang="en-US" sz="1400" dirty="0"/>
+          </a:p>
+        </p:txBody>
+      </p:sp>
+      <p:sp>
+        <p:nvSpPr>
+          <p:cNvPr id="18" name="Text 16"/>
+          <p:cNvSpPr/>
+          <p:nvPr/>
+        </p:nvSpPr>
+        <p:spPr>
+          <a:xfrm>
+            <a:off x="4572000" y="2560320"/>
+            <a:ext cx="3200400" cy="365760"/>
+          </a:xfrm>
+          <a:prstGeom prst="rect">
+            <a:avLst/>
+          </a:prstGeom>
+          <a:noFill/>
+          <a:ln/>
+        </p:spPr>
+        <p:txBody>
+          <a:bodyPr wrap="square" lIns="0" tIns="0" rIns="0" bIns="0" rtlCol="0" anchor="ctr"/>
+          <a:lstStyle/>
+          <a:p>
+            <a:pPr marL="0" indent="0">
+              <a:buNone/>
+            </a:pPr>
+            <a:r>
+              <a:rPr lang="en-US" sz="1200" dirty="0">
+                <a:solidFill>
+                  <a:srgbClr val="E4E4E7"/>
+                </a:solidFill>
+                <a:latin typeface="Arial" pitchFamily="34" charset="0"/>
+                <a:ea typeface="Arial" pitchFamily="34" charset="-122"/>
+                <a:cs typeface="Arial" pitchFamily="34" charset="-120"/>
+              </a:rPr>
+              <a:t>BGeometrics on-chain</a:t>
+            </a:r>
+            <a:endParaRPr lang="en-US" sz="1200" dirty="0"/>
+          </a:p>
+        </p:txBody>
+      </p:sp>
+      <p:sp>
+        <p:nvSpPr>
+          <p:cNvPr id="19" name="Shape 17"/>
+          <p:cNvSpPr/>
+          <p:nvPr/>
+        </p:nvSpPr>
+        <p:spPr>
+          <a:xfrm>
+            <a:off x="822960" y="3154680"/>
+            <a:ext cx="164592" cy="164592"/>
+          </a:xfrm>
+          <a:prstGeom prst="ellipse">
+            <a:avLst/>
+          </a:prstGeom>
+          <a:solidFill>
+            <a:srgbClr val="FFD93D"/>
+          </a:solidFill>
+          <a:ln/>
+        </p:spPr>
+      </p:sp>
+      <p:sp>
+        <p:nvSpPr>
+          <p:cNvPr id="20" name="Text 18"/>
+          <p:cNvSpPr/>
+          <p:nvPr/>
+        </p:nvSpPr>
+        <p:spPr>
+          <a:xfrm>
+            <a:off x="1143000" y="3063240"/>
+            <a:ext cx="1828800" cy="365760"/>
+          </a:xfrm>
+          <a:prstGeom prst="rect">
+            <a:avLst/>
+          </a:prstGeom>
+          <a:noFill/>
+          <a:ln/>
+        </p:spPr>
+        <p:txBody>
+          <a:bodyPr wrap="square" lIns="0" tIns="0" rIns="0" bIns="0" rtlCol="0" anchor="ctr"/>
+          <a:lstStyle/>
+          <a:p>
+            <a:pPr marL="0" indent="0">
+              <a:buNone/>
+            </a:pPr>
+            <a:r>
+              <a:rPr lang="en-US" sz="1400" b="1" dirty="0">
                 <a:solidFill>
                   <a:srgbClr val="FFFFFF"/>
                 </a:solidFill>
@@ -4338,21 +4392,60 @@
                 <a:ea typeface="Arial" pitchFamily="34" charset="-122"/>
                 <a:cs typeface="Arial" pitchFamily="34" charset="-120"/>
               </a:rPr>
-              <a:t>Model Accuracy</a:t>
-            </a:r>
-            <a:endParaRPr lang="en-US" sz="1600" dirty="0"/>
-          </a:p>
-        </p:txBody>
-      </p:sp>
-      <p:sp>
-        <p:nvSpPr>
-          <p:cNvPr id="10" name="Text 8"/>
-          <p:cNvSpPr/>
-          <p:nvPr/>
-        </p:nvSpPr>
-        <p:spPr>
-          <a:xfrm>
-            <a:off x="5029200" y="2103120"/>
+              <a:t>Technical</a:t>
+            </a:r>
+            <a:endParaRPr lang="en-US" sz="1400" dirty="0"/>
+          </a:p>
+        </p:txBody>
+      </p:sp>
+      <p:sp>
+        <p:nvSpPr>
+          <p:cNvPr id="21" name="Text 19"/>
+          <p:cNvSpPr/>
+          <p:nvPr/>
+        </p:nvSpPr>
+        <p:spPr>
+          <a:xfrm>
+            <a:off x="3200400" y="3063240"/>
+            <a:ext cx="914400" cy="365760"/>
+          </a:xfrm>
+          <a:prstGeom prst="rect">
+            <a:avLst/>
+          </a:prstGeom>
+          <a:noFill/>
+          <a:ln/>
+        </p:spPr>
+        <p:txBody>
+          <a:bodyPr wrap="square" lIns="0" tIns="0" rIns="0" bIns="0" rtlCol="0" anchor="ctr"/>
+          <a:lstStyle/>
+          <a:p>
+            <a:pPr marL="0" indent="0">
+              <a:buNone/>
+            </a:pPr>
+            <a:r>
+              <a:rPr lang="en-US" sz="1400" b="1" dirty="0">
+                <a:solidFill>
+                  <a:srgbClr val="00D4AA"/>
+                </a:solidFill>
+                <a:latin typeface="Arial" pitchFamily="34" charset="0"/>
+                <a:ea typeface="Arial" pitchFamily="34" charset="-122"/>
+                <a:cs typeface="Arial" pitchFamily="34" charset="-120"/>
+              </a:rPr>
+              <a:t>20%</a:t>
+            </a:r>
+            <a:endParaRPr lang="en-US" sz="1400" dirty="0"/>
+          </a:p>
+        </p:txBody>
+      </p:sp>
+      <p:sp>
+        <p:nvSpPr>
+          <p:cNvPr id="22" name="Text 20"/>
+          <p:cNvSpPr/>
+          <p:nvPr/>
+        </p:nvSpPr>
+        <p:spPr>
+          <a:xfrm>
+            <a:off x="4572000" y="3063240"/>
             <a:ext cx="3200400" cy="365760"/>
           </a:xfrm>
           <a:prstGeom prst="rect">
@@ -4365,111 +4458,207 @@
           <a:bodyPr wrap="square" lIns="0" tIns="0" rIns="0" bIns="0" rtlCol="0" anchor="ctr"/>
           <a:lstStyle/>
           <a:p>
-            <a:pPr indent="0" marL="0">
-              <a:buNone/>
-            </a:pPr>
-            <a:r>
-              <a:rPr lang="en-US" sz="1100" dirty="0">
-                <a:solidFill>
-                  <a:srgbClr val="71717A"/>
-                </a:solidFill>
-                <a:latin typeface="Arial" pitchFamily="34" charset="0"/>
-                <a:ea typeface="Arial" pitchFamily="34" charset="-122"/>
-                <a:cs typeface="Arial" pitchFamily="34" charset="-120"/>
-              </a:rPr>
-              <a:t>On-chain ML model, 359 out-of-sample test days</a:t>
-            </a:r>
-            <a:endParaRPr lang="en-US" sz="1100" dirty="0"/>
-          </a:p>
-        </p:txBody>
-      </p:sp>
-      <p:sp>
-        <p:nvSpPr>
-          <p:cNvPr id="11" name="Shape 9"/>
-          <p:cNvSpPr/>
-          <p:nvPr/>
-        </p:nvSpPr>
-        <p:spPr>
-          <a:xfrm>
-            <a:off x="640080" y="2926080"/>
-            <a:ext cx="3749040" cy="1463040"/>
-          </a:xfrm>
-          <a:prstGeom prst="roundRect">
-            <a:avLst>
-              <a:gd name="adj" fmla="val 6250"/>
-            </a:avLst>
+            <a:pPr marL="0" indent="0">
+              <a:buNone/>
+            </a:pPr>
+            <a:r>
+              <a:rPr lang="en-US" sz="1200" dirty="0">
+                <a:solidFill>
+                  <a:srgbClr val="E4E4E7"/>
+                </a:solidFill>
+                <a:latin typeface="Arial" pitchFamily="34" charset="0"/>
+                <a:ea typeface="Arial" pitchFamily="34" charset="-122"/>
+                <a:cs typeface="Arial" pitchFamily="34" charset="-120"/>
+              </a:rPr>
+              <a:t>TrueMarkets MCP</a:t>
+            </a:r>
+            <a:endParaRPr lang="en-US" sz="1200" dirty="0"/>
+          </a:p>
+        </p:txBody>
+      </p:sp>
+      <p:sp>
+        <p:nvSpPr>
+          <p:cNvPr id="23" name="Shape 21"/>
+          <p:cNvSpPr/>
+          <p:nvPr/>
+        </p:nvSpPr>
+        <p:spPr>
+          <a:xfrm>
+            <a:off x="822960" y="3657600"/>
+            <a:ext cx="164592" cy="164592"/>
+          </a:xfrm>
+          <a:prstGeom prst="ellipse">
+            <a:avLst/>
           </a:prstGeom>
           <a:solidFill>
-            <a:srgbClr val="13131A"/>
+            <a:srgbClr val="A855F7"/>
           </a:solidFill>
           <a:ln/>
         </p:spPr>
       </p:sp>
       <p:sp>
         <p:nvSpPr>
-          <p:cNvPr id="12" name="Text 10"/>
-          <p:cNvSpPr/>
-          <p:nvPr/>
-        </p:nvSpPr>
-        <p:spPr>
-          <a:xfrm>
-            <a:off x="914400" y="3108960"/>
-            <a:ext cx="1371600" cy="457200"/>
-          </a:xfrm>
-          <a:prstGeom prst="rect">
-            <a:avLst/>
-          </a:prstGeom>
-          <a:noFill/>
-          <a:ln/>
-        </p:spPr>
-        <p:txBody>
-          <a:bodyPr wrap="square" lIns="0" tIns="0" rIns="0" bIns="0" rtlCol="0" anchor="ctr"/>
-          <a:lstStyle/>
-          <a:p>
-            <a:pPr indent="0" marL="0">
-              <a:buNone/>
-            </a:pPr>
-            <a:r>
-              <a:rPr lang="en-US" sz="3200" b="1" dirty="0">
+          <p:cNvPr id="24" name="Text 22"/>
+          <p:cNvSpPr/>
+          <p:nvPr/>
+        </p:nvSpPr>
+        <p:spPr>
+          <a:xfrm>
+            <a:off x="1143000" y="3566160"/>
+            <a:ext cx="1828800" cy="365760"/>
+          </a:xfrm>
+          <a:prstGeom prst="rect">
+            <a:avLst/>
+          </a:prstGeom>
+          <a:noFill/>
+          <a:ln/>
+        </p:spPr>
+        <p:txBody>
+          <a:bodyPr wrap="square" lIns="0" tIns="0" rIns="0" bIns="0" rtlCol="0" anchor="ctr"/>
+          <a:lstStyle/>
+          <a:p>
+            <a:pPr marL="0" indent="0">
+              <a:buNone/>
+            </a:pPr>
+            <a:r>
+              <a:rPr lang="en-US" sz="1400" b="1" dirty="0">
+                <a:solidFill>
+                  <a:srgbClr val="FFFFFF"/>
+                </a:solidFill>
+                <a:latin typeface="Arial" pitchFamily="34" charset="0"/>
+                <a:ea typeface="Arial" pitchFamily="34" charset="-122"/>
+                <a:cs typeface="Arial" pitchFamily="34" charset="-120"/>
+              </a:rPr>
+              <a:t>TM Sentiment</a:t>
+            </a:r>
+            <a:endParaRPr lang="en-US" sz="1400" dirty="0"/>
+          </a:p>
+        </p:txBody>
+      </p:sp>
+      <p:sp>
+        <p:nvSpPr>
+          <p:cNvPr id="25" name="Text 23"/>
+          <p:cNvSpPr/>
+          <p:nvPr/>
+        </p:nvSpPr>
+        <p:spPr>
+          <a:xfrm>
+            <a:off x="3200400" y="3566160"/>
+            <a:ext cx="914400" cy="365760"/>
+          </a:xfrm>
+          <a:prstGeom prst="rect">
+            <a:avLst/>
+          </a:prstGeom>
+          <a:noFill/>
+          <a:ln/>
+        </p:spPr>
+        <p:txBody>
+          <a:bodyPr wrap="square" lIns="0" tIns="0" rIns="0" bIns="0" rtlCol="0" anchor="ctr"/>
+          <a:lstStyle/>
+          <a:p>
+            <a:pPr marL="0" indent="0">
+              <a:buNone/>
+            </a:pPr>
+            <a:r>
+              <a:rPr lang="en-US" sz="1400" b="1" dirty="0">
                 <a:solidFill>
                   <a:srgbClr val="00D4AA"/>
                 </a:solidFill>
-                <a:latin typeface="Arial Black" pitchFamily="34" charset="0"/>
-                <a:ea typeface="Arial Black" pitchFamily="34" charset="-122"/>
-                <a:cs typeface="Arial Black" pitchFamily="34" charset="-120"/>
-              </a:rPr>
-              <a:t>30s</a:t>
-            </a:r>
-            <a:endParaRPr lang="en-US" sz="3200" dirty="0"/>
-          </a:p>
-        </p:txBody>
-      </p:sp>
-      <p:sp>
-        <p:nvSpPr>
-          <p:cNvPr id="13" name="Text 11"/>
-          <p:cNvSpPr/>
-          <p:nvPr/>
-        </p:nvSpPr>
-        <p:spPr>
-          <a:xfrm>
-            <a:off x="914400" y="3566160"/>
-            <a:ext cx="3200400" cy="274320"/>
-          </a:xfrm>
-          <a:prstGeom prst="rect">
-            <a:avLst/>
-          </a:prstGeom>
-          <a:noFill/>
-          <a:ln/>
-        </p:spPr>
-        <p:txBody>
-          <a:bodyPr wrap="square" lIns="0" tIns="0" rIns="0" bIns="0" rtlCol="0" anchor="ctr"/>
-          <a:lstStyle/>
-          <a:p>
-            <a:pPr indent="0" marL="0">
-              <a:buNone/>
-            </a:pPr>
-            <a:r>
-              <a:rPr lang="en-US" sz="1600" b="1" dirty="0">
+                <a:latin typeface="Arial" pitchFamily="34" charset="0"/>
+                <a:ea typeface="Arial" pitchFamily="34" charset="-122"/>
+                <a:cs typeface="Arial" pitchFamily="34" charset="-120"/>
+              </a:rPr>
+              <a:t>10%</a:t>
+            </a:r>
+            <a:endParaRPr lang="en-US" sz="1400" dirty="0"/>
+          </a:p>
+        </p:txBody>
+      </p:sp>
+      <p:sp>
+        <p:nvSpPr>
+          <p:cNvPr id="26" name="Text 24"/>
+          <p:cNvSpPr/>
+          <p:nvPr/>
+        </p:nvSpPr>
+        <p:spPr>
+          <a:xfrm>
+            <a:off x="4572000" y="3566160"/>
+            <a:ext cx="3200400" cy="365760"/>
+          </a:xfrm>
+          <a:prstGeom prst="rect">
+            <a:avLst/>
+          </a:prstGeom>
+          <a:noFill/>
+          <a:ln/>
+        </p:spPr>
+        <p:txBody>
+          <a:bodyPr wrap="square" lIns="0" tIns="0" rIns="0" bIns="0" rtlCol="0" anchor="ctr"/>
+          <a:lstStyle/>
+          <a:p>
+            <a:pPr marL="0" indent="0">
+              <a:buNone/>
+            </a:pPr>
+            <a:r>
+              <a:rPr lang="en-US" sz="1200" dirty="0">
+                <a:solidFill>
+                  <a:srgbClr val="E4E4E7"/>
+                </a:solidFill>
+                <a:latin typeface="Arial" pitchFamily="34" charset="0"/>
+                <a:ea typeface="Arial" pitchFamily="34" charset="-122"/>
+                <a:cs typeface="Arial" pitchFamily="34" charset="-120"/>
+              </a:rPr>
+              <a:t>TrueMarkets MCP</a:t>
+            </a:r>
+            <a:endParaRPr lang="en-US" sz="1200" dirty="0"/>
+          </a:p>
+        </p:txBody>
+      </p:sp>
+      <p:sp>
+        <p:nvSpPr>
+          <p:cNvPr id="27" name="Shape 25"/>
+          <p:cNvSpPr/>
+          <p:nvPr/>
+        </p:nvSpPr>
+        <p:spPr>
+          <a:xfrm>
+            <a:off x="822960" y="4160520"/>
+            <a:ext cx="164592" cy="164592"/>
+          </a:xfrm>
+          <a:prstGeom prst="ellipse">
+            <a:avLst/>
+          </a:prstGeom>
+          <a:solidFill>
+            <a:srgbClr val="FF6B6B"/>
+          </a:solidFill>
+          <a:ln/>
+        </p:spPr>
+      </p:sp>
+      <p:sp>
+        <p:nvSpPr>
+          <p:cNvPr id="28" name="Text 26"/>
+          <p:cNvSpPr/>
+          <p:nvPr/>
+        </p:nvSpPr>
+        <p:spPr>
+          <a:xfrm>
+            <a:off x="1143000" y="4069080"/>
+            <a:ext cx="1828800" cy="365760"/>
+          </a:xfrm>
+          <a:prstGeom prst="rect">
+            <a:avLst/>
+          </a:prstGeom>
+          <a:noFill/>
+          <a:ln/>
+        </p:spPr>
+        <p:txBody>
+          <a:bodyPr wrap="square" lIns="0" tIns="0" rIns="0" bIns="0" rtlCol="0" anchor="ctr"/>
+          <a:lstStyle/>
+          <a:p>
+            <a:pPr marL="0" indent="0">
+              <a:buNone/>
+            </a:pPr>
+            <a:r>
+              <a:rPr lang="en-US" sz="1400" b="1" dirty="0">
                 <a:solidFill>
                   <a:srgbClr val="FFFFFF"/>
                 </a:solidFill>
@@ -4477,21 +4666,60 @@
                 <a:ea typeface="Arial" pitchFamily="34" charset="-122"/>
                 <a:cs typeface="Arial" pitchFamily="34" charset="-120"/>
               </a:rPr>
-              <a:t>Refresh Rate</a:t>
-            </a:r>
-            <a:endParaRPr lang="en-US" sz="1600" dirty="0"/>
-          </a:p>
-        </p:txBody>
-      </p:sp>
-      <p:sp>
-        <p:nvSpPr>
-          <p:cNvPr id="14" name="Text 12"/>
-          <p:cNvSpPr/>
-          <p:nvPr/>
-        </p:nvSpPr>
-        <p:spPr>
-          <a:xfrm>
-            <a:off x="914400" y="3840480"/>
+              <a:t>Fear &amp; Greed</a:t>
+            </a:r>
+            <a:endParaRPr lang="en-US" sz="1400" dirty="0"/>
+          </a:p>
+        </p:txBody>
+      </p:sp>
+      <p:sp>
+        <p:nvSpPr>
+          <p:cNvPr id="29" name="Text 27"/>
+          <p:cNvSpPr/>
+          <p:nvPr/>
+        </p:nvSpPr>
+        <p:spPr>
+          <a:xfrm>
+            <a:off x="3200400" y="4069080"/>
+            <a:ext cx="914400" cy="365760"/>
+          </a:xfrm>
+          <a:prstGeom prst="rect">
+            <a:avLst/>
+          </a:prstGeom>
+          <a:noFill/>
+          <a:ln/>
+        </p:spPr>
+        <p:txBody>
+          <a:bodyPr wrap="square" lIns="0" tIns="0" rIns="0" bIns="0" rtlCol="0" anchor="ctr"/>
+          <a:lstStyle/>
+          <a:p>
+            <a:pPr marL="0" indent="0">
+              <a:buNone/>
+            </a:pPr>
+            <a:r>
+              <a:rPr lang="en-US" sz="1400" b="1" dirty="0">
+                <a:solidFill>
+                  <a:srgbClr val="00D4AA"/>
+                </a:solidFill>
+                <a:latin typeface="Arial" pitchFamily="34" charset="0"/>
+                <a:ea typeface="Arial" pitchFamily="34" charset="-122"/>
+                <a:cs typeface="Arial" pitchFamily="34" charset="-120"/>
+              </a:rPr>
+              <a:t>15%</a:t>
+            </a:r>
+            <a:endParaRPr lang="en-US" sz="1400" dirty="0"/>
+          </a:p>
+        </p:txBody>
+      </p:sp>
+      <p:sp>
+        <p:nvSpPr>
+          <p:cNvPr id="30" name="Text 28"/>
+          <p:cNvSpPr/>
+          <p:nvPr/>
+        </p:nvSpPr>
+        <p:spPr>
+          <a:xfrm>
+            <a:off x="4572000" y="4069080"/>
             <a:ext cx="3200400" cy="365760"/>
           </a:xfrm>
           <a:prstGeom prst="rect">
@@ -4504,160 +4732,21 @@
           <a:bodyPr wrap="square" lIns="0" tIns="0" rIns="0" bIns="0" rtlCol="0" anchor="ctr"/>
           <a:lstStyle/>
           <a:p>
-            <a:pPr indent="0" marL="0">
-              <a:buNone/>
-            </a:pPr>
-            <a:r>
-              <a:rPr lang="en-US" sz="1100" dirty="0">
-                <a:solidFill>
-                  <a:srgbClr val="71717A"/>
-                </a:solidFill>
-                <a:latin typeface="Arial" pitchFamily="34" charset="0"/>
-                <a:ea typeface="Arial" pitchFamily="34" charset="-122"/>
-                <a:cs typeface="Arial" pitchFamily="34" charset="-120"/>
-              </a:rPr>
-              <a:t>Every signal updates every 30 seconds</a:t>
-            </a:r>
-            <a:endParaRPr lang="en-US" sz="1100" dirty="0"/>
-          </a:p>
-        </p:txBody>
-      </p:sp>
-      <p:sp>
-        <p:nvSpPr>
-          <p:cNvPr id="15" name="Shape 13"/>
-          <p:cNvSpPr/>
-          <p:nvPr/>
-        </p:nvSpPr>
-        <p:spPr>
-          <a:xfrm>
-            <a:off x="4754880" y="2926080"/>
-            <a:ext cx="3749040" cy="1463040"/>
-          </a:xfrm>
-          <a:prstGeom prst="roundRect">
-            <a:avLst>
-              <a:gd name="adj" fmla="val 6250"/>
-            </a:avLst>
-          </a:prstGeom>
-          <a:solidFill>
-            <a:srgbClr val="13131A"/>
-          </a:solidFill>
-          <a:ln/>
-        </p:spPr>
-      </p:sp>
-      <p:sp>
-        <p:nvSpPr>
-          <p:cNvPr id="16" name="Text 14"/>
-          <p:cNvSpPr/>
-          <p:nvPr/>
-        </p:nvSpPr>
-        <p:spPr>
-          <a:xfrm>
-            <a:off x="5029200" y="3108960"/>
-            <a:ext cx="1371600" cy="457200"/>
-          </a:xfrm>
-          <a:prstGeom prst="rect">
-            <a:avLst/>
-          </a:prstGeom>
-          <a:noFill/>
-          <a:ln/>
-        </p:spPr>
-        <p:txBody>
-          <a:bodyPr wrap="square" lIns="0" tIns="0" rIns="0" bIns="0" rtlCol="0" anchor="ctr"/>
-          <a:lstStyle/>
-          <a:p>
-            <a:pPr indent="0" marL="0">
-              <a:buNone/>
-            </a:pPr>
-            <a:r>
-              <a:rPr lang="en-US" sz="3200" b="1" dirty="0">
-                <a:solidFill>
-                  <a:srgbClr val="00D4AA"/>
-                </a:solidFill>
-                <a:latin typeface="Arial Black" pitchFamily="34" charset="0"/>
-                <a:ea typeface="Arial Black" pitchFamily="34" charset="-122"/>
-                <a:cs typeface="Arial Black" pitchFamily="34" charset="-120"/>
-              </a:rPr>
-              <a:t>0</a:t>
-            </a:r>
-            <a:endParaRPr lang="en-US" sz="3200" dirty="0"/>
-          </a:p>
-        </p:txBody>
-      </p:sp>
-      <p:sp>
-        <p:nvSpPr>
-          <p:cNvPr id="17" name="Text 15"/>
-          <p:cNvSpPr/>
-          <p:nvPr/>
-        </p:nvSpPr>
-        <p:spPr>
-          <a:xfrm>
-            <a:off x="5029200" y="3566160"/>
-            <a:ext cx="3200400" cy="274320"/>
-          </a:xfrm>
-          <a:prstGeom prst="rect">
-            <a:avLst/>
-          </a:prstGeom>
-          <a:noFill/>
-          <a:ln/>
-        </p:spPr>
-        <p:txBody>
-          <a:bodyPr wrap="square" lIns="0" tIns="0" rIns="0" bIns="0" rtlCol="0" anchor="ctr"/>
-          <a:lstStyle/>
-          <a:p>
-            <a:pPr indent="0" marL="0">
-              <a:buNone/>
-            </a:pPr>
-            <a:r>
-              <a:rPr lang="en-US" sz="1600" b="1" dirty="0">
-                <a:solidFill>
-                  <a:srgbClr val="FFFFFF"/>
-                </a:solidFill>
-                <a:latin typeface="Arial" pitchFamily="34" charset="0"/>
-                <a:ea typeface="Arial" pitchFamily="34" charset="-122"/>
-                <a:cs typeface="Arial" pitchFamily="34" charset="-120"/>
-              </a:rPr>
-              <a:t>Black Boxes</a:t>
-            </a:r>
-            <a:endParaRPr lang="en-US" sz="1600" dirty="0"/>
-          </a:p>
-        </p:txBody>
-      </p:sp>
-      <p:sp>
-        <p:nvSpPr>
-          <p:cNvPr id="18" name="Text 16"/>
-          <p:cNvSpPr/>
-          <p:nvPr/>
-        </p:nvSpPr>
-        <p:spPr>
-          <a:xfrm>
-            <a:off x="5029200" y="3840480"/>
-            <a:ext cx="3200400" cy="365760"/>
-          </a:xfrm>
-          <a:prstGeom prst="rect">
-            <a:avLst/>
-          </a:prstGeom>
-          <a:noFill/>
-          <a:ln/>
-        </p:spPr>
-        <p:txBody>
-          <a:bodyPr wrap="square" lIns="0" tIns="0" rIns="0" bIns="0" rtlCol="0" anchor="ctr"/>
-          <a:lstStyle/>
-          <a:p>
-            <a:pPr indent="0" marL="0">
-              <a:buNone/>
-            </a:pPr>
-            <a:r>
-              <a:rPr lang="en-US" sz="1100" dirty="0">
-                <a:solidFill>
-                  <a:srgbClr val="71717A"/>
-                </a:solidFill>
-                <a:latin typeface="Arial" pitchFamily="34" charset="0"/>
-                <a:ea typeface="Arial" pitchFamily="34" charset="-122"/>
-                <a:cs typeface="Arial" pitchFamily="34" charset="-120"/>
-              </a:rPr>
-              <a:t>Every signal shows its reasoning under BUY/SELL</a:t>
-            </a:r>
-            <a:endParaRPr lang="en-US" sz="1100" dirty="0"/>
+            <a:pPr marL="0" indent="0">
+              <a:buNone/>
+            </a:pPr>
+            <a:r>
+              <a:rPr lang="en-US" sz="1200" dirty="0">
+                <a:solidFill>
+                  <a:srgbClr val="E4E4E7"/>
+                </a:solidFill>
+                <a:latin typeface="Arial" pitchFamily="34" charset="0"/>
+                <a:ea typeface="Arial" pitchFamily="34" charset="-122"/>
+                <a:cs typeface="Arial" pitchFamily="34" charset="-120"/>
+              </a:rPr>
+              <a:t>alternative.me</a:t>
+            </a:r>
+            <a:endParaRPr lang="en-US" sz="1200" dirty="0"/>
           </a:p>
         </p:txBody>
       </p:sp>
@@ -4669,14 +4758,15 @@
 </p:sld>
 </file>
 
-<file path=ppt/slides/slide4.xml><?xml version="1.0" encoding="utf-8"?>
+<file path=ppt/slides/slide5.xml><?xml version="1.0" encoding="utf-8"?>
 <p:sld xmlns:a="http://schemas.openxmlformats.org/drawingml/2006/main" xmlns:r="http://schemas.openxmlformats.org/officeDocument/2006/relationships" xmlns:p="http://schemas.openxmlformats.org/presentationml/2006/main">
-  <p:cSld name="Slide 4">
+  <p:cSld name="Slide 5">
     <p:bg>
       <p:bgPr>
         <a:solidFill>
           <a:srgbClr val="0A0A0F"/>
         </a:solidFill>
+        <a:effectLst/>
       </p:bgPr>
     </p:bg>
     <p:spTree>
@@ -4701,24 +4791,24 @@
         </p:nvSpPr>
         <p:spPr>
           <a:xfrm>
-            <a:off x="640080" y="365760"/>
-            <a:ext cx="7315200" cy="548640"/>
-          </a:xfrm>
-          <a:prstGeom prst="rect">
-            <a:avLst/>
-          </a:prstGeom>
-          <a:noFill/>
-          <a:ln/>
-        </p:spPr>
-        <p:txBody>
-          <a:bodyPr wrap="square" lIns="0" tIns="0" rIns="0" bIns="0" rtlCol="0" anchor="ctr"/>
-          <a:lstStyle/>
-          <a:p>
-            <a:pPr indent="0" marL="0">
-              <a:buNone/>
-            </a:pPr>
-            <a:r>
-              <a:rPr lang="en-US" sz="3600" b="1" dirty="0">
+            <a:off x="640080" y="274320"/>
+            <a:ext cx="4572000" cy="457200"/>
+          </a:xfrm>
+          <a:prstGeom prst="rect">
+            <a:avLst/>
+          </a:prstGeom>
+          <a:noFill/>
+          <a:ln/>
+        </p:spPr>
+        <p:txBody>
+          <a:bodyPr wrap="square" lIns="0" tIns="0" rIns="0" bIns="0" rtlCol="0" anchor="ctr"/>
+          <a:lstStyle/>
+          <a:p>
+            <a:pPr marL="0" indent="0">
+              <a:buNone/>
+            </a:pPr>
+            <a:r>
+              <a:rPr lang="en-US" sz="3000" b="1" dirty="0">
                 <a:solidFill>
                   <a:srgbClr val="FFFFFF"/>
                 </a:solidFill>
@@ -4726,60 +4816,162 @@
                 <a:ea typeface="Arial Black" pitchFamily="34" charset="-122"/>
                 <a:cs typeface="Arial Black" pitchFamily="34" charset="-120"/>
               </a:rPr>
-              <a:t>The 6 Signals</a:t>
-            </a:r>
-            <a:endParaRPr lang="en-US" sz="3600" dirty="0"/>
-          </a:p>
-        </p:txBody>
-      </p:sp>
-      <p:sp>
-        <p:nvSpPr>
-          <p:cNvPr id="3" name="Shape 1"/>
-          <p:cNvSpPr/>
-          <p:nvPr/>
-        </p:nvSpPr>
-        <p:spPr>
-          <a:xfrm>
-            <a:off x="640080" y="1097280"/>
-            <a:ext cx="7863840" cy="365760"/>
+              <a:t>Model Accuracy</a:t>
+            </a:r>
+            <a:endParaRPr lang="en-US" sz="3000" dirty="0"/>
+          </a:p>
+        </p:txBody>
+      </p:sp>
+      <p:sp>
+        <p:nvSpPr>
+          <p:cNvPr id="3" name="Text 1"/>
+          <p:cNvSpPr/>
+          <p:nvPr/>
+        </p:nvSpPr>
+        <p:spPr>
+          <a:xfrm>
+            <a:off x="640080" y="731520"/>
+            <a:ext cx="4572000" cy="274320"/>
+          </a:xfrm>
+          <a:prstGeom prst="rect">
+            <a:avLst/>
+          </a:prstGeom>
+          <a:noFill/>
+          <a:ln/>
+        </p:spPr>
+        <p:txBody>
+          <a:bodyPr wrap="square" lIns="0" tIns="0" rIns="0" bIns="0" rtlCol="0" anchor="ctr"/>
+          <a:lstStyle/>
+          <a:p>
+            <a:pPr marL="0" indent="0">
+              <a:buNone/>
+            </a:pPr>
+            <a:r>
+              <a:rPr lang="en-US" sz="1400" dirty="0">
+                <a:solidFill>
+                  <a:srgbClr val="71717A"/>
+                </a:solidFill>
+                <a:latin typeface="Arial" pitchFamily="34" charset="0"/>
+                <a:ea typeface="Arial" pitchFamily="34" charset="-122"/>
+                <a:cs typeface="Arial" pitchFamily="34" charset="-120"/>
+              </a:rPr>
+              <a:t>67.4% on 359 out-of-sample days</a:t>
+            </a:r>
+            <a:endParaRPr lang="en-US" sz="1400" dirty="0"/>
+          </a:p>
+        </p:txBody>
+      </p:sp>
+      <p:pic>
+        <p:nvPicPr>
+          <p:cNvPr id="4" name="Image 0" descr="preencoded.png"/>
+          <p:cNvPicPr>
+            <a:picLocks noChangeAspect="1"/>
+          </p:cNvPicPr>
+          <p:nvPr/>
+        </p:nvPicPr>
+        <p:blipFill>
+          <a:blip r:embed="rId3"/>
+          <a:stretch>
+            <a:fillRect/>
+          </a:stretch>
+        </p:blipFill>
+        <p:spPr>
+          <a:xfrm>
+            <a:off x="457200" y="1097280"/>
+            <a:ext cx="5029200" cy="2926080"/>
+          </a:xfrm>
+          <a:prstGeom prst="rect">
+            <a:avLst/>
+          </a:prstGeom>
+        </p:spPr>
+      </p:pic>
+      <p:sp>
+        <p:nvSpPr>
+          <p:cNvPr id="5" name="Shape 2"/>
+          <p:cNvSpPr/>
+          <p:nvPr/>
+        </p:nvSpPr>
+        <p:spPr>
+          <a:xfrm>
+            <a:off x="5760720" y="1097280"/>
+            <a:ext cx="3017520" cy="3474720"/>
           </a:xfrm>
           <a:prstGeom prst="roundRect">
             <a:avLst>
-              <a:gd name="adj" fmla="val 12500"/>
+              <a:gd name="adj" fmla="val 3030"/>
             </a:avLst>
           </a:prstGeom>
           <a:solidFill>
-            <a:srgbClr val="1E1E2E"/>
+            <a:srgbClr val="13131A"/>
           </a:solidFill>
           <a:ln/>
         </p:spPr>
       </p:sp>
       <p:sp>
         <p:nvSpPr>
-          <p:cNvPr id="4" name="Text 2"/>
-          <p:cNvSpPr/>
-          <p:nvPr/>
-        </p:nvSpPr>
-        <p:spPr>
-          <a:xfrm>
-            <a:off x="822960" y="1115568"/>
-            <a:ext cx="2286000" cy="320040"/>
-          </a:xfrm>
-          <a:prstGeom prst="rect">
-            <a:avLst/>
-          </a:prstGeom>
-          <a:noFill/>
-          <a:ln/>
-        </p:spPr>
-        <p:txBody>
-          <a:bodyPr wrap="square" lIns="0" tIns="0" rIns="0" bIns="0" rtlCol="0" anchor="ctr"/>
-          <a:lstStyle/>
-          <a:p>
-            <a:pPr indent="0" marL="0">
-              <a:buNone/>
-            </a:pPr>
-            <a:r>
-              <a:rPr lang="en-US" sz="1100" b="1" dirty="0">
+          <p:cNvPr id="6" name="Text 3"/>
+          <p:cNvSpPr/>
+          <p:nvPr/>
+        </p:nvSpPr>
+        <p:spPr>
+          <a:xfrm>
+            <a:off x="5943600" y="1188720"/>
+            <a:ext cx="2743200" cy="274320"/>
+          </a:xfrm>
+          <a:prstGeom prst="rect">
+            <a:avLst/>
+          </a:prstGeom>
+          <a:noFill/>
+          <a:ln/>
+        </p:spPr>
+        <p:txBody>
+          <a:bodyPr wrap="square" lIns="0" tIns="0" rIns="0" bIns="0" rtlCol="0" anchor="ctr"/>
+          <a:lstStyle/>
+          <a:p>
+            <a:pPr marL="0" indent="0">
+              <a:buNone/>
+            </a:pPr>
+            <a:r>
+              <a:rPr lang="en-US" sz="1300" b="1" dirty="0">
+                <a:solidFill>
+                  <a:srgbClr val="6C5CE7"/>
+                </a:solidFill>
+                <a:latin typeface="Arial" pitchFamily="34" charset="0"/>
+                <a:ea typeface="Arial" pitchFamily="34" charset="-122"/>
+                <a:cs typeface="Arial" pitchFamily="34" charset="-120"/>
+              </a:rPr>
+              <a:t>Key Metrics</a:t>
+            </a:r>
+            <a:endParaRPr lang="en-US" sz="1300" dirty="0"/>
+          </a:p>
+        </p:txBody>
+      </p:sp>
+      <p:sp>
+        <p:nvSpPr>
+          <p:cNvPr id="7" name="Text 4"/>
+          <p:cNvSpPr/>
+          <p:nvPr/>
+        </p:nvSpPr>
+        <p:spPr>
+          <a:xfrm>
+            <a:off x="5943600" y="1554480"/>
+            <a:ext cx="1371600" cy="274320"/>
+          </a:xfrm>
+          <a:prstGeom prst="rect">
+            <a:avLst/>
+          </a:prstGeom>
+          <a:noFill/>
+          <a:ln/>
+        </p:spPr>
+        <p:txBody>
+          <a:bodyPr wrap="square" lIns="0" tIns="0" rIns="0" bIns="0" rtlCol="0" anchor="ctr"/>
+          <a:lstStyle/>
+          <a:p>
+            <a:pPr marL="0" indent="0">
+              <a:buNone/>
+            </a:pPr>
+            <a:r>
+              <a:rPr lang="en-US" sz="1100" dirty="0">
                 <a:solidFill>
                   <a:srgbClr val="71717A"/>
                 </a:solidFill>
@@ -4787,7 +4979,7 @@
                 <a:ea typeface="Arial" pitchFamily="34" charset="-122"/>
                 <a:cs typeface="Arial" pitchFamily="34" charset="-120"/>
               </a:rPr>
-              <a:t>Signal</a:t>
+              <a:t>Accuracy</a:t>
             </a:r>
             <a:endParaRPr lang="en-US" sz="1100" dirty="0"/>
           </a:p>
@@ -4795,30 +4987,69 @@
       </p:sp>
       <p:sp>
         <p:nvSpPr>
-          <p:cNvPr id="5" name="Text 3"/>
-          <p:cNvSpPr/>
-          <p:nvPr/>
-        </p:nvSpPr>
-        <p:spPr>
-          <a:xfrm>
-            <a:off x="3200400" y="1115568"/>
-            <a:ext cx="914400" cy="320040"/>
-          </a:xfrm>
-          <a:prstGeom prst="rect">
-            <a:avLst/>
-          </a:prstGeom>
-          <a:noFill/>
-          <a:ln/>
-        </p:spPr>
-        <p:txBody>
-          <a:bodyPr wrap="square" lIns="0" tIns="0" rIns="0" bIns="0" rtlCol="0" anchor="ctr"/>
-          <a:lstStyle/>
-          <a:p>
-            <a:pPr indent="0" marL="0">
-              <a:buNone/>
-            </a:pPr>
-            <a:r>
-              <a:rPr lang="en-US" sz="1100" b="1" dirty="0">
+          <p:cNvPr id="8" name="Text 5"/>
+          <p:cNvSpPr/>
+          <p:nvPr/>
+        </p:nvSpPr>
+        <p:spPr>
+          <a:xfrm>
+            <a:off x="7315200" y="1554480"/>
+            <a:ext cx="1280160" cy="274320"/>
+          </a:xfrm>
+          <a:prstGeom prst="rect">
+            <a:avLst/>
+          </a:prstGeom>
+          <a:noFill/>
+          <a:ln/>
+        </p:spPr>
+        <p:txBody>
+          <a:bodyPr wrap="square" lIns="0" tIns="0" rIns="0" bIns="0" rtlCol="0" anchor="ctr"/>
+          <a:lstStyle/>
+          <a:p>
+            <a:pPr marL="0" indent="0" algn="r">
+              <a:buNone/>
+            </a:pPr>
+            <a:r>
+              <a:rPr lang="en-US" sz="1200" b="1" dirty="0">
+                <a:solidFill>
+                  <a:srgbClr val="FFFFFF"/>
+                </a:solidFill>
+                <a:latin typeface="Arial" pitchFamily="34" charset="0"/>
+                <a:ea typeface="Arial" pitchFamily="34" charset="-122"/>
+                <a:cs typeface="Arial" pitchFamily="34" charset="-120"/>
+              </a:rPr>
+              <a:t>67.4%</a:t>
+            </a:r>
+            <a:endParaRPr lang="en-US" sz="1200" dirty="0"/>
+          </a:p>
+        </p:txBody>
+      </p:sp>
+      <p:sp>
+        <p:nvSpPr>
+          <p:cNvPr id="9" name="Text 6"/>
+          <p:cNvSpPr/>
+          <p:nvPr/>
+        </p:nvSpPr>
+        <p:spPr>
+          <a:xfrm>
+            <a:off x="5943600" y="1874520"/>
+            <a:ext cx="1371600" cy="274320"/>
+          </a:xfrm>
+          <a:prstGeom prst="rect">
+            <a:avLst/>
+          </a:prstGeom>
+          <a:noFill/>
+          <a:ln/>
+        </p:spPr>
+        <p:txBody>
+          <a:bodyPr wrap="square" lIns="0" tIns="0" rIns="0" bIns="0" rtlCol="0" anchor="ctr"/>
+          <a:lstStyle/>
+          <a:p>
+            <a:pPr marL="0" indent="0">
+              <a:buNone/>
+            </a:pPr>
+            <a:r>
+              <a:rPr lang="en-US" sz="1100" dirty="0">
                 <a:solidFill>
                   <a:srgbClr val="71717A"/>
                 </a:solidFill>
@@ -4826,7 +5057,7 @@
                 <a:ea typeface="Arial" pitchFamily="34" charset="-122"/>
                 <a:cs typeface="Arial" pitchFamily="34" charset="-120"/>
               </a:rPr>
-              <a:t>Weight</a:t>
+              <a:t>Precision</a:t>
             </a:r>
             <a:endParaRPr lang="en-US" sz="1100" dirty="0"/>
           </a:p>
@@ -4834,30 +5065,69 @@
       </p:sp>
       <p:sp>
         <p:nvSpPr>
-          <p:cNvPr id="6" name="Text 4"/>
-          <p:cNvSpPr/>
-          <p:nvPr/>
-        </p:nvSpPr>
-        <p:spPr>
-          <a:xfrm>
-            <a:off x="4572000" y="1115568"/>
-            <a:ext cx="2743200" cy="320040"/>
-          </a:xfrm>
-          <a:prstGeom prst="rect">
-            <a:avLst/>
-          </a:prstGeom>
-          <a:noFill/>
-          <a:ln/>
-        </p:spPr>
-        <p:txBody>
-          <a:bodyPr wrap="square" lIns="0" tIns="0" rIns="0" bIns="0" rtlCol="0" anchor="ctr"/>
-          <a:lstStyle/>
-          <a:p>
-            <a:pPr indent="0" marL="0">
-              <a:buNone/>
-            </a:pPr>
-            <a:r>
-              <a:rPr lang="en-US" sz="1100" b="1" dirty="0">
+          <p:cNvPr id="10" name="Text 7"/>
+          <p:cNvSpPr/>
+          <p:nvPr/>
+        </p:nvSpPr>
+        <p:spPr>
+          <a:xfrm>
+            <a:off x="7315200" y="1874520"/>
+            <a:ext cx="1280160" cy="274320"/>
+          </a:xfrm>
+          <a:prstGeom prst="rect">
+            <a:avLst/>
+          </a:prstGeom>
+          <a:noFill/>
+          <a:ln/>
+        </p:spPr>
+        <p:txBody>
+          <a:bodyPr wrap="square" lIns="0" tIns="0" rIns="0" bIns="0" rtlCol="0" anchor="ctr"/>
+          <a:lstStyle/>
+          <a:p>
+            <a:pPr marL="0" indent="0" algn="r">
+              <a:buNone/>
+            </a:pPr>
+            <a:r>
+              <a:rPr lang="en-US" sz="1200" b="1" dirty="0">
+                <a:solidFill>
+                  <a:srgbClr val="FFFFFF"/>
+                </a:solidFill>
+                <a:latin typeface="Arial" pitchFamily="34" charset="0"/>
+                <a:ea typeface="Arial" pitchFamily="34" charset="-122"/>
+                <a:cs typeface="Arial" pitchFamily="34" charset="-120"/>
+              </a:rPr>
+              <a:t>67.2%</a:t>
+            </a:r>
+            <a:endParaRPr lang="en-US" sz="1200" dirty="0"/>
+          </a:p>
+        </p:txBody>
+      </p:sp>
+      <p:sp>
+        <p:nvSpPr>
+          <p:cNvPr id="11" name="Text 8"/>
+          <p:cNvSpPr/>
+          <p:nvPr/>
+        </p:nvSpPr>
+        <p:spPr>
+          <a:xfrm>
+            <a:off x="5943600" y="2194560"/>
+            <a:ext cx="1371600" cy="274320"/>
+          </a:xfrm>
+          <a:prstGeom prst="rect">
+            <a:avLst/>
+          </a:prstGeom>
+          <a:noFill/>
+          <a:ln/>
+        </p:spPr>
+        <p:txBody>
+          <a:bodyPr wrap="square" lIns="0" tIns="0" rIns="0" bIns="0" rtlCol="0" anchor="ctr"/>
+          <a:lstStyle/>
+          <a:p>
+            <a:pPr marL="0" indent="0">
+              <a:buNone/>
+            </a:pPr>
+            <a:r>
+              <a:rPr lang="en-US" sz="1100" dirty="0">
                 <a:solidFill>
                   <a:srgbClr val="71717A"/>
                 </a:solidFill>
@@ -4865,7 +5135,7 @@
                 <a:ea typeface="Arial" pitchFamily="34" charset="-122"/>
                 <a:cs typeface="Arial" pitchFamily="34" charset="-120"/>
               </a:rPr>
-              <a:t>Source</a:t>
+              <a:t>Recall</a:t>
             </a:r>
             <a:endParaRPr lang="en-US" sz="1100" dirty="0"/>
           </a:p>
@@ -4873,50 +5143,30 @@
       </p:sp>
       <p:sp>
         <p:nvSpPr>
-          <p:cNvPr id="7" name="Shape 5"/>
-          <p:cNvSpPr/>
-          <p:nvPr/>
-        </p:nvSpPr>
-        <p:spPr>
-          <a:xfrm>
-            <a:off x="822960" y="1645920"/>
-            <a:ext cx="164592" cy="164592"/>
-          </a:xfrm>
-          <a:prstGeom prst="ellipse">
-            <a:avLst/>
-          </a:prstGeom>
-          <a:solidFill>
-            <a:srgbClr val="4DABF7"/>
-          </a:solidFill>
-          <a:ln/>
-        </p:spPr>
-      </p:sp>
-      <p:sp>
-        <p:nvSpPr>
-          <p:cNvPr id="8" name="Text 6"/>
-          <p:cNvSpPr/>
-          <p:nvPr/>
-        </p:nvSpPr>
-        <p:spPr>
-          <a:xfrm>
-            <a:off x="1143000" y="1554480"/>
-            <a:ext cx="1828800" cy="365760"/>
-          </a:xfrm>
-          <a:prstGeom prst="rect">
-            <a:avLst/>
-          </a:prstGeom>
-          <a:noFill/>
-          <a:ln/>
-        </p:spPr>
-        <p:txBody>
-          <a:bodyPr wrap="square" lIns="0" tIns="0" rIns="0" bIns="0" rtlCol="0" anchor="ctr"/>
-          <a:lstStyle/>
-          <a:p>
-            <a:pPr indent="0" marL="0">
-              <a:buNone/>
-            </a:pPr>
-            <a:r>
-              <a:rPr lang="en-US" sz="1400" b="1" dirty="0">
+          <p:cNvPr id="12" name="Text 9"/>
+          <p:cNvSpPr/>
+          <p:nvPr/>
+        </p:nvSpPr>
+        <p:spPr>
+          <a:xfrm>
+            <a:off x="7315200" y="2194560"/>
+            <a:ext cx="1280160" cy="274320"/>
+          </a:xfrm>
+          <a:prstGeom prst="rect">
+            <a:avLst/>
+          </a:prstGeom>
+          <a:noFill/>
+          <a:ln/>
+        </p:spPr>
+        <p:txBody>
+          <a:bodyPr wrap="square" lIns="0" tIns="0" rIns="0" bIns="0" rtlCol="0" anchor="ctr"/>
+          <a:lstStyle/>
+          <a:p>
+            <a:pPr marL="0" indent="0" algn="r">
+              <a:buNone/>
+            </a:pPr>
+            <a:r>
+              <a:rPr lang="en-US" sz="1200" b="1" dirty="0">
                 <a:solidFill>
                   <a:srgbClr val="FFFFFF"/>
                 </a:solidFill>
@@ -4924,85 +5174,7 @@
                 <a:ea typeface="Arial" pitchFamily="34" charset="-122"/>
                 <a:cs typeface="Arial" pitchFamily="34" charset="-120"/>
               </a:rPr>
-              <a:t>Polymarket</a:t>
-            </a:r>
-            <a:endParaRPr lang="en-US" sz="1400" dirty="0"/>
-          </a:p>
-        </p:txBody>
-      </p:sp>
-      <p:sp>
-        <p:nvSpPr>
-          <p:cNvPr id="9" name="Text 7"/>
-          <p:cNvSpPr/>
-          <p:nvPr/>
-        </p:nvSpPr>
-        <p:spPr>
-          <a:xfrm>
-            <a:off x="3200400" y="1554480"/>
-            <a:ext cx="914400" cy="365760"/>
-          </a:xfrm>
-          <a:prstGeom prst="rect">
-            <a:avLst/>
-          </a:prstGeom>
-          <a:noFill/>
-          <a:ln/>
-        </p:spPr>
-        <p:txBody>
-          <a:bodyPr wrap="square" lIns="0" tIns="0" rIns="0" bIns="0" rtlCol="0" anchor="ctr"/>
-          <a:lstStyle/>
-          <a:p>
-            <a:pPr indent="0" marL="0">
-              <a:buNone/>
-            </a:pPr>
-            <a:r>
-              <a:rPr lang="en-US" sz="1400" b="1" dirty="0">
-                <a:solidFill>
-                  <a:srgbClr val="00D4AA"/>
-                </a:solidFill>
-                <a:latin typeface="Arial" pitchFamily="34" charset="0"/>
-                <a:ea typeface="Arial" pitchFamily="34" charset="-122"/>
-                <a:cs typeface="Arial" pitchFamily="34" charset="-120"/>
-              </a:rPr>
-              <a:t>20%</a:t>
-            </a:r>
-            <a:endParaRPr lang="en-US" sz="1400" dirty="0"/>
-          </a:p>
-        </p:txBody>
-      </p:sp>
-      <p:sp>
-        <p:nvSpPr>
-          <p:cNvPr id="10" name="Text 8"/>
-          <p:cNvSpPr/>
-          <p:nvPr/>
-        </p:nvSpPr>
-        <p:spPr>
-          <a:xfrm>
-            <a:off x="4572000" y="1554480"/>
-            <a:ext cx="3200400" cy="365760"/>
-          </a:xfrm>
-          <a:prstGeom prst="rect">
-            <a:avLst/>
-          </a:prstGeom>
-          <a:noFill/>
-          <a:ln/>
-        </p:spPr>
-        <p:txBody>
-          <a:bodyPr wrap="square" lIns="0" tIns="0" rIns="0" bIns="0" rtlCol="0" anchor="ctr"/>
-          <a:lstStyle/>
-          <a:p>
-            <a:pPr indent="0" marL="0">
-              <a:buNone/>
-            </a:pPr>
-            <a:r>
-              <a:rPr lang="en-US" sz="1200" dirty="0">
-                <a:solidFill>
-                  <a:srgbClr val="E4E4E7"/>
-                </a:solidFill>
-                <a:latin typeface="Arial" pitchFamily="34" charset="0"/>
-                <a:ea typeface="Arial" pitchFamily="34" charset="-122"/>
-                <a:cs typeface="Arial" pitchFamily="34" charset="-120"/>
-              </a:rPr>
-              <a:t>Gamma API</a:t>
+              <a:t>66.9%</a:t>
             </a:r>
             <a:endParaRPr lang="en-US" sz="1200" dirty="0"/>
           </a:p>
@@ -5010,50 +5182,69 @@
       </p:sp>
       <p:sp>
         <p:nvSpPr>
-          <p:cNvPr id="11" name="Shape 9"/>
-          <p:cNvSpPr/>
-          <p:nvPr/>
-        </p:nvSpPr>
-        <p:spPr>
-          <a:xfrm>
-            <a:off x="822960" y="2148840"/>
-            <a:ext cx="164592" cy="164592"/>
-          </a:xfrm>
-          <a:prstGeom prst="ellipse">
-            <a:avLst/>
-          </a:prstGeom>
-          <a:solidFill>
-            <a:srgbClr val="6C5CE7"/>
-          </a:solidFill>
-          <a:ln/>
-        </p:spPr>
-      </p:sp>
-      <p:sp>
-        <p:nvSpPr>
-          <p:cNvPr id="12" name="Text 10"/>
-          <p:cNvSpPr/>
-          <p:nvPr/>
-        </p:nvSpPr>
-        <p:spPr>
-          <a:xfrm>
-            <a:off x="1143000" y="2057400"/>
-            <a:ext cx="1828800" cy="365760"/>
-          </a:xfrm>
-          <a:prstGeom prst="rect">
-            <a:avLst/>
-          </a:prstGeom>
-          <a:noFill/>
-          <a:ln/>
-        </p:spPr>
-        <p:txBody>
-          <a:bodyPr wrap="square" lIns="0" tIns="0" rIns="0" bIns="0" rtlCol="0" anchor="ctr"/>
-          <a:lstStyle/>
-          <a:p>
-            <a:pPr indent="0" marL="0">
-              <a:buNone/>
-            </a:pPr>
-            <a:r>
-              <a:rPr lang="en-US" sz="1400" b="1" dirty="0">
+          <p:cNvPr id="13" name="Text 10"/>
+          <p:cNvSpPr/>
+          <p:nvPr/>
+        </p:nvSpPr>
+        <p:spPr>
+          <a:xfrm>
+            <a:off x="5943600" y="2514600"/>
+            <a:ext cx="1371600" cy="274320"/>
+          </a:xfrm>
+          <a:prstGeom prst="rect">
+            <a:avLst/>
+          </a:prstGeom>
+          <a:noFill/>
+          <a:ln/>
+        </p:spPr>
+        <p:txBody>
+          <a:bodyPr wrap="square" lIns="0" tIns="0" rIns="0" bIns="0" rtlCol="0" anchor="ctr"/>
+          <a:lstStyle/>
+          <a:p>
+            <a:pPr marL="0" indent="0">
+              <a:buNone/>
+            </a:pPr>
+            <a:r>
+              <a:rPr lang="en-US" sz="1100" dirty="0">
+                <a:solidFill>
+                  <a:srgbClr val="71717A"/>
+                </a:solidFill>
+                <a:latin typeface="Arial" pitchFamily="34" charset="0"/>
+                <a:ea typeface="Arial" pitchFamily="34" charset="-122"/>
+                <a:cs typeface="Arial" pitchFamily="34" charset="-120"/>
+              </a:rPr>
+              <a:t>F1 Score</a:t>
+            </a:r>
+            <a:endParaRPr lang="en-US" sz="1100" dirty="0"/>
+          </a:p>
+        </p:txBody>
+      </p:sp>
+      <p:sp>
+        <p:nvSpPr>
+          <p:cNvPr id="14" name="Text 11"/>
+          <p:cNvSpPr/>
+          <p:nvPr/>
+        </p:nvSpPr>
+        <p:spPr>
+          <a:xfrm>
+            <a:off x="7315200" y="2514600"/>
+            <a:ext cx="1280160" cy="274320"/>
+          </a:xfrm>
+          <a:prstGeom prst="rect">
+            <a:avLst/>
+          </a:prstGeom>
+          <a:noFill/>
+          <a:ln/>
+        </p:spPr>
+        <p:txBody>
+          <a:bodyPr wrap="square" lIns="0" tIns="0" rIns="0" bIns="0" rtlCol="0" anchor="ctr"/>
+          <a:lstStyle/>
+          <a:p>
+            <a:pPr marL="0" indent="0" algn="r">
+              <a:buNone/>
+            </a:pPr>
+            <a:r>
+              <a:rPr lang="en-US" sz="1200" b="1" dirty="0">
                 <a:solidFill>
                   <a:srgbClr val="FFFFFF"/>
                 </a:solidFill>
@@ -5061,85 +5252,7 @@
                 <a:ea typeface="Arial" pitchFamily="34" charset="-122"/>
                 <a:cs typeface="Arial" pitchFamily="34" charset="-120"/>
               </a:rPr>
-              <a:t>Order Flow</a:t>
-            </a:r>
-            <a:endParaRPr lang="en-US" sz="1400" dirty="0"/>
-          </a:p>
-        </p:txBody>
-      </p:sp>
-      <p:sp>
-        <p:nvSpPr>
-          <p:cNvPr id="13" name="Text 11"/>
-          <p:cNvSpPr/>
-          <p:nvPr/>
-        </p:nvSpPr>
-        <p:spPr>
-          <a:xfrm>
-            <a:off x="3200400" y="2057400"/>
-            <a:ext cx="914400" cy="365760"/>
-          </a:xfrm>
-          <a:prstGeom prst="rect">
-            <a:avLst/>
-          </a:prstGeom>
-          <a:noFill/>
-          <a:ln/>
-        </p:spPr>
-        <p:txBody>
-          <a:bodyPr wrap="square" lIns="0" tIns="0" rIns="0" bIns="0" rtlCol="0" anchor="ctr"/>
-          <a:lstStyle/>
-          <a:p>
-            <a:pPr indent="0" marL="0">
-              <a:buNone/>
-            </a:pPr>
-            <a:r>
-              <a:rPr lang="en-US" sz="1400" b="1" dirty="0">
-                <a:solidFill>
-                  <a:srgbClr val="00D4AA"/>
-                </a:solidFill>
-                <a:latin typeface="Arial" pitchFamily="34" charset="0"/>
-                <a:ea typeface="Arial" pitchFamily="34" charset="-122"/>
-                <a:cs typeface="Arial" pitchFamily="34" charset="-120"/>
-              </a:rPr>
-              <a:t>15%</a:t>
-            </a:r>
-            <a:endParaRPr lang="en-US" sz="1400" dirty="0"/>
-          </a:p>
-        </p:txBody>
-      </p:sp>
-      <p:sp>
-        <p:nvSpPr>
-          <p:cNvPr id="14" name="Text 12"/>
-          <p:cNvSpPr/>
-          <p:nvPr/>
-        </p:nvSpPr>
-        <p:spPr>
-          <a:xfrm>
-            <a:off x="4572000" y="2057400"/>
-            <a:ext cx="3200400" cy="365760"/>
-          </a:xfrm>
-          <a:prstGeom prst="rect">
-            <a:avLst/>
-          </a:prstGeom>
-          <a:noFill/>
-          <a:ln/>
-        </p:spPr>
-        <p:txBody>
-          <a:bodyPr wrap="square" lIns="0" tIns="0" rIns="0" bIns="0" rtlCol="0" anchor="ctr"/>
-          <a:lstStyle/>
-          <a:p>
-            <a:pPr indent="0" marL="0">
-              <a:buNone/>
-            </a:pPr>
-            <a:r>
-              <a:rPr lang="en-US" sz="1200" dirty="0">
-                <a:solidFill>
-                  <a:srgbClr val="E4E4E7"/>
-                </a:solidFill>
-                <a:latin typeface="Arial" pitchFamily="34" charset="0"/>
-                <a:ea typeface="Arial" pitchFamily="34" charset="-122"/>
-                <a:cs typeface="Arial" pitchFamily="34" charset="-120"/>
-              </a:rPr>
-              <a:t>Binance.US + Coinbase</a:t>
+              <a:t>67.0%</a:t>
             </a:r>
             <a:endParaRPr lang="en-US" sz="1200" dirty="0"/>
           </a:p>
@@ -5147,50 +5260,69 @@
       </p:sp>
       <p:sp>
         <p:nvSpPr>
-          <p:cNvPr id="15" name="Shape 13"/>
-          <p:cNvSpPr/>
-          <p:nvPr/>
-        </p:nvSpPr>
-        <p:spPr>
-          <a:xfrm>
-            <a:off x="822960" y="2651760"/>
-            <a:ext cx="164592" cy="164592"/>
-          </a:xfrm>
-          <a:prstGeom prst="ellipse">
-            <a:avLst/>
-          </a:prstGeom>
-          <a:solidFill>
-            <a:srgbClr val="00D4AA"/>
-          </a:solidFill>
-          <a:ln/>
-        </p:spPr>
-      </p:sp>
-      <p:sp>
-        <p:nvSpPr>
-          <p:cNvPr id="16" name="Text 14"/>
-          <p:cNvSpPr/>
-          <p:nvPr/>
-        </p:nvSpPr>
-        <p:spPr>
-          <a:xfrm>
-            <a:off x="1143000" y="2560320"/>
-            <a:ext cx="1828800" cy="365760"/>
-          </a:xfrm>
-          <a:prstGeom prst="rect">
-            <a:avLst/>
-          </a:prstGeom>
-          <a:noFill/>
-          <a:ln/>
-        </p:spPr>
-        <p:txBody>
-          <a:bodyPr wrap="square" lIns="0" tIns="0" rIns="0" bIns="0" rtlCol="0" anchor="ctr"/>
-          <a:lstStyle/>
-          <a:p>
-            <a:pPr indent="0" marL="0">
-              <a:buNone/>
-            </a:pPr>
-            <a:r>
-              <a:rPr lang="en-US" sz="1400" b="1" dirty="0">
+          <p:cNvPr id="15" name="Text 12"/>
+          <p:cNvSpPr/>
+          <p:nvPr/>
+        </p:nvSpPr>
+        <p:spPr>
+          <a:xfrm>
+            <a:off x="5943600" y="2834640"/>
+            <a:ext cx="1371600" cy="274320"/>
+          </a:xfrm>
+          <a:prstGeom prst="rect">
+            <a:avLst/>
+          </a:prstGeom>
+          <a:noFill/>
+          <a:ln/>
+        </p:spPr>
+        <p:txBody>
+          <a:bodyPr wrap="square" lIns="0" tIns="0" rIns="0" bIns="0" rtlCol="0" anchor="ctr"/>
+          <a:lstStyle/>
+          <a:p>
+            <a:pPr marL="0" indent="0">
+              <a:buNone/>
+            </a:pPr>
+            <a:r>
+              <a:rPr lang="en-US" sz="1100" dirty="0">
+                <a:solidFill>
+                  <a:srgbClr val="71717A"/>
+                </a:solidFill>
+                <a:latin typeface="Arial" pitchFamily="34" charset="0"/>
+                <a:ea typeface="Arial" pitchFamily="34" charset="-122"/>
+                <a:cs typeface="Arial" pitchFamily="34" charset="-120"/>
+              </a:rPr>
+              <a:t>AUC-ROC</a:t>
+            </a:r>
+            <a:endParaRPr lang="en-US" sz="1100" dirty="0"/>
+          </a:p>
+        </p:txBody>
+      </p:sp>
+      <p:sp>
+        <p:nvSpPr>
+          <p:cNvPr id="16" name="Text 13"/>
+          <p:cNvSpPr/>
+          <p:nvPr/>
+        </p:nvSpPr>
+        <p:spPr>
+          <a:xfrm>
+            <a:off x="7315200" y="2834640"/>
+            <a:ext cx="1280160" cy="274320"/>
+          </a:xfrm>
+          <a:prstGeom prst="rect">
+            <a:avLst/>
+          </a:prstGeom>
+          <a:noFill/>
+          <a:ln/>
+        </p:spPr>
+        <p:txBody>
+          <a:bodyPr wrap="square" lIns="0" tIns="0" rIns="0" bIns="0" rtlCol="0" anchor="ctr"/>
+          <a:lstStyle/>
+          <a:p>
+            <a:pPr marL="0" indent="0" algn="r">
+              <a:buNone/>
+            </a:pPr>
+            <a:r>
+              <a:rPr lang="en-US" sz="1200" b="1" dirty="0">
                 <a:solidFill>
                   <a:srgbClr val="FFFFFF"/>
                 </a:solidFill>
@@ -5198,85 +5330,7 @@
                 <a:ea typeface="Arial" pitchFamily="34" charset="-122"/>
                 <a:cs typeface="Arial" pitchFamily="34" charset="-120"/>
               </a:rPr>
-              <a:t>Our Model</a:t>
-            </a:r>
-            <a:endParaRPr lang="en-US" sz="1400" dirty="0"/>
-          </a:p>
-        </p:txBody>
-      </p:sp>
-      <p:sp>
-        <p:nvSpPr>
-          <p:cNvPr id="17" name="Text 15"/>
-          <p:cNvSpPr/>
-          <p:nvPr/>
-        </p:nvSpPr>
-        <p:spPr>
-          <a:xfrm>
-            <a:off x="3200400" y="2560320"/>
-            <a:ext cx="914400" cy="365760"/>
-          </a:xfrm>
-          <a:prstGeom prst="rect">
-            <a:avLst/>
-          </a:prstGeom>
-          <a:noFill/>
-          <a:ln/>
-        </p:spPr>
-        <p:txBody>
-          <a:bodyPr wrap="square" lIns="0" tIns="0" rIns="0" bIns="0" rtlCol="0" anchor="ctr"/>
-          <a:lstStyle/>
-          <a:p>
-            <a:pPr indent="0" marL="0">
-              <a:buNone/>
-            </a:pPr>
-            <a:r>
-              <a:rPr lang="en-US" sz="1400" b="1" dirty="0">
-                <a:solidFill>
-                  <a:srgbClr val="00D4AA"/>
-                </a:solidFill>
-                <a:latin typeface="Arial" pitchFamily="34" charset="0"/>
-                <a:ea typeface="Arial" pitchFamily="34" charset="-122"/>
-                <a:cs typeface="Arial" pitchFamily="34" charset="-120"/>
-              </a:rPr>
-              <a:t>20%</a:t>
-            </a:r>
-            <a:endParaRPr lang="en-US" sz="1400" dirty="0"/>
-          </a:p>
-        </p:txBody>
-      </p:sp>
-      <p:sp>
-        <p:nvSpPr>
-          <p:cNvPr id="18" name="Text 16"/>
-          <p:cNvSpPr/>
-          <p:nvPr/>
-        </p:nvSpPr>
-        <p:spPr>
-          <a:xfrm>
-            <a:off x="4572000" y="2560320"/>
-            <a:ext cx="3200400" cy="365760"/>
-          </a:xfrm>
-          <a:prstGeom prst="rect">
-            <a:avLst/>
-          </a:prstGeom>
-          <a:noFill/>
-          <a:ln/>
-        </p:spPr>
-        <p:txBody>
-          <a:bodyPr wrap="square" lIns="0" tIns="0" rIns="0" bIns="0" rtlCol="0" anchor="ctr"/>
-          <a:lstStyle/>
-          <a:p>
-            <a:pPr indent="0" marL="0">
-              <a:buNone/>
-            </a:pPr>
-            <a:r>
-              <a:rPr lang="en-US" sz="1200" dirty="0">
-                <a:solidFill>
-                  <a:srgbClr val="E4E4E7"/>
-                </a:solidFill>
-                <a:latin typeface="Arial" pitchFamily="34" charset="0"/>
-                <a:ea typeface="Arial" pitchFamily="34" charset="-122"/>
-                <a:cs typeface="Arial" pitchFamily="34" charset="-120"/>
-              </a:rPr>
-              <a:t>BGeometrics on-chain</a:t>
+              <a:t>0.7365</a:t>
             </a:r>
             <a:endParaRPr lang="en-US" sz="1200" dirty="0"/>
           </a:p>
@@ -5284,50 +5338,69 @@
       </p:sp>
       <p:sp>
         <p:nvSpPr>
-          <p:cNvPr id="19" name="Shape 17"/>
-          <p:cNvSpPr/>
-          <p:nvPr/>
-        </p:nvSpPr>
-        <p:spPr>
-          <a:xfrm>
-            <a:off x="822960" y="3154680"/>
-            <a:ext cx="164592" cy="164592"/>
-          </a:xfrm>
-          <a:prstGeom prst="ellipse">
-            <a:avLst/>
-          </a:prstGeom>
-          <a:solidFill>
-            <a:srgbClr val="FFD93D"/>
-          </a:solidFill>
-          <a:ln/>
-        </p:spPr>
-      </p:sp>
-      <p:sp>
-        <p:nvSpPr>
-          <p:cNvPr id="20" name="Text 18"/>
-          <p:cNvSpPr/>
-          <p:nvPr/>
-        </p:nvSpPr>
-        <p:spPr>
-          <a:xfrm>
-            <a:off x="1143000" y="3063240"/>
-            <a:ext cx="1828800" cy="365760"/>
-          </a:xfrm>
-          <a:prstGeom prst="rect">
-            <a:avLst/>
-          </a:prstGeom>
-          <a:noFill/>
-          <a:ln/>
-        </p:spPr>
-        <p:txBody>
-          <a:bodyPr wrap="square" lIns="0" tIns="0" rIns="0" bIns="0" rtlCol="0" anchor="ctr"/>
-          <a:lstStyle/>
-          <a:p>
-            <a:pPr indent="0" marL="0">
-              <a:buNone/>
-            </a:pPr>
-            <a:r>
-              <a:rPr lang="en-US" sz="1400" b="1" dirty="0">
+          <p:cNvPr id="17" name="Text 14"/>
+          <p:cNvSpPr/>
+          <p:nvPr/>
+        </p:nvSpPr>
+        <p:spPr>
+          <a:xfrm>
+            <a:off x="5943600" y="3154680"/>
+            <a:ext cx="1371600" cy="274320"/>
+          </a:xfrm>
+          <a:prstGeom prst="rect">
+            <a:avLst/>
+          </a:prstGeom>
+          <a:noFill/>
+          <a:ln/>
+        </p:spPr>
+        <p:txBody>
+          <a:bodyPr wrap="square" lIns="0" tIns="0" rIns="0" bIns="0" rtlCol="0" anchor="ctr"/>
+          <a:lstStyle/>
+          <a:p>
+            <a:pPr marL="0" indent="0">
+              <a:buNone/>
+            </a:pPr>
+            <a:r>
+              <a:rPr lang="en-US" sz="1100" dirty="0">
+                <a:solidFill>
+                  <a:srgbClr val="71717A"/>
+                </a:solidFill>
+                <a:latin typeface="Arial" pitchFamily="34" charset="0"/>
+                <a:ea typeface="Arial" pitchFamily="34" charset="-122"/>
+                <a:cs typeface="Arial" pitchFamily="34" charset="-120"/>
+              </a:rPr>
+              <a:t>MCC</a:t>
+            </a:r>
+            <a:endParaRPr lang="en-US" sz="1100" dirty="0"/>
+          </a:p>
+        </p:txBody>
+      </p:sp>
+      <p:sp>
+        <p:nvSpPr>
+          <p:cNvPr id="18" name="Text 15"/>
+          <p:cNvSpPr/>
+          <p:nvPr/>
+        </p:nvSpPr>
+        <p:spPr>
+          <a:xfrm>
+            <a:off x="7315200" y="3154680"/>
+            <a:ext cx="1280160" cy="274320"/>
+          </a:xfrm>
+          <a:prstGeom prst="rect">
+            <a:avLst/>
+          </a:prstGeom>
+          <a:noFill/>
+          <a:ln/>
+        </p:spPr>
+        <p:txBody>
+          <a:bodyPr wrap="square" lIns="0" tIns="0" rIns="0" bIns="0" rtlCol="0" anchor="ctr"/>
+          <a:lstStyle/>
+          <a:p>
+            <a:pPr marL="0" indent="0" algn="r">
+              <a:buNone/>
+            </a:pPr>
+            <a:r>
+              <a:rPr lang="en-US" sz="1200" b="1" dirty="0">
                 <a:solidFill>
                   <a:srgbClr val="FFFFFF"/>
                 </a:solidFill>
@@ -5335,85 +5408,7 @@
                 <a:ea typeface="Arial" pitchFamily="34" charset="-122"/>
                 <a:cs typeface="Arial" pitchFamily="34" charset="-120"/>
               </a:rPr>
-              <a:t>Technical</a:t>
-            </a:r>
-            <a:endParaRPr lang="en-US" sz="1400" dirty="0"/>
-          </a:p>
-        </p:txBody>
-      </p:sp>
-      <p:sp>
-        <p:nvSpPr>
-          <p:cNvPr id="21" name="Text 19"/>
-          <p:cNvSpPr/>
-          <p:nvPr/>
-        </p:nvSpPr>
-        <p:spPr>
-          <a:xfrm>
-            <a:off x="3200400" y="3063240"/>
-            <a:ext cx="914400" cy="365760"/>
-          </a:xfrm>
-          <a:prstGeom prst="rect">
-            <a:avLst/>
-          </a:prstGeom>
-          <a:noFill/>
-          <a:ln/>
-        </p:spPr>
-        <p:txBody>
-          <a:bodyPr wrap="square" lIns="0" tIns="0" rIns="0" bIns="0" rtlCol="0" anchor="ctr"/>
-          <a:lstStyle/>
-          <a:p>
-            <a:pPr indent="0" marL="0">
-              <a:buNone/>
-            </a:pPr>
-            <a:r>
-              <a:rPr lang="en-US" sz="1400" b="1" dirty="0">
-                <a:solidFill>
-                  <a:srgbClr val="00D4AA"/>
-                </a:solidFill>
-                <a:latin typeface="Arial" pitchFamily="34" charset="0"/>
-                <a:ea typeface="Arial" pitchFamily="34" charset="-122"/>
-                <a:cs typeface="Arial" pitchFamily="34" charset="-120"/>
-              </a:rPr>
-              <a:t>20%</a:t>
-            </a:r>
-            <a:endParaRPr lang="en-US" sz="1400" dirty="0"/>
-          </a:p>
-        </p:txBody>
-      </p:sp>
-      <p:sp>
-        <p:nvSpPr>
-          <p:cNvPr id="22" name="Text 20"/>
-          <p:cNvSpPr/>
-          <p:nvPr/>
-        </p:nvSpPr>
-        <p:spPr>
-          <a:xfrm>
-            <a:off x="4572000" y="3063240"/>
-            <a:ext cx="3200400" cy="365760"/>
-          </a:xfrm>
-          <a:prstGeom prst="rect">
-            <a:avLst/>
-          </a:prstGeom>
-          <a:noFill/>
-          <a:ln/>
-        </p:spPr>
-        <p:txBody>
-          <a:bodyPr wrap="square" lIns="0" tIns="0" rIns="0" bIns="0" rtlCol="0" anchor="ctr"/>
-          <a:lstStyle/>
-          <a:p>
-            <a:pPr indent="0" marL="0">
-              <a:buNone/>
-            </a:pPr>
-            <a:r>
-              <a:rPr lang="en-US" sz="1200" dirty="0">
-                <a:solidFill>
-                  <a:srgbClr val="E4E4E7"/>
-                </a:solidFill>
-                <a:latin typeface="Arial" pitchFamily="34" charset="0"/>
-                <a:ea typeface="Arial" pitchFamily="34" charset="-122"/>
-                <a:cs typeface="Arial" pitchFamily="34" charset="-120"/>
-              </a:rPr>
-              <a:t>TrueMarkets MCP</a:t>
+              <a:t>0.348</a:t>
             </a:r>
             <a:endParaRPr lang="en-US" sz="1200" dirty="0"/>
           </a:p>
@@ -5421,50 +5416,69 @@
       </p:sp>
       <p:sp>
         <p:nvSpPr>
-          <p:cNvPr id="23" name="Shape 21"/>
-          <p:cNvSpPr/>
-          <p:nvPr/>
-        </p:nvSpPr>
-        <p:spPr>
-          <a:xfrm>
-            <a:off x="822960" y="3657600"/>
-            <a:ext cx="164592" cy="164592"/>
-          </a:xfrm>
-          <a:prstGeom prst="ellipse">
-            <a:avLst/>
-          </a:prstGeom>
-          <a:solidFill>
-            <a:srgbClr val="A855F7"/>
-          </a:solidFill>
-          <a:ln/>
-        </p:spPr>
-      </p:sp>
-      <p:sp>
-        <p:nvSpPr>
-          <p:cNvPr id="24" name="Text 22"/>
-          <p:cNvSpPr/>
-          <p:nvPr/>
-        </p:nvSpPr>
-        <p:spPr>
-          <a:xfrm>
-            <a:off x="1143000" y="3566160"/>
-            <a:ext cx="1828800" cy="365760"/>
-          </a:xfrm>
-          <a:prstGeom prst="rect">
-            <a:avLst/>
-          </a:prstGeom>
-          <a:noFill/>
-          <a:ln/>
-        </p:spPr>
-        <p:txBody>
-          <a:bodyPr wrap="square" lIns="0" tIns="0" rIns="0" bIns="0" rtlCol="0" anchor="ctr"/>
-          <a:lstStyle/>
-          <a:p>
-            <a:pPr indent="0" marL="0">
-              <a:buNone/>
-            </a:pPr>
-            <a:r>
-              <a:rPr lang="en-US" sz="1400" b="1" dirty="0">
+          <p:cNvPr id="19" name="Text 16"/>
+          <p:cNvSpPr/>
+          <p:nvPr/>
+        </p:nvSpPr>
+        <p:spPr>
+          <a:xfrm>
+            <a:off x="5943600" y="3474720"/>
+            <a:ext cx="1371600" cy="274320"/>
+          </a:xfrm>
+          <a:prstGeom prst="rect">
+            <a:avLst/>
+          </a:prstGeom>
+          <a:noFill/>
+          <a:ln/>
+        </p:spPr>
+        <p:txBody>
+          <a:bodyPr wrap="square" lIns="0" tIns="0" rIns="0" bIns="0" rtlCol="0" anchor="ctr"/>
+          <a:lstStyle/>
+          <a:p>
+            <a:pPr marL="0" indent="0">
+              <a:buNone/>
+            </a:pPr>
+            <a:r>
+              <a:rPr lang="en-US" sz="1100" dirty="0">
+                <a:solidFill>
+                  <a:srgbClr val="71717A"/>
+                </a:solidFill>
+                <a:latin typeface="Arial" pitchFamily="34" charset="0"/>
+                <a:ea typeface="Arial" pitchFamily="34" charset="-122"/>
+                <a:cs typeface="Arial" pitchFamily="34" charset="-120"/>
+              </a:rPr>
+              <a:t>Test Days</a:t>
+            </a:r>
+            <a:endParaRPr lang="en-US" sz="1100" dirty="0"/>
+          </a:p>
+        </p:txBody>
+      </p:sp>
+      <p:sp>
+        <p:nvSpPr>
+          <p:cNvPr id="20" name="Text 17"/>
+          <p:cNvSpPr/>
+          <p:nvPr/>
+        </p:nvSpPr>
+        <p:spPr>
+          <a:xfrm>
+            <a:off x="7315200" y="3474720"/>
+            <a:ext cx="1280160" cy="274320"/>
+          </a:xfrm>
+          <a:prstGeom prst="rect">
+            <a:avLst/>
+          </a:prstGeom>
+          <a:noFill/>
+          <a:ln/>
+        </p:spPr>
+        <p:txBody>
+          <a:bodyPr wrap="square" lIns="0" tIns="0" rIns="0" bIns="0" rtlCol="0" anchor="ctr"/>
+          <a:lstStyle/>
+          <a:p>
+            <a:pPr marL="0" indent="0" algn="r">
+              <a:buNone/>
+            </a:pPr>
+            <a:r>
+              <a:rPr lang="en-US" sz="1200" b="1" dirty="0">
                 <a:solidFill>
                   <a:srgbClr val="FFFFFF"/>
                 </a:solidFill>
@@ -5472,85 +5486,7 @@
                 <a:ea typeface="Arial" pitchFamily="34" charset="-122"/>
                 <a:cs typeface="Arial" pitchFamily="34" charset="-120"/>
               </a:rPr>
-              <a:t>TM Sentiment</a:t>
-            </a:r>
-            <a:endParaRPr lang="en-US" sz="1400" dirty="0"/>
-          </a:p>
-        </p:txBody>
-      </p:sp>
-      <p:sp>
-        <p:nvSpPr>
-          <p:cNvPr id="25" name="Text 23"/>
-          <p:cNvSpPr/>
-          <p:nvPr/>
-        </p:nvSpPr>
-        <p:spPr>
-          <a:xfrm>
-            <a:off x="3200400" y="3566160"/>
-            <a:ext cx="914400" cy="365760"/>
-          </a:xfrm>
-          <a:prstGeom prst="rect">
-            <a:avLst/>
-          </a:prstGeom>
-          <a:noFill/>
-          <a:ln/>
-        </p:spPr>
-        <p:txBody>
-          <a:bodyPr wrap="square" lIns="0" tIns="0" rIns="0" bIns="0" rtlCol="0" anchor="ctr"/>
-          <a:lstStyle/>
-          <a:p>
-            <a:pPr indent="0" marL="0">
-              <a:buNone/>
-            </a:pPr>
-            <a:r>
-              <a:rPr lang="en-US" sz="1400" b="1" dirty="0">
-                <a:solidFill>
-                  <a:srgbClr val="00D4AA"/>
-                </a:solidFill>
-                <a:latin typeface="Arial" pitchFamily="34" charset="0"/>
-                <a:ea typeface="Arial" pitchFamily="34" charset="-122"/>
-                <a:cs typeface="Arial" pitchFamily="34" charset="-120"/>
-              </a:rPr>
-              <a:t>10%</a:t>
-            </a:r>
-            <a:endParaRPr lang="en-US" sz="1400" dirty="0"/>
-          </a:p>
-        </p:txBody>
-      </p:sp>
-      <p:sp>
-        <p:nvSpPr>
-          <p:cNvPr id="26" name="Text 24"/>
-          <p:cNvSpPr/>
-          <p:nvPr/>
-        </p:nvSpPr>
-        <p:spPr>
-          <a:xfrm>
-            <a:off x="4572000" y="3566160"/>
-            <a:ext cx="3200400" cy="365760"/>
-          </a:xfrm>
-          <a:prstGeom prst="rect">
-            <a:avLst/>
-          </a:prstGeom>
-          <a:noFill/>
-          <a:ln/>
-        </p:spPr>
-        <p:txBody>
-          <a:bodyPr wrap="square" lIns="0" tIns="0" rIns="0" bIns="0" rtlCol="0" anchor="ctr"/>
-          <a:lstStyle/>
-          <a:p>
-            <a:pPr indent="0" marL="0">
-              <a:buNone/>
-            </a:pPr>
-            <a:r>
-              <a:rPr lang="en-US" sz="1200" dirty="0">
-                <a:solidFill>
-                  <a:srgbClr val="E4E4E7"/>
-                </a:solidFill>
-                <a:latin typeface="Arial" pitchFamily="34" charset="0"/>
-                <a:ea typeface="Arial" pitchFamily="34" charset="-122"/>
-                <a:cs typeface="Arial" pitchFamily="34" charset="-120"/>
-              </a:rPr>
-              <a:t>TrueMarkets MCP</a:t>
+              <a:t>359</a:t>
             </a:r>
             <a:endParaRPr lang="en-US" sz="1200" dirty="0"/>
           </a:p>
@@ -5558,50 +5494,69 @@
       </p:sp>
       <p:sp>
         <p:nvSpPr>
-          <p:cNvPr id="27" name="Shape 25"/>
-          <p:cNvSpPr/>
-          <p:nvPr/>
-        </p:nvSpPr>
-        <p:spPr>
-          <a:xfrm>
-            <a:off x="822960" y="4160520"/>
-            <a:ext cx="164592" cy="164592"/>
-          </a:xfrm>
-          <a:prstGeom prst="ellipse">
-            <a:avLst/>
-          </a:prstGeom>
-          <a:solidFill>
-            <a:srgbClr val="FF6B6B"/>
-          </a:solidFill>
-          <a:ln/>
-        </p:spPr>
-      </p:sp>
-      <p:sp>
-        <p:nvSpPr>
-          <p:cNvPr id="28" name="Text 26"/>
-          <p:cNvSpPr/>
-          <p:nvPr/>
-        </p:nvSpPr>
-        <p:spPr>
-          <a:xfrm>
-            <a:off x="1143000" y="4069080"/>
-            <a:ext cx="1828800" cy="365760"/>
-          </a:xfrm>
-          <a:prstGeom prst="rect">
-            <a:avLst/>
-          </a:prstGeom>
-          <a:noFill/>
-          <a:ln/>
-        </p:spPr>
-        <p:txBody>
-          <a:bodyPr wrap="square" lIns="0" tIns="0" rIns="0" bIns="0" rtlCol="0" anchor="ctr"/>
-          <a:lstStyle/>
-          <a:p>
-            <a:pPr indent="0" marL="0">
-              <a:buNone/>
-            </a:pPr>
-            <a:r>
-              <a:rPr lang="en-US" sz="1400" b="1" dirty="0">
+          <p:cNvPr id="21" name="Text 18"/>
+          <p:cNvSpPr/>
+          <p:nvPr/>
+        </p:nvSpPr>
+        <p:spPr>
+          <a:xfrm>
+            <a:off x="5943600" y="3794760"/>
+            <a:ext cx="1371600" cy="274320"/>
+          </a:xfrm>
+          <a:prstGeom prst="rect">
+            <a:avLst/>
+          </a:prstGeom>
+          <a:noFill/>
+          <a:ln/>
+        </p:spPr>
+        <p:txBody>
+          <a:bodyPr wrap="square" lIns="0" tIns="0" rIns="0" bIns="0" rtlCol="0" anchor="ctr"/>
+          <a:lstStyle/>
+          <a:p>
+            <a:pPr marL="0" indent="0">
+              <a:buNone/>
+            </a:pPr>
+            <a:r>
+              <a:rPr lang="en-US" sz="1100" dirty="0">
+                <a:solidFill>
+                  <a:srgbClr val="71717A"/>
+                </a:solidFill>
+                <a:latin typeface="Arial" pitchFamily="34" charset="0"/>
+                <a:ea typeface="Arial" pitchFamily="34" charset="-122"/>
+                <a:cs typeface="Arial" pitchFamily="34" charset="-120"/>
+              </a:rPr>
+              <a:t>Train Days</a:t>
+            </a:r>
+            <a:endParaRPr lang="en-US" sz="1100" dirty="0"/>
+          </a:p>
+        </p:txBody>
+      </p:sp>
+      <p:sp>
+        <p:nvSpPr>
+          <p:cNvPr id="22" name="Text 19"/>
+          <p:cNvSpPr/>
+          <p:nvPr/>
+        </p:nvSpPr>
+        <p:spPr>
+          <a:xfrm>
+            <a:off x="7315200" y="3794760"/>
+            <a:ext cx="1280160" cy="274320"/>
+          </a:xfrm>
+          <a:prstGeom prst="rect">
+            <a:avLst/>
+          </a:prstGeom>
+          <a:noFill/>
+          <a:ln/>
+        </p:spPr>
+        <p:txBody>
+          <a:bodyPr wrap="square" lIns="0" tIns="0" rIns="0" bIns="0" rtlCol="0" anchor="ctr"/>
+          <a:lstStyle/>
+          <a:p>
+            <a:pPr marL="0" indent="0" algn="r">
+              <a:buNone/>
+            </a:pPr>
+            <a:r>
+              <a:rPr lang="en-US" sz="1200" b="1" dirty="0">
                 <a:solidFill>
                   <a:srgbClr val="FFFFFF"/>
                 </a:solidFill>
@@ -5609,85 +5564,7 @@
                 <a:ea typeface="Arial" pitchFamily="34" charset="-122"/>
                 <a:cs typeface="Arial" pitchFamily="34" charset="-120"/>
               </a:rPr>
-              <a:t>Fear &amp; Greed</a:t>
-            </a:r>
-            <a:endParaRPr lang="en-US" sz="1400" dirty="0"/>
-          </a:p>
-        </p:txBody>
-      </p:sp>
-      <p:sp>
-        <p:nvSpPr>
-          <p:cNvPr id="29" name="Text 27"/>
-          <p:cNvSpPr/>
-          <p:nvPr/>
-        </p:nvSpPr>
-        <p:spPr>
-          <a:xfrm>
-            <a:off x="3200400" y="4069080"/>
-            <a:ext cx="914400" cy="365760"/>
-          </a:xfrm>
-          <a:prstGeom prst="rect">
-            <a:avLst/>
-          </a:prstGeom>
-          <a:noFill/>
-          <a:ln/>
-        </p:spPr>
-        <p:txBody>
-          <a:bodyPr wrap="square" lIns="0" tIns="0" rIns="0" bIns="0" rtlCol="0" anchor="ctr"/>
-          <a:lstStyle/>
-          <a:p>
-            <a:pPr indent="0" marL="0">
-              <a:buNone/>
-            </a:pPr>
-            <a:r>
-              <a:rPr lang="en-US" sz="1400" b="1" dirty="0">
-                <a:solidFill>
-                  <a:srgbClr val="00D4AA"/>
-                </a:solidFill>
-                <a:latin typeface="Arial" pitchFamily="34" charset="0"/>
-                <a:ea typeface="Arial" pitchFamily="34" charset="-122"/>
-                <a:cs typeface="Arial" pitchFamily="34" charset="-120"/>
-              </a:rPr>
-              <a:t>15%</a:t>
-            </a:r>
-            <a:endParaRPr lang="en-US" sz="1400" dirty="0"/>
-          </a:p>
-        </p:txBody>
-      </p:sp>
-      <p:sp>
-        <p:nvSpPr>
-          <p:cNvPr id="30" name="Text 28"/>
-          <p:cNvSpPr/>
-          <p:nvPr/>
-        </p:nvSpPr>
-        <p:spPr>
-          <a:xfrm>
-            <a:off x="4572000" y="4069080"/>
-            <a:ext cx="3200400" cy="365760"/>
-          </a:xfrm>
-          <a:prstGeom prst="rect">
-            <a:avLst/>
-          </a:prstGeom>
-          <a:noFill/>
-          <a:ln/>
-        </p:spPr>
-        <p:txBody>
-          <a:bodyPr wrap="square" lIns="0" tIns="0" rIns="0" bIns="0" rtlCol="0" anchor="ctr"/>
-          <a:lstStyle/>
-          <a:p>
-            <a:pPr indent="0" marL="0">
-              <a:buNone/>
-            </a:pPr>
-            <a:r>
-              <a:rPr lang="en-US" sz="1200" dirty="0">
-                <a:solidFill>
-                  <a:srgbClr val="E4E4E7"/>
-                </a:solidFill>
-                <a:latin typeface="Arial" pitchFamily="34" charset="0"/>
-                <a:ea typeface="Arial" pitchFamily="34" charset="-122"/>
-                <a:cs typeface="Arial" pitchFamily="34" charset="-120"/>
-              </a:rPr>
-              <a:t>alternative.me</a:t>
+              <a:t>1,435</a:t>
             </a:r>
             <a:endParaRPr lang="en-US" sz="1200" dirty="0"/>
           </a:p>
@@ -5701,14 +5578,15 @@
 </p:sld>
 </file>
 
-<file path=ppt/slides/slide5.xml><?xml version="1.0" encoding="utf-8"?>
+<file path=ppt/slides/slide6.xml><?xml version="1.0" encoding="utf-8"?>
 <p:sld xmlns:a="http://schemas.openxmlformats.org/drawingml/2006/main" xmlns:r="http://schemas.openxmlformats.org/officeDocument/2006/relationships" xmlns:p="http://schemas.openxmlformats.org/presentationml/2006/main">
-  <p:cSld name="Slide 5">
+  <p:cSld name="Slide 6">
     <p:bg>
       <p:bgPr>
         <a:solidFill>
           <a:srgbClr val="0A0A0F"/>
         </a:solidFill>
+        <a:effectLst/>
       </p:bgPr>
     </p:bg>
     <p:spTree>
@@ -5746,7 +5624,7 @@
           <a:bodyPr wrap="square" lIns="0" tIns="0" rIns="0" bIns="0" rtlCol="0" anchor="ctr"/>
           <a:lstStyle/>
           <a:p>
-            <a:pPr indent="0" marL="0">
+            <a:pPr marL="0" indent="0">
               <a:buNone/>
             </a:pPr>
             <a:r>
@@ -5758,865 +5636,46 @@
                 <a:ea typeface="Arial Black" pitchFamily="34" charset="-122"/>
                 <a:cs typeface="Arial Black" pitchFamily="34" charset="-120"/>
               </a:rPr>
-              <a:t>Model Accuracy</a:t>
+              <a:t>Confusion Matrix</a:t>
             </a:r>
             <a:endParaRPr lang="en-US" sz="3000" dirty="0"/>
-          </a:p>
-        </p:txBody>
-      </p:sp>
-      <p:sp>
-        <p:nvSpPr>
-          <p:cNvPr id="3" name="Text 1"/>
-          <p:cNvSpPr/>
-          <p:nvPr/>
-        </p:nvSpPr>
-        <p:spPr>
-          <a:xfrm>
-            <a:off x="640080" y="731520"/>
-            <a:ext cx="4572000" cy="274320"/>
-          </a:xfrm>
-          <a:prstGeom prst="rect">
-            <a:avLst/>
-          </a:prstGeom>
-          <a:noFill/>
-          <a:ln/>
-        </p:spPr>
-        <p:txBody>
-          <a:bodyPr wrap="square" lIns="0" tIns="0" rIns="0" bIns="0" rtlCol="0" anchor="ctr"/>
-          <a:lstStyle/>
-          <a:p>
-            <a:pPr indent="0" marL="0">
-              <a:buNone/>
-            </a:pPr>
-            <a:r>
-              <a:rPr lang="en-US" sz="1400" dirty="0">
-                <a:solidFill>
-                  <a:srgbClr val="71717A"/>
-                </a:solidFill>
-                <a:latin typeface="Arial" pitchFamily="34" charset="0"/>
-                <a:ea typeface="Arial" pitchFamily="34" charset="-122"/>
-                <a:cs typeface="Arial" pitchFamily="34" charset="-120"/>
-              </a:rPr>
-              <a:t>67.4% on 359 out-of-sample days</a:t>
-            </a:r>
-            <a:endParaRPr lang="en-US" sz="1400" dirty="0"/>
           </a:p>
         </p:txBody>
       </p:sp>
       <p:pic>
         <p:nvPicPr>
-          <p:cNvPr id="4" name="Image 0" descr="preencoded.png">    </p:cNvPr>
+          <p:cNvPr id="3" name="Image 0" descr="preencoded.png"/>
           <p:cNvPicPr>
             <a:picLocks noChangeAspect="1"/>
           </p:cNvPicPr>
           <p:nvPr/>
         </p:nvPicPr>
         <p:blipFill>
-          <a:blip r:embed="rId1"/>
+          <a:blip r:embed="rId3"/>
           <a:stretch>
             <a:fillRect/>
           </a:stretch>
         </p:blipFill>
         <p:spPr>
           <a:xfrm>
-            <a:off x="457200" y="1097280"/>
-            <a:ext cx="5029200" cy="2926080"/>
+            <a:off x="457200" y="914400"/>
+            <a:ext cx="4114800" cy="3291840"/>
           </a:xfrm>
           <a:prstGeom prst="rect">
             <a:avLst/>
           </a:prstGeom>
         </p:spPr>
       </p:pic>
-      <p:sp>
-        <p:nvSpPr>
-          <p:cNvPr id="5" name="Shape 2"/>
-          <p:cNvSpPr/>
-          <p:nvPr/>
-        </p:nvSpPr>
-        <p:spPr>
-          <a:xfrm>
-            <a:off x="5760720" y="1097280"/>
-            <a:ext cx="3017520" cy="3474720"/>
-          </a:xfrm>
-          <a:prstGeom prst="roundRect">
-            <a:avLst>
-              <a:gd name="adj" fmla="val 3030"/>
-            </a:avLst>
-          </a:prstGeom>
-          <a:solidFill>
-            <a:srgbClr val="13131A"/>
-          </a:solidFill>
-          <a:ln/>
-        </p:spPr>
-      </p:sp>
-      <p:sp>
-        <p:nvSpPr>
-          <p:cNvPr id="6" name="Text 3"/>
-          <p:cNvSpPr/>
-          <p:nvPr/>
-        </p:nvSpPr>
-        <p:spPr>
-          <a:xfrm>
-            <a:off x="5943600" y="1188720"/>
-            <a:ext cx="2743200" cy="274320"/>
-          </a:xfrm>
-          <a:prstGeom prst="rect">
-            <a:avLst/>
-          </a:prstGeom>
-          <a:noFill/>
-          <a:ln/>
-        </p:spPr>
-        <p:txBody>
-          <a:bodyPr wrap="square" lIns="0" tIns="0" rIns="0" bIns="0" rtlCol="0" anchor="ctr"/>
-          <a:lstStyle/>
-          <a:p>
-            <a:pPr indent="0" marL="0">
-              <a:buNone/>
-            </a:pPr>
-            <a:r>
-              <a:rPr lang="en-US" sz="1300" b="1" dirty="0">
-                <a:solidFill>
-                  <a:srgbClr val="6C5CE7"/>
-                </a:solidFill>
-                <a:latin typeface="Arial" pitchFamily="34" charset="0"/>
-                <a:ea typeface="Arial" pitchFamily="34" charset="-122"/>
-                <a:cs typeface="Arial" pitchFamily="34" charset="-120"/>
-              </a:rPr>
-              <a:t>Key Metrics</a:t>
-            </a:r>
-            <a:endParaRPr lang="en-US" sz="1300" dirty="0"/>
-          </a:p>
-        </p:txBody>
-      </p:sp>
-      <p:sp>
-        <p:nvSpPr>
-          <p:cNvPr id="7" name="Text 4"/>
-          <p:cNvSpPr/>
-          <p:nvPr/>
-        </p:nvSpPr>
-        <p:spPr>
-          <a:xfrm>
-            <a:off x="5943600" y="1554480"/>
-            <a:ext cx="1371600" cy="274320"/>
-          </a:xfrm>
-          <a:prstGeom prst="rect">
-            <a:avLst/>
-          </a:prstGeom>
-          <a:noFill/>
-          <a:ln/>
-        </p:spPr>
-        <p:txBody>
-          <a:bodyPr wrap="square" lIns="0" tIns="0" rIns="0" bIns="0" rtlCol="0" anchor="ctr"/>
-          <a:lstStyle/>
-          <a:p>
-            <a:pPr indent="0" marL="0">
-              <a:buNone/>
-            </a:pPr>
-            <a:r>
-              <a:rPr lang="en-US" sz="1100" dirty="0">
-                <a:solidFill>
-                  <a:srgbClr val="71717A"/>
-                </a:solidFill>
-                <a:latin typeface="Arial" pitchFamily="34" charset="0"/>
-                <a:ea typeface="Arial" pitchFamily="34" charset="-122"/>
-                <a:cs typeface="Arial" pitchFamily="34" charset="-120"/>
-              </a:rPr>
-              <a:t>Accuracy</a:t>
-            </a:r>
-            <a:endParaRPr lang="en-US" sz="1100" dirty="0"/>
-          </a:p>
-        </p:txBody>
-      </p:sp>
-      <p:sp>
-        <p:nvSpPr>
-          <p:cNvPr id="8" name="Text 5"/>
-          <p:cNvSpPr/>
-          <p:nvPr/>
-        </p:nvSpPr>
-        <p:spPr>
-          <a:xfrm>
-            <a:off x="7315200" y="1554480"/>
-            <a:ext cx="1280160" cy="274320"/>
-          </a:xfrm>
-          <a:prstGeom prst="rect">
-            <a:avLst/>
-          </a:prstGeom>
-          <a:noFill/>
-          <a:ln/>
-        </p:spPr>
-        <p:txBody>
-          <a:bodyPr wrap="square" lIns="0" tIns="0" rIns="0" bIns="0" rtlCol="0" anchor="ctr"/>
-          <a:lstStyle/>
-          <a:p>
-            <a:pPr algn="r" indent="0" marL="0">
-              <a:buNone/>
-            </a:pPr>
-            <a:r>
-              <a:rPr lang="en-US" sz="1200" b="1" dirty="0">
-                <a:solidFill>
-                  <a:srgbClr val="FFFFFF"/>
-                </a:solidFill>
-                <a:latin typeface="Arial" pitchFamily="34" charset="0"/>
-                <a:ea typeface="Arial" pitchFamily="34" charset="-122"/>
-                <a:cs typeface="Arial" pitchFamily="34" charset="-120"/>
-              </a:rPr>
-              <a:t>67.4%</a:t>
-            </a:r>
-            <a:endParaRPr lang="en-US" sz="1200" dirty="0"/>
-          </a:p>
-        </p:txBody>
-      </p:sp>
-      <p:sp>
-        <p:nvSpPr>
-          <p:cNvPr id="9" name="Text 6"/>
-          <p:cNvSpPr/>
-          <p:nvPr/>
-        </p:nvSpPr>
-        <p:spPr>
-          <a:xfrm>
-            <a:off x="5943600" y="1874520"/>
-            <a:ext cx="1371600" cy="274320"/>
-          </a:xfrm>
-          <a:prstGeom prst="rect">
-            <a:avLst/>
-          </a:prstGeom>
-          <a:noFill/>
-          <a:ln/>
-        </p:spPr>
-        <p:txBody>
-          <a:bodyPr wrap="square" lIns="0" tIns="0" rIns="0" bIns="0" rtlCol="0" anchor="ctr"/>
-          <a:lstStyle/>
-          <a:p>
-            <a:pPr indent="0" marL="0">
-              <a:buNone/>
-            </a:pPr>
-            <a:r>
-              <a:rPr lang="en-US" sz="1100" dirty="0">
-                <a:solidFill>
-                  <a:srgbClr val="71717A"/>
-                </a:solidFill>
-                <a:latin typeface="Arial" pitchFamily="34" charset="0"/>
-                <a:ea typeface="Arial" pitchFamily="34" charset="-122"/>
-                <a:cs typeface="Arial" pitchFamily="34" charset="-120"/>
-              </a:rPr>
-              <a:t>Precision</a:t>
-            </a:r>
-            <a:endParaRPr lang="en-US" sz="1100" dirty="0"/>
-          </a:p>
-        </p:txBody>
-      </p:sp>
-      <p:sp>
-        <p:nvSpPr>
-          <p:cNvPr id="10" name="Text 7"/>
-          <p:cNvSpPr/>
-          <p:nvPr/>
-        </p:nvSpPr>
-        <p:spPr>
-          <a:xfrm>
-            <a:off x="7315200" y="1874520"/>
-            <a:ext cx="1280160" cy="274320"/>
-          </a:xfrm>
-          <a:prstGeom prst="rect">
-            <a:avLst/>
-          </a:prstGeom>
-          <a:noFill/>
-          <a:ln/>
-        </p:spPr>
-        <p:txBody>
-          <a:bodyPr wrap="square" lIns="0" tIns="0" rIns="0" bIns="0" rtlCol="0" anchor="ctr"/>
-          <a:lstStyle/>
-          <a:p>
-            <a:pPr algn="r" indent="0" marL="0">
-              <a:buNone/>
-            </a:pPr>
-            <a:r>
-              <a:rPr lang="en-US" sz="1200" b="1" dirty="0">
-                <a:solidFill>
-                  <a:srgbClr val="FFFFFF"/>
-                </a:solidFill>
-                <a:latin typeface="Arial" pitchFamily="34" charset="0"/>
-                <a:ea typeface="Arial" pitchFamily="34" charset="-122"/>
-                <a:cs typeface="Arial" pitchFamily="34" charset="-120"/>
-              </a:rPr>
-              <a:t>67.2%</a:t>
-            </a:r>
-            <a:endParaRPr lang="en-US" sz="1200" dirty="0"/>
-          </a:p>
-        </p:txBody>
-      </p:sp>
-      <p:sp>
-        <p:nvSpPr>
-          <p:cNvPr id="11" name="Text 8"/>
-          <p:cNvSpPr/>
-          <p:nvPr/>
-        </p:nvSpPr>
-        <p:spPr>
-          <a:xfrm>
-            <a:off x="5943600" y="2194560"/>
-            <a:ext cx="1371600" cy="274320"/>
-          </a:xfrm>
-          <a:prstGeom prst="rect">
-            <a:avLst/>
-          </a:prstGeom>
-          <a:noFill/>
-          <a:ln/>
-        </p:spPr>
-        <p:txBody>
-          <a:bodyPr wrap="square" lIns="0" tIns="0" rIns="0" bIns="0" rtlCol="0" anchor="ctr"/>
-          <a:lstStyle/>
-          <a:p>
-            <a:pPr indent="0" marL="0">
-              <a:buNone/>
-            </a:pPr>
-            <a:r>
-              <a:rPr lang="en-US" sz="1100" dirty="0">
-                <a:solidFill>
-                  <a:srgbClr val="71717A"/>
-                </a:solidFill>
-                <a:latin typeface="Arial" pitchFamily="34" charset="0"/>
-                <a:ea typeface="Arial" pitchFamily="34" charset="-122"/>
-                <a:cs typeface="Arial" pitchFamily="34" charset="-120"/>
-              </a:rPr>
-              <a:t>Recall</a:t>
-            </a:r>
-            <a:endParaRPr lang="en-US" sz="1100" dirty="0"/>
-          </a:p>
-        </p:txBody>
-      </p:sp>
-      <p:sp>
-        <p:nvSpPr>
-          <p:cNvPr id="12" name="Text 9"/>
-          <p:cNvSpPr/>
-          <p:nvPr/>
-        </p:nvSpPr>
-        <p:spPr>
-          <a:xfrm>
-            <a:off x="7315200" y="2194560"/>
-            <a:ext cx="1280160" cy="274320"/>
-          </a:xfrm>
-          <a:prstGeom prst="rect">
-            <a:avLst/>
-          </a:prstGeom>
-          <a:noFill/>
-          <a:ln/>
-        </p:spPr>
-        <p:txBody>
-          <a:bodyPr wrap="square" lIns="0" tIns="0" rIns="0" bIns="0" rtlCol="0" anchor="ctr"/>
-          <a:lstStyle/>
-          <a:p>
-            <a:pPr algn="r" indent="0" marL="0">
-              <a:buNone/>
-            </a:pPr>
-            <a:r>
-              <a:rPr lang="en-US" sz="1200" b="1" dirty="0">
-                <a:solidFill>
-                  <a:srgbClr val="FFFFFF"/>
-                </a:solidFill>
-                <a:latin typeface="Arial" pitchFamily="34" charset="0"/>
-                <a:ea typeface="Arial" pitchFamily="34" charset="-122"/>
-                <a:cs typeface="Arial" pitchFamily="34" charset="-120"/>
-              </a:rPr>
-              <a:t>66.9%</a:t>
-            </a:r>
-            <a:endParaRPr lang="en-US" sz="1200" dirty="0"/>
-          </a:p>
-        </p:txBody>
-      </p:sp>
-      <p:sp>
-        <p:nvSpPr>
-          <p:cNvPr id="13" name="Text 10"/>
-          <p:cNvSpPr/>
-          <p:nvPr/>
-        </p:nvSpPr>
-        <p:spPr>
-          <a:xfrm>
-            <a:off x="5943600" y="2514600"/>
-            <a:ext cx="1371600" cy="274320"/>
-          </a:xfrm>
-          <a:prstGeom prst="rect">
-            <a:avLst/>
-          </a:prstGeom>
-          <a:noFill/>
-          <a:ln/>
-        </p:spPr>
-        <p:txBody>
-          <a:bodyPr wrap="square" lIns="0" tIns="0" rIns="0" bIns="0" rtlCol="0" anchor="ctr"/>
-          <a:lstStyle/>
-          <a:p>
-            <a:pPr indent="0" marL="0">
-              <a:buNone/>
-            </a:pPr>
-            <a:r>
-              <a:rPr lang="en-US" sz="1100" dirty="0">
-                <a:solidFill>
-                  <a:srgbClr val="71717A"/>
-                </a:solidFill>
-                <a:latin typeface="Arial" pitchFamily="34" charset="0"/>
-                <a:ea typeface="Arial" pitchFamily="34" charset="-122"/>
-                <a:cs typeface="Arial" pitchFamily="34" charset="-120"/>
-              </a:rPr>
-              <a:t>F1 Score</a:t>
-            </a:r>
-            <a:endParaRPr lang="en-US" sz="1100" dirty="0"/>
-          </a:p>
-        </p:txBody>
-      </p:sp>
-      <p:sp>
-        <p:nvSpPr>
-          <p:cNvPr id="14" name="Text 11"/>
-          <p:cNvSpPr/>
-          <p:nvPr/>
-        </p:nvSpPr>
-        <p:spPr>
-          <a:xfrm>
-            <a:off x="7315200" y="2514600"/>
-            <a:ext cx="1280160" cy="274320"/>
-          </a:xfrm>
-          <a:prstGeom prst="rect">
-            <a:avLst/>
-          </a:prstGeom>
-          <a:noFill/>
-          <a:ln/>
-        </p:spPr>
-        <p:txBody>
-          <a:bodyPr wrap="square" lIns="0" tIns="0" rIns="0" bIns="0" rtlCol="0" anchor="ctr"/>
-          <a:lstStyle/>
-          <a:p>
-            <a:pPr algn="r" indent="0" marL="0">
-              <a:buNone/>
-            </a:pPr>
-            <a:r>
-              <a:rPr lang="en-US" sz="1200" b="1" dirty="0">
-                <a:solidFill>
-                  <a:srgbClr val="FFFFFF"/>
-                </a:solidFill>
-                <a:latin typeface="Arial" pitchFamily="34" charset="0"/>
-                <a:ea typeface="Arial" pitchFamily="34" charset="-122"/>
-                <a:cs typeface="Arial" pitchFamily="34" charset="-120"/>
-              </a:rPr>
-              <a:t>67.0%</a:t>
-            </a:r>
-            <a:endParaRPr lang="en-US" sz="1200" dirty="0"/>
-          </a:p>
-        </p:txBody>
-      </p:sp>
-      <p:sp>
-        <p:nvSpPr>
-          <p:cNvPr id="15" name="Text 12"/>
-          <p:cNvSpPr/>
-          <p:nvPr/>
-        </p:nvSpPr>
-        <p:spPr>
-          <a:xfrm>
-            <a:off x="5943600" y="2834640"/>
-            <a:ext cx="1371600" cy="274320"/>
-          </a:xfrm>
-          <a:prstGeom prst="rect">
-            <a:avLst/>
-          </a:prstGeom>
-          <a:noFill/>
-          <a:ln/>
-        </p:spPr>
-        <p:txBody>
-          <a:bodyPr wrap="square" lIns="0" tIns="0" rIns="0" bIns="0" rtlCol="0" anchor="ctr"/>
-          <a:lstStyle/>
-          <a:p>
-            <a:pPr indent="0" marL="0">
-              <a:buNone/>
-            </a:pPr>
-            <a:r>
-              <a:rPr lang="en-US" sz="1100" dirty="0">
-                <a:solidFill>
-                  <a:srgbClr val="71717A"/>
-                </a:solidFill>
-                <a:latin typeface="Arial" pitchFamily="34" charset="0"/>
-                <a:ea typeface="Arial" pitchFamily="34" charset="-122"/>
-                <a:cs typeface="Arial" pitchFamily="34" charset="-120"/>
-              </a:rPr>
-              <a:t>AUC-ROC</a:t>
-            </a:r>
-            <a:endParaRPr lang="en-US" sz="1100" dirty="0"/>
-          </a:p>
-        </p:txBody>
-      </p:sp>
-      <p:sp>
-        <p:nvSpPr>
-          <p:cNvPr id="16" name="Text 13"/>
-          <p:cNvSpPr/>
-          <p:nvPr/>
-        </p:nvSpPr>
-        <p:spPr>
-          <a:xfrm>
-            <a:off x="7315200" y="2834640"/>
-            <a:ext cx="1280160" cy="274320"/>
-          </a:xfrm>
-          <a:prstGeom prst="rect">
-            <a:avLst/>
-          </a:prstGeom>
-          <a:noFill/>
-          <a:ln/>
-        </p:spPr>
-        <p:txBody>
-          <a:bodyPr wrap="square" lIns="0" tIns="0" rIns="0" bIns="0" rtlCol="0" anchor="ctr"/>
-          <a:lstStyle/>
-          <a:p>
-            <a:pPr algn="r" indent="0" marL="0">
-              <a:buNone/>
-            </a:pPr>
-            <a:r>
-              <a:rPr lang="en-US" sz="1200" b="1" dirty="0">
-                <a:solidFill>
-                  <a:srgbClr val="FFFFFF"/>
-                </a:solidFill>
-                <a:latin typeface="Arial" pitchFamily="34" charset="0"/>
-                <a:ea typeface="Arial" pitchFamily="34" charset="-122"/>
-                <a:cs typeface="Arial" pitchFamily="34" charset="-120"/>
-              </a:rPr>
-              <a:t>0.7365</a:t>
-            </a:r>
-            <a:endParaRPr lang="en-US" sz="1200" dirty="0"/>
-          </a:p>
-        </p:txBody>
-      </p:sp>
-      <p:sp>
-        <p:nvSpPr>
-          <p:cNvPr id="17" name="Text 14"/>
-          <p:cNvSpPr/>
-          <p:nvPr/>
-        </p:nvSpPr>
-        <p:spPr>
-          <a:xfrm>
-            <a:off x="5943600" y="3154680"/>
-            <a:ext cx="1371600" cy="274320"/>
-          </a:xfrm>
-          <a:prstGeom prst="rect">
-            <a:avLst/>
-          </a:prstGeom>
-          <a:noFill/>
-          <a:ln/>
-        </p:spPr>
-        <p:txBody>
-          <a:bodyPr wrap="square" lIns="0" tIns="0" rIns="0" bIns="0" rtlCol="0" anchor="ctr"/>
-          <a:lstStyle/>
-          <a:p>
-            <a:pPr indent="0" marL="0">
-              <a:buNone/>
-            </a:pPr>
-            <a:r>
-              <a:rPr lang="en-US" sz="1100" dirty="0">
-                <a:solidFill>
-                  <a:srgbClr val="71717A"/>
-                </a:solidFill>
-                <a:latin typeface="Arial" pitchFamily="34" charset="0"/>
-                <a:ea typeface="Arial" pitchFamily="34" charset="-122"/>
-                <a:cs typeface="Arial" pitchFamily="34" charset="-120"/>
-              </a:rPr>
-              <a:t>MCC</a:t>
-            </a:r>
-            <a:endParaRPr lang="en-US" sz="1100" dirty="0"/>
-          </a:p>
-        </p:txBody>
-      </p:sp>
-      <p:sp>
-        <p:nvSpPr>
-          <p:cNvPr id="18" name="Text 15"/>
-          <p:cNvSpPr/>
-          <p:nvPr/>
-        </p:nvSpPr>
-        <p:spPr>
-          <a:xfrm>
-            <a:off x="7315200" y="3154680"/>
-            <a:ext cx="1280160" cy="274320"/>
-          </a:xfrm>
-          <a:prstGeom prst="rect">
-            <a:avLst/>
-          </a:prstGeom>
-          <a:noFill/>
-          <a:ln/>
-        </p:spPr>
-        <p:txBody>
-          <a:bodyPr wrap="square" lIns="0" tIns="0" rIns="0" bIns="0" rtlCol="0" anchor="ctr"/>
-          <a:lstStyle/>
-          <a:p>
-            <a:pPr algn="r" indent="0" marL="0">
-              <a:buNone/>
-            </a:pPr>
-            <a:r>
-              <a:rPr lang="en-US" sz="1200" b="1" dirty="0">
-                <a:solidFill>
-                  <a:srgbClr val="FFFFFF"/>
-                </a:solidFill>
-                <a:latin typeface="Arial" pitchFamily="34" charset="0"/>
-                <a:ea typeface="Arial" pitchFamily="34" charset="-122"/>
-                <a:cs typeface="Arial" pitchFamily="34" charset="-120"/>
-              </a:rPr>
-              <a:t>0.348</a:t>
-            </a:r>
-            <a:endParaRPr lang="en-US" sz="1200" dirty="0"/>
-          </a:p>
-        </p:txBody>
-      </p:sp>
-      <p:sp>
-        <p:nvSpPr>
-          <p:cNvPr id="19" name="Text 16"/>
-          <p:cNvSpPr/>
-          <p:nvPr/>
-        </p:nvSpPr>
-        <p:spPr>
-          <a:xfrm>
-            <a:off x="5943600" y="3474720"/>
-            <a:ext cx="1371600" cy="274320"/>
-          </a:xfrm>
-          <a:prstGeom prst="rect">
-            <a:avLst/>
-          </a:prstGeom>
-          <a:noFill/>
-          <a:ln/>
-        </p:spPr>
-        <p:txBody>
-          <a:bodyPr wrap="square" lIns="0" tIns="0" rIns="0" bIns="0" rtlCol="0" anchor="ctr"/>
-          <a:lstStyle/>
-          <a:p>
-            <a:pPr indent="0" marL="0">
-              <a:buNone/>
-            </a:pPr>
-            <a:r>
-              <a:rPr lang="en-US" sz="1100" dirty="0">
-                <a:solidFill>
-                  <a:srgbClr val="71717A"/>
-                </a:solidFill>
-                <a:latin typeface="Arial" pitchFamily="34" charset="0"/>
-                <a:ea typeface="Arial" pitchFamily="34" charset="-122"/>
-                <a:cs typeface="Arial" pitchFamily="34" charset="-120"/>
-              </a:rPr>
-              <a:t>Test Days</a:t>
-            </a:r>
-            <a:endParaRPr lang="en-US" sz="1100" dirty="0"/>
-          </a:p>
-        </p:txBody>
-      </p:sp>
-      <p:sp>
-        <p:nvSpPr>
-          <p:cNvPr id="20" name="Text 17"/>
-          <p:cNvSpPr/>
-          <p:nvPr/>
-        </p:nvSpPr>
-        <p:spPr>
-          <a:xfrm>
-            <a:off x="7315200" y="3474720"/>
-            <a:ext cx="1280160" cy="274320"/>
-          </a:xfrm>
-          <a:prstGeom prst="rect">
-            <a:avLst/>
-          </a:prstGeom>
-          <a:noFill/>
-          <a:ln/>
-        </p:spPr>
-        <p:txBody>
-          <a:bodyPr wrap="square" lIns="0" tIns="0" rIns="0" bIns="0" rtlCol="0" anchor="ctr"/>
-          <a:lstStyle/>
-          <a:p>
-            <a:pPr algn="r" indent="0" marL="0">
-              <a:buNone/>
-            </a:pPr>
-            <a:r>
-              <a:rPr lang="en-US" sz="1200" b="1" dirty="0">
-                <a:solidFill>
-                  <a:srgbClr val="FFFFFF"/>
-                </a:solidFill>
-                <a:latin typeface="Arial" pitchFamily="34" charset="0"/>
-                <a:ea typeface="Arial" pitchFamily="34" charset="-122"/>
-                <a:cs typeface="Arial" pitchFamily="34" charset="-120"/>
-              </a:rPr>
-              <a:t>359</a:t>
-            </a:r>
-            <a:endParaRPr lang="en-US" sz="1200" dirty="0"/>
-          </a:p>
-        </p:txBody>
-      </p:sp>
-      <p:sp>
-        <p:nvSpPr>
-          <p:cNvPr id="21" name="Text 18"/>
-          <p:cNvSpPr/>
-          <p:nvPr/>
-        </p:nvSpPr>
-        <p:spPr>
-          <a:xfrm>
-            <a:off x="5943600" y="3794760"/>
-            <a:ext cx="1371600" cy="274320"/>
-          </a:xfrm>
-          <a:prstGeom prst="rect">
-            <a:avLst/>
-          </a:prstGeom>
-          <a:noFill/>
-          <a:ln/>
-        </p:spPr>
-        <p:txBody>
-          <a:bodyPr wrap="square" lIns="0" tIns="0" rIns="0" bIns="0" rtlCol="0" anchor="ctr"/>
-          <a:lstStyle/>
-          <a:p>
-            <a:pPr indent="0" marL="0">
-              <a:buNone/>
-            </a:pPr>
-            <a:r>
-              <a:rPr lang="en-US" sz="1100" dirty="0">
-                <a:solidFill>
-                  <a:srgbClr val="71717A"/>
-                </a:solidFill>
-                <a:latin typeface="Arial" pitchFamily="34" charset="0"/>
-                <a:ea typeface="Arial" pitchFamily="34" charset="-122"/>
-                <a:cs typeface="Arial" pitchFamily="34" charset="-120"/>
-              </a:rPr>
-              <a:t>Train Days</a:t>
-            </a:r>
-            <a:endParaRPr lang="en-US" sz="1100" dirty="0"/>
-          </a:p>
-        </p:txBody>
-      </p:sp>
-      <p:sp>
-        <p:nvSpPr>
-          <p:cNvPr id="22" name="Text 19"/>
-          <p:cNvSpPr/>
-          <p:nvPr/>
-        </p:nvSpPr>
-        <p:spPr>
-          <a:xfrm>
-            <a:off x="7315200" y="3794760"/>
-            <a:ext cx="1280160" cy="274320"/>
-          </a:xfrm>
-          <a:prstGeom prst="rect">
-            <a:avLst/>
-          </a:prstGeom>
-          <a:noFill/>
-          <a:ln/>
-        </p:spPr>
-        <p:txBody>
-          <a:bodyPr wrap="square" lIns="0" tIns="0" rIns="0" bIns="0" rtlCol="0" anchor="ctr"/>
-          <a:lstStyle/>
-          <a:p>
-            <a:pPr algn="r" indent="0" marL="0">
-              <a:buNone/>
-            </a:pPr>
-            <a:r>
-              <a:rPr lang="en-US" sz="1200" b="1" dirty="0">
-                <a:solidFill>
-                  <a:srgbClr val="FFFFFF"/>
-                </a:solidFill>
-                <a:latin typeface="Arial" pitchFamily="34" charset="0"/>
-                <a:ea typeface="Arial" pitchFamily="34" charset="-122"/>
-                <a:cs typeface="Arial" pitchFamily="34" charset="-120"/>
-              </a:rPr>
-              <a:t>1,435</a:t>
-            </a:r>
-            <a:endParaRPr lang="en-US" sz="1200" dirty="0"/>
-          </a:p>
-        </p:txBody>
-      </p:sp>
-    </p:spTree>
-  </p:cSld>
-  <p:clrMapOvr>
-    <a:masterClrMapping/>
-  </p:clrMapOvr>
-</p:sld>
-</file>
-
-<file path=ppt/slides/slide6.xml><?xml version="1.0" encoding="utf-8"?>
-<p:sld xmlns:a="http://schemas.openxmlformats.org/drawingml/2006/main" xmlns:r="http://schemas.openxmlformats.org/officeDocument/2006/relationships" xmlns:p="http://schemas.openxmlformats.org/presentationml/2006/main">
-  <p:cSld name="Slide 6">
-    <p:bg>
-      <p:bgPr>
-        <a:solidFill>
-          <a:srgbClr val="0A0A0F"/>
-        </a:solidFill>
-      </p:bgPr>
-    </p:bg>
-    <p:spTree>
-      <p:nvGrpSpPr>
-        <p:cNvPr id="1" name=""/>
-        <p:cNvGrpSpPr/>
-        <p:nvPr/>
-      </p:nvGrpSpPr>
-      <p:grpSpPr>
-        <a:xfrm>
-          <a:off x="0" y="0"/>
-          <a:ext cx="0" cy="0"/>
-          <a:chOff x="0" y="0"/>
-          <a:chExt cx="0" cy="0"/>
-        </a:xfrm>
-      </p:grpSpPr>
-      <p:sp>
-        <p:nvSpPr>
-          <p:cNvPr id="2" name="Text 0"/>
-          <p:cNvSpPr/>
-          <p:nvPr/>
-        </p:nvSpPr>
-        <p:spPr>
-          <a:xfrm>
-            <a:off x="640080" y="274320"/>
-            <a:ext cx="4572000" cy="457200"/>
-          </a:xfrm>
-          <a:prstGeom prst="rect">
-            <a:avLst/>
-          </a:prstGeom>
-          <a:noFill/>
-          <a:ln/>
-        </p:spPr>
-        <p:txBody>
-          <a:bodyPr wrap="square" lIns="0" tIns="0" rIns="0" bIns="0" rtlCol="0" anchor="ctr"/>
-          <a:lstStyle/>
-          <a:p>
-            <a:pPr indent="0" marL="0">
-              <a:buNone/>
-            </a:pPr>
-            <a:r>
-              <a:rPr lang="en-US" sz="3000" b="1" dirty="0">
-                <a:solidFill>
-                  <a:srgbClr val="FFFFFF"/>
-                </a:solidFill>
-                <a:latin typeface="Arial Black" pitchFamily="34" charset="0"/>
-                <a:ea typeface="Arial Black" pitchFamily="34" charset="-122"/>
-                <a:cs typeface="Arial Black" pitchFamily="34" charset="-120"/>
-              </a:rPr>
-              <a:t>Confusion Matrix</a:t>
-            </a:r>
-            <a:endParaRPr lang="en-US" sz="3000" dirty="0"/>
-          </a:p>
-        </p:txBody>
-      </p:sp>
       <p:pic>
         <p:nvPicPr>
-          <p:cNvPr id="3" name="Image 0" descr="preencoded.png">    </p:cNvPr>
+          <p:cNvPr id="4" name="Image 1" descr="preencoded.png"/>
           <p:cNvPicPr>
             <a:picLocks noChangeAspect="1"/>
           </p:cNvPicPr>
           <p:nvPr/>
         </p:nvPicPr>
         <p:blipFill>
-          <a:blip r:embed="rId1"/>
-          <a:stretch>
-            <a:fillRect/>
-          </a:stretch>
-        </p:blipFill>
-        <p:spPr>
-          <a:xfrm>
-            <a:off x="457200" y="914400"/>
-            <a:ext cx="4114800" cy="3291840"/>
-          </a:xfrm>
-          <a:prstGeom prst="rect">
-            <a:avLst/>
-          </a:prstGeom>
-        </p:spPr>
-      </p:pic>
-      <p:pic>
-        <p:nvPicPr>
-          <p:cNvPr id="4" name="Image 1" descr="preencoded.png">    </p:cNvPr>
-          <p:cNvPicPr>
-            <a:picLocks noChangeAspect="1"/>
-          </p:cNvPicPr>
-          <p:nvPr/>
-        </p:nvPicPr>
-        <p:blipFill>
-          <a:blip r:embed="rId2"/>
+          <a:blip r:embed="rId4"/>
           <a:stretch>
             <a:fillRect/>
           </a:stretch>
@@ -6647,6 +5706,7 @@
         <a:solidFill>
           <a:srgbClr val="0A0A0F"/>
         </a:solidFill>
+        <a:effectLst/>
       </p:bgPr>
     </p:bg>
     <p:spTree>
@@ -6684,7 +5744,7 @@
           <a:bodyPr wrap="square" lIns="0" tIns="0" rIns="0" bIns="0" rtlCol="0" anchor="ctr"/>
           <a:lstStyle/>
           <a:p>
-            <a:pPr indent="0" marL="0">
+            <a:pPr marL="0" indent="0">
               <a:buNone/>
             </a:pPr>
             <a:r>
@@ -6723,7 +5783,7 @@
           <a:bodyPr wrap="square" lIns="0" tIns="0" rIns="0" bIns="0" rtlCol="0" anchor="ctr"/>
           <a:lstStyle/>
           <a:p>
-            <a:pPr indent="0" marL="0">
+            <a:pPr marL="0" indent="0">
               <a:buNone/>
             </a:pPr>
             <a:r>
@@ -6743,14 +5803,14 @@
       </p:sp>
       <p:pic>
         <p:nvPicPr>
-          <p:cNvPr id="4" name="Image 0" descr="preencoded.png">    </p:cNvPr>
+          <p:cNvPr id="4" name="Image 0" descr="preencoded.png"/>
           <p:cNvPicPr>
             <a:picLocks noChangeAspect="1"/>
           </p:cNvPicPr>
           <p:nvPr/>
         </p:nvPicPr>
         <p:blipFill>
-          <a:blip r:embed="rId1"/>
+          <a:blip r:embed="rId3"/>
           <a:stretch>
             <a:fillRect/>
           </a:stretch>
@@ -6758,7 +5818,7 @@
         <p:spPr>
           <a:xfrm>
             <a:off x="274320" y="1097280"/>
-            <a:ext cx="8595360" cy="3657600"/>
+            <a:ext cx="6530517" cy="3657600"/>
           </a:xfrm>
           <a:prstGeom prst="rect">
             <a:avLst/>
@@ -6781,6 +5841,7 @@
         <a:solidFill>
           <a:srgbClr val="0A0A0F"/>
         </a:solidFill>
+        <a:effectLst/>
       </p:bgPr>
     </p:bg>
     <p:spTree>
@@ -6818,7 +5879,7 @@
           <a:bodyPr wrap="square" lIns="0" tIns="0" rIns="0" bIns="0" rtlCol="0" anchor="ctr"/>
           <a:lstStyle/>
           <a:p>
-            <a:pPr indent="0" marL="0">
+            <a:pPr marL="0" indent="0">
               <a:buNone/>
             </a:pPr>
             <a:r>
@@ -6857,7 +5918,7 @@
           <a:bodyPr wrap="square" lIns="0" tIns="0" rIns="0" bIns="0" rtlCol="0" anchor="ctr"/>
           <a:lstStyle/>
           <a:p>
-            <a:pPr indent="0" marL="0">
+            <a:pPr marL="0" indent="0">
               <a:buNone/>
             </a:pPr>
             <a:r>
@@ -6877,14 +5938,14 @@
       </p:sp>
       <p:pic>
         <p:nvPicPr>
-          <p:cNvPr id="4" name="Image 0" descr="preencoded.png">    </p:cNvPr>
+          <p:cNvPr id="4" name="Image 0" descr="preencoded.png"/>
           <p:cNvPicPr>
             <a:picLocks noChangeAspect="1"/>
           </p:cNvPicPr>
           <p:nvPr/>
         </p:nvPicPr>
         <p:blipFill>
-          <a:blip r:embed="rId1"/>
+          <a:blip r:embed="rId3"/>
           <a:stretch>
             <a:fillRect/>
           </a:stretch>
@@ -6892,7 +5953,7 @@
         <p:spPr>
           <a:xfrm>
             <a:off x="182880" y="1005840"/>
-            <a:ext cx="8778240" cy="3931920"/>
+            <a:ext cx="7830589" cy="3931920"/>
           </a:xfrm>
           <a:prstGeom prst="rect">
             <a:avLst/>
@@ -6915,6 +5976,7 @@
         <a:solidFill>
           <a:srgbClr val="0A0A0F"/>
         </a:solidFill>
+        <a:effectLst/>
       </p:bgPr>
     </p:bg>
     <p:spTree>
@@ -6952,7 +6014,7 @@
           <a:bodyPr wrap="square" lIns="0" tIns="0" rIns="0" bIns="0" rtlCol="0" anchor="ctr"/>
           <a:lstStyle/>
           <a:p>
-            <a:pPr indent="0" marL="0">
+            <a:pPr marL="0" indent="0">
               <a:buNone/>
             </a:pPr>
             <a:r>
@@ -7013,7 +6075,7 @@
           <a:bodyPr wrap="square" lIns="0" tIns="0" rIns="0" bIns="0" rtlCol="0" anchor="ctr"/>
           <a:lstStyle/>
           <a:p>
-            <a:pPr indent="0" marL="0">
+            <a:pPr marL="0" indent="0">
               <a:buNone/>
             </a:pPr>
             <a:r>
@@ -7072,7 +6134,7 @@
           <a:bodyPr wrap="square" lIns="0" tIns="0" rIns="0" bIns="0" rtlCol="0" anchor="ctr"/>
           <a:lstStyle/>
           <a:p>
-            <a:pPr indent="0" marL="0">
+            <a:pPr marL="0" indent="0">
               <a:buNone/>
             </a:pPr>
             <a:r>
@@ -7111,7 +6173,7 @@
           <a:bodyPr wrap="square" lIns="0" tIns="0" rIns="0" bIns="0" rtlCol="0" anchor="ctr"/>
           <a:lstStyle/>
           <a:p>
-            <a:pPr indent="0" marL="0">
+            <a:pPr marL="0" indent="0">
               <a:buNone/>
             </a:pPr>
             <a:r>
@@ -7170,7 +6232,7 @@
           <a:bodyPr wrap="square" lIns="0" tIns="0" rIns="0" bIns="0" rtlCol="0" anchor="ctr"/>
           <a:lstStyle/>
           <a:p>
-            <a:pPr indent="0" marL="0">
+            <a:pPr marL="0" indent="0">
               <a:buNone/>
             </a:pPr>
             <a:r>
@@ -7209,7 +6271,7 @@
           <a:bodyPr wrap="square" lIns="0" tIns="0" rIns="0" bIns="0" rtlCol="0" anchor="ctr"/>
           <a:lstStyle/>
           <a:p>
-            <a:pPr indent="0" marL="0">
+            <a:pPr marL="0" indent="0">
               <a:buNone/>
             </a:pPr>
             <a:r>
@@ -7268,7 +6330,7 @@
           <a:bodyPr wrap="square" lIns="0" tIns="0" rIns="0" bIns="0" rtlCol="0" anchor="ctr"/>
           <a:lstStyle/>
           <a:p>
-            <a:pPr indent="0" marL="0">
+            <a:pPr marL="0" indent="0">
               <a:buNone/>
             </a:pPr>
             <a:r>
@@ -7307,7 +6369,7 @@
           <a:bodyPr wrap="square" lIns="0" tIns="0" rIns="0" bIns="0" rtlCol="0" anchor="ctr"/>
           <a:lstStyle/>
           <a:p>
-            <a:pPr indent="0" marL="0">
+            <a:pPr marL="0" indent="0">
               <a:buNone/>
             </a:pPr>
             <a:r>
@@ -7319,7 +6381,7 @@
                 <a:ea typeface="Arial" pitchFamily="34" charset="-122"/>
                 <a:cs typeface="Arial" pitchFamily="34" charset="-120"/>
               </a:rPr>
-              <a:t>Same 6-signal architecture per coin. BGeometrics supports ETH on-chain. Polymarket has ETH/SOL markets.</a:t>
+              <a:t>Same 6-signal architecture per coin. B</a:t>
             </a:r>
             <a:endParaRPr lang="en-US" sz="1000" dirty="0"/>
           </a:p>
@@ -7366,7 +6428,7 @@
           <a:bodyPr wrap="square" lIns="0" tIns="0" rIns="0" bIns="0" rtlCol="0" anchor="ctr"/>
           <a:lstStyle/>
           <a:p>
-            <a:pPr indent="0" marL="0">
+            <a:pPr marL="0" indent="0">
               <a:buNone/>
             </a:pPr>
             <a:r>
@@ -7405,7 +6467,7 @@
           <a:bodyPr wrap="square" lIns="0" tIns="0" rIns="0" bIns="0" rtlCol="0" anchor="ctr"/>
           <a:lstStyle/>
           <a:p>
-            <a:pPr indent="0" marL="0">
+            <a:pPr marL="0" indent="0">
               <a:buNone/>
             </a:pPr>
             <a:r>
@@ -7431,7 +6493,7 @@
         </p:nvSpPr>
         <p:spPr>
           <a:xfrm>
-            <a:off x="4846320" y="1005840"/>
+            <a:off x="4846320" y="1097280"/>
             <a:ext cx="3931920" cy="3840480"/>
           </a:xfrm>
           <a:prstGeom prst="roundRect">
@@ -7466,7 +6528,7 @@
           <a:bodyPr wrap="square" lIns="0" tIns="0" rIns="0" bIns="0" rtlCol="0" anchor="ctr"/>
           <a:lstStyle/>
           <a:p>
-            <a:pPr indent="0" marL="0">
+            <a:pPr marL="0" indent="0">
               <a:buNone/>
             </a:pPr>
             <a:r>
@@ -7505,7 +6567,7 @@
           <a:bodyPr wrap="square" lIns="0" tIns="0" rIns="0" bIns="0" rtlCol="0" anchor="ctr"/>
           <a:lstStyle/>
           <a:p>
-            <a:pPr indent="0" marL="0">
+            <a:pPr marL="0" indent="0">
               <a:buNone/>
             </a:pPr>
             <a:r>
@@ -7544,7 +6606,7 @@
           <a:bodyPr wrap="square" lIns="0" tIns="0" rIns="0" bIns="0" rtlCol="0" anchor="ctr"/>
           <a:lstStyle/>
           <a:p>
-            <a:pPr algn="r" indent="0" marL="0">
+            <a:pPr marL="0" indent="0" algn="r">
               <a:buNone/>
             </a:pPr>
             <a:r>
@@ -7583,7 +6645,7 @@
           <a:bodyPr wrap="square" lIns="0" tIns="0" rIns="0" bIns="0" rtlCol="0" anchor="ctr"/>
           <a:lstStyle/>
           <a:p>
-            <a:pPr indent="0" marL="0">
+            <a:pPr marL="0" indent="0">
               <a:buNone/>
             </a:pPr>
             <a:r>
@@ -7645,7 +6707,7 @@
           <a:bodyPr wrap="square" lIns="0" tIns="0" rIns="0" bIns="0" rtlCol="0" anchor="ctr"/>
           <a:lstStyle/>
           <a:p>
-            <a:pPr indent="0" marL="0">
+            <a:pPr marL="0" indent="0">
               <a:buNone/>
             </a:pPr>
             <a:r>
@@ -7684,7 +6746,7 @@
           <a:bodyPr wrap="square" lIns="0" tIns="0" rIns="0" bIns="0" rtlCol="0" anchor="ctr"/>
           <a:lstStyle/>
           <a:p>
-            <a:pPr algn="r" indent="0" marL="0">
+            <a:pPr marL="0" indent="0" algn="r">
               <a:buNone/>
             </a:pPr>
             <a:r>
@@ -7723,7 +6785,7 @@
           <a:bodyPr wrap="square" lIns="0" tIns="0" rIns="0" bIns="0" rtlCol="0" anchor="ctr"/>
           <a:lstStyle/>
           <a:p>
-            <a:pPr indent="0" marL="0">
+            <a:pPr marL="0" indent="0">
               <a:buNone/>
             </a:pPr>
             <a:r>
@@ -7785,7 +6847,7 @@
           <a:bodyPr wrap="square" lIns="0" tIns="0" rIns="0" bIns="0" rtlCol="0" anchor="ctr"/>
           <a:lstStyle/>
           <a:p>
-            <a:pPr indent="0" marL="0">
+            <a:pPr marL="0" indent="0">
               <a:buNone/>
             </a:pPr>
             <a:r>
@@ -7824,7 +6886,7 @@
           <a:bodyPr wrap="square" lIns="0" tIns="0" rIns="0" bIns="0" rtlCol="0" anchor="ctr"/>
           <a:lstStyle/>
           <a:p>
-            <a:pPr indent="0" marL="0">
+            <a:pPr marL="0" indent="0">
               <a:buNone/>
             </a:pPr>
             <a:r>
@@ -7863,7 +6925,7 @@
           <a:bodyPr wrap="square" lIns="0" tIns="0" rIns="0" bIns="0" rtlCol="0" anchor="ctr"/>
           <a:lstStyle/>
           <a:p>
-            <a:pPr indent="0" marL="0">
+            <a:pPr marL="0" indent="0">
               <a:buNone/>
             </a:pPr>
             <a:r>
@@ -7902,7 +6964,7 @@
           <a:bodyPr wrap="square" lIns="0" tIns="0" rIns="0" bIns="0" rtlCol="0" anchor="ctr"/>
           <a:lstStyle/>
           <a:p>
-            <a:pPr indent="0" marL="0">
+            <a:pPr marL="0" indent="0">
               <a:buNone/>
             </a:pPr>
             <a:r>
@@ -7941,7 +7003,7 @@
           <a:bodyPr wrap="square" lIns="0" tIns="0" rIns="0" bIns="0" rtlCol="0" anchor="ctr"/>
           <a:lstStyle/>
           <a:p>
-            <a:pPr indent="0" marL="0">
+            <a:pPr marL="0" indent="0">
               <a:buNone/>
             </a:pPr>
             <a:r>
@@ -7980,7 +7042,7 @@
           <a:bodyPr wrap="square" lIns="0" tIns="0" rIns="0" bIns="0" rtlCol="0" anchor="ctr"/>
           <a:lstStyle/>
           <a:p>
-            <a:pPr indent="0" marL="0">
+            <a:pPr marL="0" indent="0">
               <a:buNone/>
             </a:pPr>
             <a:r>
@@ -8019,7 +7081,7 @@
           <a:bodyPr wrap="square" lIns="0" tIns="0" rIns="0" bIns="0" rtlCol="0" anchor="ctr"/>
           <a:lstStyle/>
           <a:p>
-            <a:pPr indent="0" marL="0">
+            <a:pPr marL="0" indent="0">
               <a:buNone/>
             </a:pPr>
             <a:r>
@@ -8045,7 +7107,7 @@
         </p:nvSpPr>
         <p:spPr>
           <a:xfrm>
-            <a:off x="5029200" y="4572000"/>
+            <a:off x="5029200" y="4658868"/>
             <a:ext cx="3474720" cy="182880"/>
           </a:xfrm>
           <a:prstGeom prst="rect">
@@ -8058,7 +7120,7 @@
           <a:bodyPr wrap="square" lIns="0" tIns="0" rIns="0" bIns="0" rtlCol="0" anchor="ctr"/>
           <a:lstStyle/>
           <a:p>
-            <a:pPr indent="0" marL="0">
+            <a:pPr marL="0" indent="0">
               <a:buNone/>
             </a:pPr>
             <a:r>
@@ -8377,4 +7439,299 @@
     </a:ext>
   </a:extLst>
 </a:theme>
+</file>
+
+<file path=ppt/theme/theme2.xml><?xml version="1.0" encoding="utf-8"?>
+<a:theme xmlns:a="http://schemas.openxmlformats.org/drawingml/2006/main" name="Office Theme">
+  <a:themeElements>
+    <a:clrScheme name="Office">
+      <a:dk1>
+        <a:sysClr val="windowText" lastClr="000000"/>
+      </a:dk1>
+      <a:lt1>
+        <a:sysClr val="window" lastClr="FFFFFF"/>
+      </a:lt1>
+      <a:dk2>
+        <a:srgbClr val="44546A"/>
+      </a:dk2>
+      <a:lt2>
+        <a:srgbClr val="E7E6E6"/>
+      </a:lt2>
+      <a:accent1>
+        <a:srgbClr val="4472C4"/>
+      </a:accent1>
+      <a:accent2>
+        <a:srgbClr val="ED7D31"/>
+      </a:accent2>
+      <a:accent3>
+        <a:srgbClr val="A5A5A5"/>
+      </a:accent3>
+      <a:accent4>
+        <a:srgbClr val="FFC000"/>
+      </a:accent4>
+      <a:accent5>
+        <a:srgbClr val="5B9BD5"/>
+      </a:accent5>
+      <a:accent6>
+        <a:srgbClr val="70AD47"/>
+      </a:accent6>
+      <a:hlink>
+        <a:srgbClr val="0563C1"/>
+      </a:hlink>
+      <a:folHlink>
+        <a:srgbClr val="954F72"/>
+      </a:folHlink>
+    </a:clrScheme>
+    <a:fontScheme name="Office">
+      <a:majorFont>
+        <a:latin typeface="Calibri Light" panose="020F0302020204030204"/>
+        <a:ea typeface=""/>
+        <a:cs typeface=""/>
+        <a:font script="Jpan" typeface="游ゴシック Light"/>
+        <a:font script="Hang" typeface="맑은 고딕"/>
+        <a:font script="Hans" typeface="等线 Light"/>
+        <a:font script="Hant" typeface="新細明體"/>
+        <a:font script="Arab" typeface="Times New Roman"/>
+        <a:font script="Hebr" typeface="Times New Roman"/>
+        <a:font script="Thai" typeface="Angsana New"/>
+        <a:font script="Ethi" typeface="Nyala"/>
+        <a:font script="Beng" typeface="Vrinda"/>
+        <a:font script="Gujr" typeface="Shruti"/>
+        <a:font script="Khmr" typeface="MoolBoran"/>
+        <a:font script="Knda" typeface="Tunga"/>
+        <a:font script="Guru" typeface="Raavi"/>
+        <a:font script="Cans" typeface="Euphemia"/>
+        <a:font script="Cher" typeface="Plantagenet Cherokee"/>
+        <a:font script="Yiii" typeface="Microsoft Yi Baiti"/>
+        <a:font script="Tibt" typeface="Microsoft Himalaya"/>
+        <a:font script="Thaa" typeface="MV Boli"/>
+        <a:font script="Deva" typeface="Mangal"/>
+        <a:font script="Telu" typeface="Gautami"/>
+        <a:font script="Taml" typeface="Latha"/>
+        <a:font script="Syrc" typeface="Estrangelo Edessa"/>
+        <a:font script="Orya" typeface="Kalinga"/>
+        <a:font script="Mlym" typeface="Kartika"/>
+        <a:font script="Laoo" typeface="DokChampa"/>
+        <a:font script="Sinh" typeface="Iskoola Pota"/>
+        <a:font script="Mong" typeface="Mongolian Baiti"/>
+        <a:font script="Viet" typeface="Times New Roman"/>
+        <a:font script="Uigh" typeface="Microsoft Uighur"/>
+        <a:font script="Geor" typeface="Sylfaen"/>
+        <a:font script="Armn" typeface="Arial"/>
+        <a:font script="Bugi" typeface="Leelawadee UI"/>
+        <a:font script="Bopo" typeface="Microsoft JhengHei"/>
+        <a:font script="Java" typeface="Javanese Text"/>
+        <a:font script="Lisu" typeface="Segoe UI"/>
+        <a:font script="Mymr" typeface="Myanmar Text"/>
+        <a:font script="Nkoo" typeface="Ebrima"/>
+        <a:font script="Olck" typeface="Nirmala UI"/>
+        <a:font script="Osma" typeface="Ebrima"/>
+        <a:font script="Phag" typeface="Phagspa"/>
+        <a:font script="Syrn" typeface="Estrangelo Edessa"/>
+        <a:font script="Syrj" typeface="Estrangelo Edessa"/>
+        <a:font script="Syre" typeface="Estrangelo Edessa"/>
+        <a:font script="Sora" typeface="Nirmala UI"/>
+        <a:font script="Tale" typeface="Microsoft Tai Le"/>
+        <a:font script="Talu" typeface="Microsoft New Tai Lue"/>
+        <a:font script="Tfng" typeface="Ebrima"/>
+      </a:majorFont>
+      <a:minorFont>
+        <a:latin typeface="Calibri" panose="020F0502020204030204"/>
+        <a:ea typeface=""/>
+        <a:cs typeface=""/>
+        <a:font script="Jpan" typeface="游ゴシック"/>
+        <a:font script="Hang" typeface="맑은 고딕"/>
+        <a:font script="Hans" typeface="等线"/>
+        <a:font script="Hant" typeface="新細明體"/>
+        <a:font script="Arab" typeface="Arial"/>
+        <a:font script="Hebr" typeface="Arial"/>
+        <a:font script="Thai" typeface="Cordia New"/>
+        <a:font script="Ethi" typeface="Nyala"/>
+        <a:font script="Beng" typeface="Vrinda"/>
+        <a:font script="Gujr" typeface="Shruti"/>
+        <a:font script="Khmr" typeface="DaunPenh"/>
+        <a:font script="Knda" typeface="Tunga"/>
+        <a:font script="Guru" typeface="Raavi"/>
+        <a:font script="Cans" typeface="Euphemia"/>
+        <a:font script="Cher" typeface="Plantagenet Cherokee"/>
+        <a:font script="Yiii" typeface="Microsoft Yi Baiti"/>
+        <a:font script="Tibt" typeface="Microsoft Himalaya"/>
+        <a:font script="Thaa" typeface="MV Boli"/>
+        <a:font script="Deva" typeface="Mangal"/>
+        <a:font script="Telu" typeface="Gautami"/>
+        <a:font script="Taml" typeface="Latha"/>
+        <a:font script="Syrc" typeface="Estrangelo Edessa"/>
+        <a:font script="Orya" typeface="Kalinga"/>
+        <a:font script="Mlym" typeface="Kartika"/>
+        <a:font script="Laoo" typeface="DokChampa"/>
+        <a:font script="Sinh" typeface="Iskoola Pota"/>
+        <a:font script="Mong" typeface="Mongolian Baiti"/>
+        <a:font script="Viet" typeface="Arial"/>
+        <a:font script="Uigh" typeface="Microsoft Uighur"/>
+        <a:font script="Geor" typeface="Sylfaen"/>
+        <a:font script="Armn" typeface="Arial"/>
+        <a:font script="Bugi" typeface="Leelawadee UI"/>
+        <a:font script="Bopo" typeface="Microsoft JhengHei"/>
+        <a:font script="Java" typeface="Javanese Text"/>
+        <a:font script="Lisu" typeface="Segoe UI"/>
+        <a:font script="Mymr" typeface="Myanmar Text"/>
+        <a:font script="Nkoo" typeface="Ebrima"/>
+        <a:font script="Olck" typeface="Nirmala UI"/>
+        <a:font script="Osma" typeface="Ebrima"/>
+        <a:font script="Phag" typeface="Phagspa"/>
+        <a:font script="Syrn" typeface="Estrangelo Edessa"/>
+        <a:font script="Syrj" typeface="Estrangelo Edessa"/>
+        <a:font script="Syre" typeface="Estrangelo Edessa"/>
+        <a:font script="Sora" typeface="Nirmala UI"/>
+        <a:font script="Tale" typeface="Microsoft Tai Le"/>
+        <a:font script="Talu" typeface="Microsoft New Tai Lue"/>
+        <a:font script="Tfng" typeface="Ebrima"/>
+      </a:minorFont>
+    </a:fontScheme>
+    <a:fmtScheme name="Office">
+      <a:fillStyleLst>
+        <a:solidFill>
+          <a:schemeClr val="phClr"/>
+        </a:solidFill>
+        <a:gradFill rotWithShape="1">
+          <a:gsLst>
+            <a:gs pos="0">
+              <a:schemeClr val="phClr">
+                <a:lumMod val="110000"/>
+                <a:satMod val="105000"/>
+                <a:tint val="67000"/>
+              </a:schemeClr>
+            </a:gs>
+            <a:gs pos="50000">
+              <a:schemeClr val="phClr">
+                <a:lumMod val="105000"/>
+                <a:satMod val="103000"/>
+                <a:tint val="73000"/>
+              </a:schemeClr>
+            </a:gs>
+            <a:gs pos="100000">
+              <a:schemeClr val="phClr">
+                <a:lumMod val="105000"/>
+                <a:satMod val="109000"/>
+                <a:tint val="81000"/>
+              </a:schemeClr>
+            </a:gs>
+          </a:gsLst>
+          <a:lin ang="5400000" scaled="0"/>
+        </a:gradFill>
+        <a:gradFill rotWithShape="1">
+          <a:gsLst>
+            <a:gs pos="0">
+              <a:schemeClr val="phClr">
+                <a:satMod val="103000"/>
+                <a:lumMod val="102000"/>
+                <a:tint val="94000"/>
+              </a:schemeClr>
+            </a:gs>
+            <a:gs pos="50000">
+              <a:schemeClr val="phClr">
+                <a:satMod val="110000"/>
+                <a:lumMod val="100000"/>
+                <a:shade val="100000"/>
+              </a:schemeClr>
+            </a:gs>
+            <a:gs pos="100000">
+              <a:schemeClr val="phClr">
+                <a:lumMod val="99000"/>
+                <a:satMod val="120000"/>
+                <a:shade val="78000"/>
+              </a:schemeClr>
+            </a:gs>
+          </a:gsLst>
+          <a:lin ang="5400000" scaled="0"/>
+        </a:gradFill>
+      </a:fillStyleLst>
+      <a:lnStyleLst>
+        <a:ln w="6350" cap="flat" cmpd="sng" algn="ctr">
+          <a:solidFill>
+            <a:schemeClr val="phClr"/>
+          </a:solidFill>
+          <a:prstDash val="solid"/>
+          <a:miter lim="800000"/>
+        </a:ln>
+        <a:ln w="12700" cap="flat" cmpd="sng" algn="ctr">
+          <a:solidFill>
+            <a:schemeClr val="phClr"/>
+          </a:solidFill>
+          <a:prstDash val="solid"/>
+          <a:miter lim="800000"/>
+        </a:ln>
+        <a:ln w="19050" cap="flat" cmpd="sng" algn="ctr">
+          <a:solidFill>
+            <a:schemeClr val="phClr"/>
+          </a:solidFill>
+          <a:prstDash val="solid"/>
+          <a:miter lim="800000"/>
+        </a:ln>
+      </a:lnStyleLst>
+      <a:effectStyleLst>
+        <a:effectStyle>
+          <a:effectLst/>
+        </a:effectStyle>
+        <a:effectStyle>
+          <a:effectLst/>
+        </a:effectStyle>
+        <a:effectStyle>
+          <a:effectLst>
+            <a:outerShdw blurRad="57150" dist="19050" dir="5400000" algn="ctr" rotWithShape="0">
+              <a:srgbClr val="000000">
+                <a:alpha val="63000"/>
+              </a:srgbClr>
+            </a:outerShdw>
+          </a:effectLst>
+        </a:effectStyle>
+      </a:effectStyleLst>
+      <a:bgFillStyleLst>
+        <a:solidFill>
+          <a:schemeClr val="phClr"/>
+        </a:solidFill>
+        <a:solidFill>
+          <a:schemeClr val="phClr">
+            <a:tint val="95000"/>
+            <a:satMod val="170000"/>
+          </a:schemeClr>
+        </a:solidFill>
+        <a:gradFill rotWithShape="1">
+          <a:gsLst>
+            <a:gs pos="0">
+              <a:schemeClr val="phClr">
+                <a:tint val="93000"/>
+                <a:satMod val="150000"/>
+                <a:shade val="98000"/>
+                <a:lumMod val="102000"/>
+              </a:schemeClr>
+            </a:gs>
+            <a:gs pos="50000">
+              <a:schemeClr val="phClr">
+                <a:tint val="98000"/>
+                <a:satMod val="130000"/>
+                <a:shade val="90000"/>
+                <a:lumMod val="103000"/>
+              </a:schemeClr>
+            </a:gs>
+            <a:gs pos="100000">
+              <a:schemeClr val="phClr">
+                <a:shade val="63000"/>
+                <a:satMod val="120000"/>
+              </a:schemeClr>
+            </a:gs>
+          </a:gsLst>
+          <a:lin ang="5400000" scaled="0"/>
+        </a:gradFill>
+      </a:bgFillStyleLst>
+    </a:fmtScheme>
+  </a:themeElements>
+  <a:objectDefaults/>
+  <a:extraClrSchemeLst/>
+  <a:extLst>
+    <a:ext uri="{05A4C25C-085E-4340-85A3-A5531E510DB2}">
+      <thm15:themeFamily xmlns:thm15="http://schemas.microsoft.com/office/thememl/2012/main" name="Office Theme" id="{62F939B6-93AF-4DB8-9C6B-D6C7DFDC589F}" vid="{4A3C46E8-61CC-4603-A589-7422A47A8E4A}"/>
+    </a:ext>
+  </a:extLst>
+</a:theme>
 </file>